--- a/teaching/Texas/PA 397C/Lecture Notes/Review.pptx
+++ b/teaching/Texas/PA 397C/Lecture Notes/Review.pptx
@@ -1,38 +1,36 @@
 
 <file path=ppt/presentation.xml><?xml version="1.0" encoding="utf-8"?>
-<p:presentation xmlns:a="http://schemas.openxmlformats.org/drawingml/2006/main" xmlns:r="http://schemas.openxmlformats.org/officeDocument/2006/relationships" xmlns:mc="http://schemas.openxmlformats.org/markup-compatibility/2006" xmlns:mv="urn:schemas-microsoft-com:mac:vml" xmlns:p="http://schemas.openxmlformats.org/presentationml/2006/main" xmlns:c="http://schemas.openxmlformats.org/drawingml/2006/chart" xmlns:dgm="http://schemas.openxmlformats.org/drawingml/2006/diagram" xmlns:o="urn:schemas-microsoft-com:office:office" xmlns:v="urn:schemas-microsoft-com:vml" xmlns:pvml="urn:schemas-microsoft-com:office:powerpoint" xmlns:com="http://schemas.openxmlformats.org/drawingml/2006/compatibility" xmlns:p14="http://schemas.microsoft.com/office/powerpoint/2010/main" xmlns:p15="http://schemas.microsoft.com/office/powerpoint/2012/main" xmlns:ahyp="http://schemas.microsoft.com/office/drawing/2018/hyperlinkcolor" autoCompressPictures="0" embedTrueTypeFonts="1" strictFirstAndLastChars="0" saveSubsetFonts="1">
+<p:presentation xmlns:a="http://schemas.openxmlformats.org/drawingml/2006/main" xmlns:r="http://schemas.openxmlformats.org/officeDocument/2006/relationships" xmlns:p="http://schemas.openxmlformats.org/presentationml/2006/main" strictFirstAndLastChars="0" embedTrueTypeFonts="1" saveSubsetFonts="1" autoCompressPictures="0">
   <p:sldMasterIdLst>
-    <p:sldMasterId id="2147483659" r:id="rId4"/>
+    <p:sldMasterId id="2147483659" r:id="rId1"/>
   </p:sldMasterIdLst>
   <p:notesMasterIdLst>
-    <p:notesMasterId r:id="rId5"/>
+    <p:notesMasterId r:id="rId11"/>
   </p:notesMasterIdLst>
   <p:sldIdLst>
-    <p:sldId id="256" r:id="rId6"/>
-    <p:sldId id="257" r:id="rId7"/>
-    <p:sldId id="258" r:id="rId8"/>
-    <p:sldId id="259" r:id="rId9"/>
-    <p:sldId id="260" r:id="rId10"/>
-    <p:sldId id="261" r:id="rId11"/>
-    <p:sldId id="262" r:id="rId12"/>
-    <p:sldId id="263" r:id="rId13"/>
-    <p:sldId id="264" r:id="rId14"/>
-    <p:sldId id="265" r:id="rId15"/>
-    <p:sldId id="266" r:id="rId16"/>
+    <p:sldId id="256" r:id="rId2"/>
+    <p:sldId id="257" r:id="rId3"/>
+    <p:sldId id="258" r:id="rId4"/>
+    <p:sldId id="259" r:id="rId5"/>
+    <p:sldId id="260" r:id="rId6"/>
+    <p:sldId id="261" r:id="rId7"/>
+    <p:sldId id="262" r:id="rId8"/>
+    <p:sldId id="263" r:id="rId9"/>
+    <p:sldId id="264" r:id="rId10"/>
   </p:sldIdLst>
-  <p:sldSz cy="5143500" cx="9144000"/>
+  <p:sldSz cx="9144000" cy="5143500" type="screen16x9"/>
   <p:notesSz cx="6858000" cy="9144000"/>
   <p:embeddedFontLst>
     <p:embeddedFont>
-      <p:font typeface="Proxima Nova"/>
-      <p:regular r:id="rId17"/>
-      <p:bold r:id="rId18"/>
-      <p:italic r:id="rId19"/>
-      <p:boldItalic r:id="rId20"/>
+      <p:font typeface="Proxima Nova" panose="020B0604020202020204" charset="0"/>
+      <p:regular r:id="rId12"/>
+      <p:bold r:id="rId13"/>
+      <p:italic r:id="rId14"/>
+      <p:boldItalic r:id="rId15"/>
     </p:embeddedFont>
   </p:embeddedFontLst>
   <p:defaultTextStyle>
-    <a:defPPr lvl="0" marR="0" rtl="0" algn="l">
+    <a:defPPr marR="0" lvl="0" algn="l" rtl="0">
       <a:lnSpc>
         <a:spcPct val="100000"/>
       </a:lnSpc>
@@ -43,7 +41,7 @@
         <a:spcPts val="0"/>
       </a:spcAft>
     </a:defPPr>
-    <a:lvl1pPr lvl="0" marR="0" rtl="0" algn="l">
+    <a:lvl1pPr marR="0" lvl="0" algn="l" rtl="0">
       <a:lnSpc>
         <a:spcPct val="100000"/>
       </a:lnSpc>
@@ -57,7 +55,7 @@
         <a:srgbClr val="000000"/>
       </a:buClr>
       <a:buFont typeface="Arial"/>
-      <a:defRPr b="0" i="0" sz="1400" u="none" cap="none" strike="noStrike">
+      <a:defRPr sz="1400" b="0" i="0" u="none" strike="noStrike" cap="none" spc="0">
         <a:solidFill>
           <a:srgbClr val="000000"/>
         </a:solidFill>
@@ -67,7 +65,7 @@
         <a:sym typeface="Arial"/>
       </a:defRPr>
     </a:lvl1pPr>
-    <a:lvl2pPr lvl="1" marR="0" rtl="0" algn="l">
+    <a:lvl2pPr marR="0" lvl="1" algn="l" rtl="0">
       <a:lnSpc>
         <a:spcPct val="100000"/>
       </a:lnSpc>
@@ -81,7 +79,7 @@
         <a:srgbClr val="000000"/>
       </a:buClr>
       <a:buFont typeface="Arial"/>
-      <a:defRPr b="0" i="0" sz="1400" u="none" cap="none" strike="noStrike">
+      <a:defRPr sz="1400" b="0" i="0" u="none" strike="noStrike" cap="none" spc="0">
         <a:solidFill>
           <a:srgbClr val="000000"/>
         </a:solidFill>
@@ -91,7 +89,7 @@
         <a:sym typeface="Arial"/>
       </a:defRPr>
     </a:lvl2pPr>
-    <a:lvl3pPr lvl="2" marR="0" rtl="0" algn="l">
+    <a:lvl3pPr marR="0" lvl="2" algn="l" rtl="0">
       <a:lnSpc>
         <a:spcPct val="100000"/>
       </a:lnSpc>
@@ -105,7 +103,7 @@
         <a:srgbClr val="000000"/>
       </a:buClr>
       <a:buFont typeface="Arial"/>
-      <a:defRPr b="0" i="0" sz="1400" u="none" cap="none" strike="noStrike">
+      <a:defRPr sz="1400" b="0" i="0" u="none" strike="noStrike" cap="none" spc="0">
         <a:solidFill>
           <a:srgbClr val="000000"/>
         </a:solidFill>
@@ -115,7 +113,7 @@
         <a:sym typeface="Arial"/>
       </a:defRPr>
     </a:lvl3pPr>
-    <a:lvl4pPr lvl="3" marR="0" rtl="0" algn="l">
+    <a:lvl4pPr marR="0" lvl="3" algn="l" rtl="0">
       <a:lnSpc>
         <a:spcPct val="100000"/>
       </a:lnSpc>
@@ -129,7 +127,7 @@
         <a:srgbClr val="000000"/>
       </a:buClr>
       <a:buFont typeface="Arial"/>
-      <a:defRPr b="0" i="0" sz="1400" u="none" cap="none" strike="noStrike">
+      <a:defRPr sz="1400" b="0" i="0" u="none" strike="noStrike" cap="none" spc="0">
         <a:solidFill>
           <a:srgbClr val="000000"/>
         </a:solidFill>
@@ -139,7 +137,7 @@
         <a:sym typeface="Arial"/>
       </a:defRPr>
     </a:lvl4pPr>
-    <a:lvl5pPr lvl="4" marR="0" rtl="0" algn="l">
+    <a:lvl5pPr marR="0" lvl="4" algn="l" rtl="0">
       <a:lnSpc>
         <a:spcPct val="100000"/>
       </a:lnSpc>
@@ -153,7 +151,7 @@
         <a:srgbClr val="000000"/>
       </a:buClr>
       <a:buFont typeface="Arial"/>
-      <a:defRPr b="0" i="0" sz="1400" u="none" cap="none" strike="noStrike">
+      <a:defRPr sz="1400" b="0" i="0" u="none" strike="noStrike" cap="none" spc="0">
         <a:solidFill>
           <a:srgbClr val="000000"/>
         </a:solidFill>
@@ -163,7 +161,7 @@
         <a:sym typeface="Arial"/>
       </a:defRPr>
     </a:lvl5pPr>
-    <a:lvl6pPr lvl="5" marR="0" rtl="0" algn="l">
+    <a:lvl6pPr marR="0" lvl="5" algn="l" rtl="0">
       <a:lnSpc>
         <a:spcPct val="100000"/>
       </a:lnSpc>
@@ -177,7 +175,7 @@
         <a:srgbClr val="000000"/>
       </a:buClr>
       <a:buFont typeface="Arial"/>
-      <a:defRPr b="0" i="0" sz="1400" u="none" cap="none" strike="noStrike">
+      <a:defRPr sz="1400" b="0" i="0" u="none" strike="noStrike" cap="none" spc="0">
         <a:solidFill>
           <a:srgbClr val="000000"/>
         </a:solidFill>
@@ -187,7 +185,7 @@
         <a:sym typeface="Arial"/>
       </a:defRPr>
     </a:lvl6pPr>
-    <a:lvl7pPr lvl="6" marR="0" rtl="0" algn="l">
+    <a:lvl7pPr marR="0" lvl="6" algn="l" rtl="0">
       <a:lnSpc>
         <a:spcPct val="100000"/>
       </a:lnSpc>
@@ -201,7 +199,7 @@
         <a:srgbClr val="000000"/>
       </a:buClr>
       <a:buFont typeface="Arial"/>
-      <a:defRPr b="0" i="0" sz="1400" u="none" cap="none" strike="noStrike">
+      <a:defRPr sz="1400" b="0" i="0" u="none" strike="noStrike" cap="none" spc="0">
         <a:solidFill>
           <a:srgbClr val="000000"/>
         </a:solidFill>
@@ -211,7 +209,7 @@
         <a:sym typeface="Arial"/>
       </a:defRPr>
     </a:lvl7pPr>
-    <a:lvl8pPr lvl="7" marR="0" rtl="0" algn="l">
+    <a:lvl8pPr marR="0" lvl="7" algn="l" rtl="0">
       <a:lnSpc>
         <a:spcPct val="100000"/>
       </a:lnSpc>
@@ -225,7 +223,7 @@
         <a:srgbClr val="000000"/>
       </a:buClr>
       <a:buFont typeface="Arial"/>
-      <a:defRPr b="0" i="0" sz="1400" u="none" cap="none" strike="noStrike">
+      <a:defRPr sz="1400" b="0" i="0" u="none" strike="noStrike" cap="none" spc="0">
         <a:solidFill>
           <a:srgbClr val="000000"/>
         </a:solidFill>
@@ -235,7 +233,7 @@
         <a:sym typeface="Arial"/>
       </a:defRPr>
     </a:lvl8pPr>
-    <a:lvl9pPr lvl="8" marR="0" rtl="0" algn="l">
+    <a:lvl9pPr marR="0" lvl="8" algn="l" rtl="0">
       <a:lnSpc>
         <a:spcPct val="100000"/>
       </a:lnSpc>
@@ -249,7 +247,7 @@
         <a:srgbClr val="000000"/>
       </a:buClr>
       <a:buFont typeface="Arial"/>
-      <a:defRPr b="0" i="0" sz="1400" u="none" cap="none" strike="noStrike">
+      <a:defRPr sz="1400" b="0" i="0" u="none" strike="noStrike" cap="none" spc="0">
         <a:solidFill>
           <a:srgbClr val="000000"/>
         </a:solidFill>
@@ -262,7 +260,7 @@
   </p:defaultTextStyle>
   <p:extLst>
     <p:ext uri="{EFAFB233-063F-42B5-8137-9DF3F51BA10A}">
-      <p15:sldGuideLst>
+      <p15:sldGuideLst xmlns:p15="http://schemas.microsoft.com/office/powerpoint/2012/main">
         <p15:guide id="1" orient="horz" pos="1620">
           <p15:clr>
             <a:srgbClr val="A4A3A4"/>
@@ -280,11 +278,16 @@
 </file>
 
 <file path=ppt/notesMasters/notesMaster1.xml><?xml version="1.0" encoding="utf-8"?>
-<p:notesMaster xmlns:a="http://schemas.openxmlformats.org/drawingml/2006/main" xmlns:r="http://schemas.openxmlformats.org/officeDocument/2006/relationships" xmlns:mc="http://schemas.openxmlformats.org/markup-compatibility/2006" xmlns:mv="urn:schemas-microsoft-com:mac:vml" xmlns:p="http://schemas.openxmlformats.org/presentationml/2006/main" xmlns:c="http://schemas.openxmlformats.org/drawingml/2006/chart" xmlns:dgm="http://schemas.openxmlformats.org/drawingml/2006/diagram" xmlns:o="urn:schemas-microsoft-com:office:office" xmlns:v="urn:schemas-microsoft-com:vml" xmlns:pvml="urn:schemas-microsoft-com:office:powerpoint" xmlns:com="http://schemas.openxmlformats.org/drawingml/2006/compatibility" xmlns:p14="http://schemas.microsoft.com/office/powerpoint/2010/main" xmlns:p15="http://schemas.microsoft.com/office/powerpoint/2012/main" xmlns:ahyp="http://schemas.microsoft.com/office/drawing/2018/hyperlinkcolor">
+<p:notesMaster xmlns:a="http://schemas.openxmlformats.org/drawingml/2006/main" xmlns:r="http://schemas.openxmlformats.org/officeDocument/2006/relationships" xmlns:p="http://schemas.openxmlformats.org/presentationml/2006/main">
   <p:cSld>
+    <p:bg>
+      <p:bgRef idx="1001">
+        <a:schemeClr val="bg1"/>
+      </p:bgRef>
+    </p:bg>
     <p:spTree>
       <p:nvGrpSpPr>
-        <p:cNvPr id="2" name="Shape 2"/>
+        <p:cNvPr id="1" name="Shape 2"/>
         <p:cNvGrpSpPr/>
         <p:nvPr/>
       </p:nvGrpSpPr>
@@ -299,9 +302,11 @@
       <p:sp>
         <p:nvSpPr>
           <p:cNvPr id="3" name="Google Shape;3;n"/>
-          <p:cNvSpPr/>
+          <p:cNvSpPr>
+            <a:spLocks noGrp="1" noRot="1" noChangeAspect="1"/>
+          </p:cNvSpPr>
           <p:nvPr>
-            <p:ph idx="2" type="sldImg"/>
+            <p:ph type="sldImg" idx="2"/>
           </p:nvPr>
         </p:nvSpPr>
         <p:spPr>
@@ -310,9 +315,13 @@
             <a:ext cx="6096075" cy="3429000"/>
           </a:xfrm>
           <a:custGeom>
-            <a:rect b="b" l="l" r="r" t="t"/>
+            <a:avLst/>
+            <a:gdLst/>
+            <a:ahLst/>
+            <a:cxnLst/>
+            <a:rect l="l" t="t" r="r" b="b"/>
             <a:pathLst>
-              <a:path extrusionOk="0" h="120000" w="120000">
+              <a:path w="120000" h="120000" extrusionOk="0">
                 <a:moveTo>
                   <a:pt x="0" y="0"/>
                 </a:moveTo>
@@ -330,23 +339,25 @@
             </a:pathLst>
           </a:custGeom>
           <a:noFill/>
-          <a:ln cap="flat" cmpd="sng" w="9525">
+          <a:ln w="9525" cap="flat" cmpd="sng">
             <a:solidFill>
               <a:srgbClr val="000000"/>
             </a:solidFill>
             <a:prstDash val="solid"/>
             <a:round/>
-            <a:headEnd len="sm" w="sm" type="none"/>
-            <a:tailEnd len="sm" w="sm" type="none"/>
+            <a:headEnd type="none" w="sm" len="sm"/>
+            <a:tailEnd type="none" w="sm" len="sm"/>
           </a:ln>
         </p:spPr>
       </p:sp>
       <p:sp>
         <p:nvSpPr>
           <p:cNvPr id="4" name="Google Shape;4;n"/>
-          <p:cNvSpPr txBox="1"/>
+          <p:cNvSpPr txBox="1">
+            <a:spLocks noGrp="1"/>
+          </p:cNvSpPr>
           <p:nvPr>
-            <p:ph idx="1" type="body"/>
+            <p:ph type="body" idx="1"/>
           </p:nvPr>
         </p:nvSpPr>
         <p:spPr>
@@ -363,11 +374,11 @@
           </a:ln>
         </p:spPr>
         <p:txBody>
-          <a:bodyPr anchorCtr="0" anchor="t" bIns="91425" lIns="91425" spcFirstLastPara="1" rIns="91425" wrap="square" tIns="91425">
+          <a:bodyPr spcFirstLastPara="1" wrap="square" lIns="91425" tIns="91425" rIns="91425" bIns="91425" anchor="t" anchorCtr="0">
             <a:noAutofit/>
           </a:bodyPr>
           <a:lstStyle>
-            <a:lvl1pPr indent="-298450" lvl="0" marL="457200">
+            <a:lvl1pPr marL="457200" lvl="0" indent="-298450">
               <a:spcBef>
                 <a:spcPts val="0"/>
               </a:spcBef>
@@ -378,7 +389,7 @@
               <a:buChar char="●"/>
               <a:defRPr sz="1100"/>
             </a:lvl1pPr>
-            <a:lvl2pPr indent="-298450" lvl="1" marL="914400">
+            <a:lvl2pPr marL="914400" lvl="1" indent="-298450">
               <a:spcBef>
                 <a:spcPts val="0"/>
               </a:spcBef>
@@ -389,7 +400,7 @@
               <a:buChar char="○"/>
               <a:defRPr sz="1100"/>
             </a:lvl2pPr>
-            <a:lvl3pPr indent="-298450" lvl="2" marL="1371600">
+            <a:lvl3pPr marL="1371600" lvl="2" indent="-298450">
               <a:spcBef>
                 <a:spcPts val="0"/>
               </a:spcBef>
@@ -400,7 +411,7 @@
               <a:buChar char="■"/>
               <a:defRPr sz="1100"/>
             </a:lvl3pPr>
-            <a:lvl4pPr indent="-298450" lvl="3" marL="1828800">
+            <a:lvl4pPr marL="1828800" lvl="3" indent="-298450">
               <a:spcBef>
                 <a:spcPts val="0"/>
               </a:spcBef>
@@ -411,7 +422,7 @@
               <a:buChar char="●"/>
               <a:defRPr sz="1100"/>
             </a:lvl4pPr>
-            <a:lvl5pPr indent="-298450" lvl="4" marL="2286000">
+            <a:lvl5pPr marL="2286000" lvl="4" indent="-298450">
               <a:spcBef>
                 <a:spcPts val="0"/>
               </a:spcBef>
@@ -422,7 +433,7 @@
               <a:buChar char="○"/>
               <a:defRPr sz="1100"/>
             </a:lvl5pPr>
-            <a:lvl6pPr indent="-298450" lvl="5" marL="2743200">
+            <a:lvl6pPr marL="2743200" lvl="5" indent="-298450">
               <a:spcBef>
                 <a:spcPts val="0"/>
               </a:spcBef>
@@ -433,7 +444,7 @@
               <a:buChar char="■"/>
               <a:defRPr sz="1100"/>
             </a:lvl6pPr>
-            <a:lvl7pPr indent="-298450" lvl="6" marL="3200400">
+            <a:lvl7pPr marL="3200400" lvl="6" indent="-298450">
               <a:spcBef>
                 <a:spcPts val="0"/>
               </a:spcBef>
@@ -444,7 +455,7 @@
               <a:buChar char="●"/>
               <a:defRPr sz="1100"/>
             </a:lvl7pPr>
-            <a:lvl8pPr indent="-298450" lvl="7" marL="3657600">
+            <a:lvl8pPr marL="3657600" lvl="7" indent="-298450">
               <a:spcBef>
                 <a:spcPts val="0"/>
               </a:spcBef>
@@ -455,7 +466,7 @@
               <a:buChar char="○"/>
               <a:defRPr sz="1100"/>
             </a:lvl8pPr>
-            <a:lvl9pPr indent="-298450" lvl="8" marL="4114800">
+            <a:lvl9pPr marL="4114800" lvl="8" indent="-298450">
               <a:spcBef>
                 <a:spcPts val="0"/>
               </a:spcBef>
@@ -467,14 +478,16 @@
               <a:defRPr sz="1100"/>
             </a:lvl9pPr>
           </a:lstStyle>
-          <a:p/>
+          <a:p>
+            <a:endParaRPr/>
+          </a:p>
         </p:txBody>
       </p:sp>
     </p:spTree>
   </p:cSld>
-  <p:clrMap accent1="accent1" accent2="accent2" accent3="accent3" accent4="accent4" accent5="accent5" accent6="accent6" bg1="lt1" bg2="dk2" tx1="dk1" tx2="lt2" folHlink="folHlink" hlink="hlink"/>
+  <p:clrMap bg1="lt1" tx1="dk1" bg2="dk2" tx2="lt2" accent1="accent1" accent2="accent2" accent3="accent3" accent4="accent4" accent5="accent5" accent6="accent6" hlink="hlink" folHlink="folHlink"/>
   <p:notesStyle>
-    <a:defPPr lvl="0" marR="0" rtl="0" algn="l">
+    <a:defPPr marR="0" lvl="0" algn="l" rtl="0">
       <a:lnSpc>
         <a:spcPct val="100000"/>
       </a:lnSpc>
@@ -485,7 +498,7 @@
         <a:spcPts val="0"/>
       </a:spcAft>
     </a:defPPr>
-    <a:lvl1pPr lvl="0" marR="0" rtl="0" algn="l">
+    <a:lvl1pPr marR="0" lvl="0" algn="l" rtl="0">
       <a:lnSpc>
         <a:spcPct val="100000"/>
       </a:lnSpc>
@@ -499,7 +512,7 @@
         <a:srgbClr val="000000"/>
       </a:buClr>
       <a:buFont typeface="Arial"/>
-      <a:defRPr b="0" i="0" sz="1400" u="none" cap="none" strike="noStrike">
+      <a:defRPr sz="1400" b="0" i="0" u="none" strike="noStrike" cap="none" spc="0">
         <a:solidFill>
           <a:srgbClr val="000000"/>
         </a:solidFill>
@@ -509,7 +522,7 @@
         <a:sym typeface="Arial"/>
       </a:defRPr>
     </a:lvl1pPr>
-    <a:lvl2pPr lvl="1" marR="0" rtl="0" algn="l">
+    <a:lvl2pPr marR="0" lvl="1" algn="l" rtl="0">
       <a:lnSpc>
         <a:spcPct val="100000"/>
       </a:lnSpc>
@@ -523,7 +536,7 @@
         <a:srgbClr val="000000"/>
       </a:buClr>
       <a:buFont typeface="Arial"/>
-      <a:defRPr b="0" i="0" sz="1400" u="none" cap="none" strike="noStrike">
+      <a:defRPr sz="1400" b="0" i="0" u="none" strike="noStrike" cap="none" spc="0">
         <a:solidFill>
           <a:srgbClr val="000000"/>
         </a:solidFill>
@@ -533,7 +546,7 @@
         <a:sym typeface="Arial"/>
       </a:defRPr>
     </a:lvl2pPr>
-    <a:lvl3pPr lvl="2" marR="0" rtl="0" algn="l">
+    <a:lvl3pPr marR="0" lvl="2" algn="l" rtl="0">
       <a:lnSpc>
         <a:spcPct val="100000"/>
       </a:lnSpc>
@@ -547,7 +560,7 @@
         <a:srgbClr val="000000"/>
       </a:buClr>
       <a:buFont typeface="Arial"/>
-      <a:defRPr b="0" i="0" sz="1400" u="none" cap="none" strike="noStrike">
+      <a:defRPr sz="1400" b="0" i="0" u="none" strike="noStrike" cap="none" spc="0">
         <a:solidFill>
           <a:srgbClr val="000000"/>
         </a:solidFill>
@@ -557,7 +570,7 @@
         <a:sym typeface="Arial"/>
       </a:defRPr>
     </a:lvl3pPr>
-    <a:lvl4pPr lvl="3" marR="0" rtl="0" algn="l">
+    <a:lvl4pPr marR="0" lvl="3" algn="l" rtl="0">
       <a:lnSpc>
         <a:spcPct val="100000"/>
       </a:lnSpc>
@@ -571,7 +584,7 @@
         <a:srgbClr val="000000"/>
       </a:buClr>
       <a:buFont typeface="Arial"/>
-      <a:defRPr b="0" i="0" sz="1400" u="none" cap="none" strike="noStrike">
+      <a:defRPr sz="1400" b="0" i="0" u="none" strike="noStrike" cap="none" spc="0">
         <a:solidFill>
           <a:srgbClr val="000000"/>
         </a:solidFill>
@@ -581,7 +594,7 @@
         <a:sym typeface="Arial"/>
       </a:defRPr>
     </a:lvl4pPr>
-    <a:lvl5pPr lvl="4" marR="0" rtl="0" algn="l">
+    <a:lvl5pPr marR="0" lvl="4" algn="l" rtl="0">
       <a:lnSpc>
         <a:spcPct val="100000"/>
       </a:lnSpc>
@@ -595,7 +608,7 @@
         <a:srgbClr val="000000"/>
       </a:buClr>
       <a:buFont typeface="Arial"/>
-      <a:defRPr b="0" i="0" sz="1400" u="none" cap="none" strike="noStrike">
+      <a:defRPr sz="1400" b="0" i="0" u="none" strike="noStrike" cap="none" spc="0">
         <a:solidFill>
           <a:srgbClr val="000000"/>
         </a:solidFill>
@@ -605,7 +618,7 @@
         <a:sym typeface="Arial"/>
       </a:defRPr>
     </a:lvl5pPr>
-    <a:lvl6pPr lvl="5" marR="0" rtl="0" algn="l">
+    <a:lvl6pPr marR="0" lvl="5" algn="l" rtl="0">
       <a:lnSpc>
         <a:spcPct val="100000"/>
       </a:lnSpc>
@@ -619,7 +632,7 @@
         <a:srgbClr val="000000"/>
       </a:buClr>
       <a:buFont typeface="Arial"/>
-      <a:defRPr b="0" i="0" sz="1400" u="none" cap="none" strike="noStrike">
+      <a:defRPr sz="1400" b="0" i="0" u="none" strike="noStrike" cap="none" spc="0">
         <a:solidFill>
           <a:srgbClr val="000000"/>
         </a:solidFill>
@@ -629,7 +642,7 @@
         <a:sym typeface="Arial"/>
       </a:defRPr>
     </a:lvl6pPr>
-    <a:lvl7pPr lvl="6" marR="0" rtl="0" algn="l">
+    <a:lvl7pPr marR="0" lvl="6" algn="l" rtl="0">
       <a:lnSpc>
         <a:spcPct val="100000"/>
       </a:lnSpc>
@@ -643,7 +656,7 @@
         <a:srgbClr val="000000"/>
       </a:buClr>
       <a:buFont typeface="Arial"/>
-      <a:defRPr b="0" i="0" sz="1400" u="none" cap="none" strike="noStrike">
+      <a:defRPr sz="1400" b="0" i="0" u="none" strike="noStrike" cap="none" spc="0">
         <a:solidFill>
           <a:srgbClr val="000000"/>
         </a:solidFill>
@@ -653,7 +666,7 @@
         <a:sym typeface="Arial"/>
       </a:defRPr>
     </a:lvl7pPr>
-    <a:lvl8pPr lvl="7" marR="0" rtl="0" algn="l">
+    <a:lvl8pPr marR="0" lvl="7" algn="l" rtl="0">
       <a:lnSpc>
         <a:spcPct val="100000"/>
       </a:lnSpc>
@@ -667,7 +680,7 @@
         <a:srgbClr val="000000"/>
       </a:buClr>
       <a:buFont typeface="Arial"/>
-      <a:defRPr b="0" i="0" sz="1400" u="none" cap="none" strike="noStrike">
+      <a:defRPr sz="1400" b="0" i="0" u="none" strike="noStrike" cap="none" spc="0">
         <a:solidFill>
           <a:srgbClr val="000000"/>
         </a:solidFill>
@@ -677,7 +690,7 @@
         <a:sym typeface="Arial"/>
       </a:defRPr>
     </a:lvl8pPr>
-    <a:lvl9pPr lvl="8" marR="0" rtl="0" algn="l">
+    <a:lvl9pPr marR="0" lvl="8" algn="l" rtl="0">
       <a:lnSpc>
         <a:spcPct val="100000"/>
       </a:lnSpc>
@@ -691,7 +704,7 @@
         <a:srgbClr val="000000"/>
       </a:buClr>
       <a:buFont typeface="Arial"/>
-      <a:defRPr b="0" i="0" sz="1400" u="none" cap="none" strike="noStrike">
+      <a:defRPr sz="1400" b="0" i="0" u="none" strike="noStrike" cap="none" spc="0">
         <a:solidFill>
           <a:srgbClr val="000000"/>
         </a:solidFill>
@@ -706,11 +719,11 @@
 </file>
 
 <file path=ppt/notesSlides/notesSlide1.xml><?xml version="1.0" encoding="utf-8"?>
-<p:notes xmlns:a="http://schemas.openxmlformats.org/drawingml/2006/main" xmlns:r="http://schemas.openxmlformats.org/officeDocument/2006/relationships" xmlns:mc="http://schemas.openxmlformats.org/markup-compatibility/2006" xmlns:mv="urn:schemas-microsoft-com:mac:vml" xmlns:p="http://schemas.openxmlformats.org/presentationml/2006/main" xmlns:c="http://schemas.openxmlformats.org/drawingml/2006/chart" xmlns:dgm="http://schemas.openxmlformats.org/drawingml/2006/diagram" xmlns:o="urn:schemas-microsoft-com:office:office" xmlns:v="urn:schemas-microsoft-com:vml" xmlns:pvml="urn:schemas-microsoft-com:office:powerpoint" xmlns:com="http://schemas.openxmlformats.org/drawingml/2006/compatibility" xmlns:p14="http://schemas.microsoft.com/office/powerpoint/2010/main" xmlns:p15="http://schemas.microsoft.com/office/powerpoint/2012/main" xmlns:ahyp="http://schemas.microsoft.com/office/drawing/2018/hyperlinkcolor" showMasterPhAnim="0" showMasterSp="0">
+<p:notes xmlns:a="http://schemas.openxmlformats.org/drawingml/2006/main" xmlns:r="http://schemas.openxmlformats.org/officeDocument/2006/relationships" xmlns:p="http://schemas.openxmlformats.org/presentationml/2006/main" showMasterSp="0" showMasterPhAnim="0">
   <p:cSld>
     <p:spTree>
       <p:nvGrpSpPr>
-        <p:cNvPr id="55" name="Shape 55"/>
+        <p:cNvPr id="1" name="Shape 55"/>
         <p:cNvGrpSpPr/>
         <p:nvPr/>
       </p:nvGrpSpPr>
@@ -725,9 +738,11 @@
       <p:sp>
         <p:nvSpPr>
           <p:cNvPr id="56" name="Google Shape;56;p:notes"/>
-          <p:cNvSpPr/>
+          <p:cNvSpPr>
+            <a:spLocks noGrp="1" noRot="1" noChangeAspect="1"/>
+          </p:cNvSpPr>
           <p:nvPr>
-            <p:ph idx="2" type="sldImg"/>
+            <p:ph type="sldImg" idx="2"/>
           </p:nvPr>
         </p:nvSpPr>
         <p:spPr>
@@ -736,9 +751,13 @@
             <a:ext cx="6096075" cy="3429000"/>
           </a:xfrm>
           <a:custGeom>
-            <a:rect b="b" l="l" r="r" t="t"/>
+            <a:avLst/>
+            <a:gdLst/>
+            <a:ahLst/>
+            <a:cxnLst/>
+            <a:rect l="l" t="t" r="r" b="b"/>
             <a:pathLst>
-              <a:path extrusionOk="0" h="120000" w="120000">
+              <a:path w="120000" h="120000" extrusionOk="0">
                 <a:moveTo>
                   <a:pt x="0" y="0"/>
                 </a:moveTo>
@@ -760,9 +779,11 @@
       <p:sp>
         <p:nvSpPr>
           <p:cNvPr id="57" name="Google Shape;57;p:notes"/>
-          <p:cNvSpPr txBox="1"/>
+          <p:cNvSpPr txBox="1">
+            <a:spLocks noGrp="1"/>
+          </p:cNvSpPr>
           <p:nvPr>
-            <p:ph idx="1" type="body"/>
+            <p:ph type="body" idx="1"/>
           </p:nvPr>
         </p:nvSpPr>
         <p:spPr>
@@ -775,12 +796,12 @@
           </a:prstGeom>
         </p:spPr>
         <p:txBody>
-          <a:bodyPr anchorCtr="0" anchor="t" bIns="91425" lIns="91425" spcFirstLastPara="1" rIns="91425" wrap="square" tIns="91425">
+          <a:bodyPr spcFirstLastPara="1" wrap="square" lIns="91425" tIns="91425" rIns="91425" bIns="91425" anchor="t" anchorCtr="0">
             <a:noAutofit/>
           </a:bodyPr>
           <a:lstStyle/>
           <a:p>
-            <a:pPr indent="0" lvl="0" marL="0" rtl="0" algn="l">
+            <a:pPr marL="0" lvl="0" indent="0" algn="l" rtl="0">
               <a:spcBef>
                 <a:spcPts val="0"/>
               </a:spcBef>
@@ -789,207 +810,6 @@
               </a:spcAft>
               <a:buNone/>
             </a:pPr>
-            <a:r>
-              <a:t/>
-            </a:r>
-            <a:endParaRPr/>
-          </a:p>
-        </p:txBody>
-      </p:sp>
-    </p:spTree>
-  </p:cSld>
-  <p:clrMapOvr>
-    <a:masterClrMapping/>
-  </p:clrMapOvr>
-</p:notes>
-</file>
-
-<file path=ppt/notesSlides/notesSlide10.xml><?xml version="1.0" encoding="utf-8"?>
-<p:notes xmlns:a="http://schemas.openxmlformats.org/drawingml/2006/main" xmlns:r="http://schemas.openxmlformats.org/officeDocument/2006/relationships" xmlns:mc="http://schemas.openxmlformats.org/markup-compatibility/2006" xmlns:mv="urn:schemas-microsoft-com:mac:vml" xmlns:p="http://schemas.openxmlformats.org/presentationml/2006/main" xmlns:c="http://schemas.openxmlformats.org/drawingml/2006/chart" xmlns:dgm="http://schemas.openxmlformats.org/drawingml/2006/diagram" xmlns:o="urn:schemas-microsoft-com:office:office" xmlns:v="urn:schemas-microsoft-com:vml" xmlns:pvml="urn:schemas-microsoft-com:office:powerpoint" xmlns:com="http://schemas.openxmlformats.org/drawingml/2006/compatibility" xmlns:p14="http://schemas.microsoft.com/office/powerpoint/2010/main" xmlns:p15="http://schemas.microsoft.com/office/powerpoint/2012/main" xmlns:ahyp="http://schemas.microsoft.com/office/drawing/2018/hyperlinkcolor" showMasterPhAnim="0" showMasterSp="0">
-  <p:cSld>
-    <p:spTree>
-      <p:nvGrpSpPr>
-        <p:cNvPr id="109" name="Shape 109"/>
-        <p:cNvGrpSpPr/>
-        <p:nvPr/>
-      </p:nvGrpSpPr>
-      <p:grpSpPr>
-        <a:xfrm>
-          <a:off x="0" y="0"/>
-          <a:ext cx="0" cy="0"/>
-          <a:chOff x="0" y="0"/>
-          <a:chExt cx="0" cy="0"/>
-        </a:xfrm>
-      </p:grpSpPr>
-      <p:sp>
-        <p:nvSpPr>
-          <p:cNvPr id="110" name="Google Shape;110;g566f053942_0_85:notes"/>
-          <p:cNvSpPr/>
-          <p:nvPr>
-            <p:ph idx="2" type="sldImg"/>
-          </p:nvPr>
-        </p:nvSpPr>
-        <p:spPr>
-          <a:xfrm>
-            <a:off x="381300" y="685800"/>
-            <a:ext cx="6096000" cy="3429000"/>
-          </a:xfrm>
-          <a:custGeom>
-            <a:rect b="b" l="l" r="r" t="t"/>
-            <a:pathLst>
-              <a:path extrusionOk="0" h="120000" w="120000">
-                <a:moveTo>
-                  <a:pt x="0" y="0"/>
-                </a:moveTo>
-                <a:lnTo>
-                  <a:pt x="120000" y="0"/>
-                </a:lnTo>
-                <a:lnTo>
-                  <a:pt x="120000" y="120000"/>
-                </a:lnTo>
-                <a:lnTo>
-                  <a:pt x="0" y="120000"/>
-                </a:lnTo>
-                <a:close/>
-              </a:path>
-            </a:pathLst>
-          </a:custGeom>
-        </p:spPr>
-      </p:sp>
-      <p:sp>
-        <p:nvSpPr>
-          <p:cNvPr id="111" name="Google Shape;111;g566f053942_0_85:notes"/>
-          <p:cNvSpPr txBox="1"/>
-          <p:nvPr>
-            <p:ph idx="1" type="body"/>
-          </p:nvPr>
-        </p:nvSpPr>
-        <p:spPr>
-          <a:xfrm>
-            <a:off x="685800" y="4343400"/>
-            <a:ext cx="5486400" cy="4114800"/>
-          </a:xfrm>
-          <a:prstGeom prst="rect">
-            <a:avLst/>
-          </a:prstGeom>
-        </p:spPr>
-        <p:txBody>
-          <a:bodyPr anchorCtr="0" anchor="t" bIns="91425" lIns="91425" spcFirstLastPara="1" rIns="91425" wrap="square" tIns="91425">
-            <a:noAutofit/>
-          </a:bodyPr>
-          <a:lstStyle/>
-          <a:p>
-            <a:pPr indent="0" lvl="0" marL="0" rtl="0" algn="l">
-              <a:spcBef>
-                <a:spcPts val="0"/>
-              </a:spcBef>
-              <a:spcAft>
-                <a:spcPts val="0"/>
-              </a:spcAft>
-              <a:buNone/>
-            </a:pPr>
-            <a:r>
-              <a:t/>
-            </a:r>
-            <a:endParaRPr/>
-          </a:p>
-        </p:txBody>
-      </p:sp>
-    </p:spTree>
-  </p:cSld>
-  <p:clrMapOvr>
-    <a:masterClrMapping/>
-  </p:clrMapOvr>
-</p:notes>
-</file>
-
-<file path=ppt/notesSlides/notesSlide11.xml><?xml version="1.0" encoding="utf-8"?>
-<p:notes xmlns:a="http://schemas.openxmlformats.org/drawingml/2006/main" xmlns:r="http://schemas.openxmlformats.org/officeDocument/2006/relationships" xmlns:mc="http://schemas.openxmlformats.org/markup-compatibility/2006" xmlns:mv="urn:schemas-microsoft-com:mac:vml" xmlns:p="http://schemas.openxmlformats.org/presentationml/2006/main" xmlns:c="http://schemas.openxmlformats.org/drawingml/2006/chart" xmlns:dgm="http://schemas.openxmlformats.org/drawingml/2006/diagram" xmlns:o="urn:schemas-microsoft-com:office:office" xmlns:v="urn:schemas-microsoft-com:vml" xmlns:pvml="urn:schemas-microsoft-com:office:powerpoint" xmlns:com="http://schemas.openxmlformats.org/drawingml/2006/compatibility" xmlns:p14="http://schemas.microsoft.com/office/powerpoint/2010/main" xmlns:p15="http://schemas.microsoft.com/office/powerpoint/2012/main" xmlns:ahyp="http://schemas.microsoft.com/office/drawing/2018/hyperlinkcolor" showMasterPhAnim="0" showMasterSp="0">
-  <p:cSld>
-    <p:spTree>
-      <p:nvGrpSpPr>
-        <p:cNvPr id="115" name="Shape 115"/>
-        <p:cNvGrpSpPr/>
-        <p:nvPr/>
-      </p:nvGrpSpPr>
-      <p:grpSpPr>
-        <a:xfrm>
-          <a:off x="0" y="0"/>
-          <a:ext cx="0" cy="0"/>
-          <a:chOff x="0" y="0"/>
-          <a:chExt cx="0" cy="0"/>
-        </a:xfrm>
-      </p:grpSpPr>
-      <p:sp>
-        <p:nvSpPr>
-          <p:cNvPr id="116" name="Google Shape;116;g566f053942_0_90:notes"/>
-          <p:cNvSpPr/>
-          <p:nvPr>
-            <p:ph idx="2" type="sldImg"/>
-          </p:nvPr>
-        </p:nvSpPr>
-        <p:spPr>
-          <a:xfrm>
-            <a:off x="381300" y="685800"/>
-            <a:ext cx="6096000" cy="3429000"/>
-          </a:xfrm>
-          <a:custGeom>
-            <a:rect b="b" l="l" r="r" t="t"/>
-            <a:pathLst>
-              <a:path extrusionOk="0" h="120000" w="120000">
-                <a:moveTo>
-                  <a:pt x="0" y="0"/>
-                </a:moveTo>
-                <a:lnTo>
-                  <a:pt x="120000" y="0"/>
-                </a:lnTo>
-                <a:lnTo>
-                  <a:pt x="120000" y="120000"/>
-                </a:lnTo>
-                <a:lnTo>
-                  <a:pt x="0" y="120000"/>
-                </a:lnTo>
-                <a:close/>
-              </a:path>
-            </a:pathLst>
-          </a:custGeom>
-        </p:spPr>
-      </p:sp>
-      <p:sp>
-        <p:nvSpPr>
-          <p:cNvPr id="117" name="Google Shape;117;g566f053942_0_90:notes"/>
-          <p:cNvSpPr txBox="1"/>
-          <p:nvPr>
-            <p:ph idx="1" type="body"/>
-          </p:nvPr>
-        </p:nvSpPr>
-        <p:spPr>
-          <a:xfrm>
-            <a:off x="685800" y="4343400"/>
-            <a:ext cx="5486400" cy="4114800"/>
-          </a:xfrm>
-          <a:prstGeom prst="rect">
-            <a:avLst/>
-          </a:prstGeom>
-        </p:spPr>
-        <p:txBody>
-          <a:bodyPr anchorCtr="0" anchor="t" bIns="91425" lIns="91425" spcFirstLastPara="1" rIns="91425" wrap="square" tIns="91425">
-            <a:noAutofit/>
-          </a:bodyPr>
-          <a:lstStyle/>
-          <a:p>
-            <a:pPr indent="0" lvl="0" marL="0" rtl="0" algn="l">
-              <a:spcBef>
-                <a:spcPts val="0"/>
-              </a:spcBef>
-              <a:spcAft>
-                <a:spcPts val="0"/>
-              </a:spcAft>
-              <a:buNone/>
-            </a:pPr>
-            <a:r>
-              <a:t/>
-            </a:r>
             <a:endParaRPr/>
           </a:p>
         </p:txBody>
@@ -1003,11 +823,11 @@
 </file>
 
 <file path=ppt/notesSlides/notesSlide2.xml><?xml version="1.0" encoding="utf-8"?>
-<p:notes xmlns:a="http://schemas.openxmlformats.org/drawingml/2006/main" xmlns:r="http://schemas.openxmlformats.org/officeDocument/2006/relationships" xmlns:mc="http://schemas.openxmlformats.org/markup-compatibility/2006" xmlns:mv="urn:schemas-microsoft-com:mac:vml" xmlns:p="http://schemas.openxmlformats.org/presentationml/2006/main" xmlns:c="http://schemas.openxmlformats.org/drawingml/2006/chart" xmlns:dgm="http://schemas.openxmlformats.org/drawingml/2006/diagram" xmlns:o="urn:schemas-microsoft-com:office:office" xmlns:v="urn:schemas-microsoft-com:vml" xmlns:pvml="urn:schemas-microsoft-com:office:powerpoint" xmlns:com="http://schemas.openxmlformats.org/drawingml/2006/compatibility" xmlns:p14="http://schemas.microsoft.com/office/powerpoint/2010/main" xmlns:p15="http://schemas.microsoft.com/office/powerpoint/2012/main" xmlns:ahyp="http://schemas.microsoft.com/office/drawing/2018/hyperlinkcolor" showMasterPhAnim="0" showMasterSp="0">
+<p:notes xmlns:a="http://schemas.openxmlformats.org/drawingml/2006/main" xmlns:r="http://schemas.openxmlformats.org/officeDocument/2006/relationships" xmlns:p="http://schemas.openxmlformats.org/presentationml/2006/main" showMasterSp="0" showMasterPhAnim="0">
   <p:cSld>
     <p:spTree>
       <p:nvGrpSpPr>
-        <p:cNvPr id="61" name="Shape 61"/>
+        <p:cNvPr id="1" name="Shape 61"/>
         <p:cNvGrpSpPr/>
         <p:nvPr/>
       </p:nvGrpSpPr>
@@ -1022,9 +842,11 @@
       <p:sp>
         <p:nvSpPr>
           <p:cNvPr id="62" name="Google Shape;62;g566f053942_0_50:notes"/>
-          <p:cNvSpPr/>
+          <p:cNvSpPr>
+            <a:spLocks noGrp="1" noRot="1" noChangeAspect="1"/>
+          </p:cNvSpPr>
           <p:nvPr>
-            <p:ph idx="2" type="sldImg"/>
+            <p:ph type="sldImg" idx="2"/>
           </p:nvPr>
         </p:nvSpPr>
         <p:spPr>
@@ -1033,9 +855,13 @@
             <a:ext cx="6096000" cy="3429000"/>
           </a:xfrm>
           <a:custGeom>
-            <a:rect b="b" l="l" r="r" t="t"/>
+            <a:avLst/>
+            <a:gdLst/>
+            <a:ahLst/>
+            <a:cxnLst/>
+            <a:rect l="l" t="t" r="r" b="b"/>
             <a:pathLst>
-              <a:path extrusionOk="0" h="120000" w="120000">
+              <a:path w="120000" h="120000" extrusionOk="0">
                 <a:moveTo>
                   <a:pt x="0" y="0"/>
                 </a:moveTo>
@@ -1057,9 +883,11 @@
       <p:sp>
         <p:nvSpPr>
           <p:cNvPr id="63" name="Google Shape;63;g566f053942_0_50:notes"/>
-          <p:cNvSpPr txBox="1"/>
+          <p:cNvSpPr txBox="1">
+            <a:spLocks noGrp="1"/>
+          </p:cNvSpPr>
           <p:nvPr>
-            <p:ph idx="1" type="body"/>
+            <p:ph type="body" idx="1"/>
           </p:nvPr>
         </p:nvSpPr>
         <p:spPr>
@@ -1072,12 +900,12 @@
           </a:prstGeom>
         </p:spPr>
         <p:txBody>
-          <a:bodyPr anchorCtr="0" anchor="t" bIns="91425" lIns="91425" spcFirstLastPara="1" rIns="91425" wrap="square" tIns="91425">
+          <a:bodyPr spcFirstLastPara="1" wrap="square" lIns="91425" tIns="91425" rIns="91425" bIns="91425" anchor="t" anchorCtr="0">
             <a:noAutofit/>
           </a:bodyPr>
           <a:lstStyle/>
           <a:p>
-            <a:pPr indent="0" lvl="0" marL="0" rtl="0" algn="l">
+            <a:pPr marL="0" lvl="0" indent="0" algn="l" rtl="0">
               <a:spcBef>
                 <a:spcPts val="0"/>
               </a:spcBef>
@@ -1086,9 +914,6 @@
               </a:spcAft>
               <a:buNone/>
             </a:pPr>
-            <a:r>
-              <a:t/>
-            </a:r>
             <a:endParaRPr/>
           </a:p>
         </p:txBody>
@@ -1102,11 +927,11 @@
 </file>
 
 <file path=ppt/notesSlides/notesSlide3.xml><?xml version="1.0" encoding="utf-8"?>
-<p:notes xmlns:a="http://schemas.openxmlformats.org/drawingml/2006/main" xmlns:r="http://schemas.openxmlformats.org/officeDocument/2006/relationships" xmlns:mc="http://schemas.openxmlformats.org/markup-compatibility/2006" xmlns:mv="urn:schemas-microsoft-com:mac:vml" xmlns:p="http://schemas.openxmlformats.org/presentationml/2006/main" xmlns:c="http://schemas.openxmlformats.org/drawingml/2006/chart" xmlns:dgm="http://schemas.openxmlformats.org/drawingml/2006/diagram" xmlns:o="urn:schemas-microsoft-com:office:office" xmlns:v="urn:schemas-microsoft-com:vml" xmlns:pvml="urn:schemas-microsoft-com:office:powerpoint" xmlns:com="http://schemas.openxmlformats.org/drawingml/2006/compatibility" xmlns:p14="http://schemas.microsoft.com/office/powerpoint/2010/main" xmlns:p15="http://schemas.microsoft.com/office/powerpoint/2012/main" xmlns:ahyp="http://schemas.microsoft.com/office/drawing/2018/hyperlinkcolor" showMasterPhAnim="0" showMasterSp="0">
+<p:notes xmlns:a="http://schemas.openxmlformats.org/drawingml/2006/main" xmlns:r="http://schemas.openxmlformats.org/officeDocument/2006/relationships" xmlns:p="http://schemas.openxmlformats.org/presentationml/2006/main" showMasterSp="0" showMasterPhAnim="0">
   <p:cSld>
     <p:spTree>
       <p:nvGrpSpPr>
-        <p:cNvPr id="67" name="Shape 67"/>
+        <p:cNvPr id="1" name="Shape 67"/>
         <p:cNvGrpSpPr/>
         <p:nvPr/>
       </p:nvGrpSpPr>
@@ -1121,20 +946,26 @@
       <p:sp>
         <p:nvSpPr>
           <p:cNvPr id="68" name="Google Shape;68;g566f053942_0_55:notes"/>
-          <p:cNvSpPr/>
+          <p:cNvSpPr>
+            <a:spLocks noGrp="1" noRot="1" noChangeAspect="1"/>
+          </p:cNvSpPr>
           <p:nvPr>
-            <p:ph idx="2" type="sldImg"/>
+            <p:ph type="sldImg" idx="2"/>
           </p:nvPr>
         </p:nvSpPr>
         <p:spPr>
           <a:xfrm>
-            <a:off x="381300" y="685800"/>
+            <a:off x="381000" y="685800"/>
             <a:ext cx="6096000" cy="3429000"/>
           </a:xfrm>
           <a:custGeom>
-            <a:rect b="b" l="l" r="r" t="t"/>
+            <a:avLst/>
+            <a:gdLst/>
+            <a:ahLst/>
+            <a:cxnLst/>
+            <a:rect l="l" t="t" r="r" b="b"/>
             <a:pathLst>
-              <a:path extrusionOk="0" h="120000" w="120000">
+              <a:path w="120000" h="120000" extrusionOk="0">
                 <a:moveTo>
                   <a:pt x="0" y="0"/>
                 </a:moveTo>
@@ -1156,9 +987,11 @@
       <p:sp>
         <p:nvSpPr>
           <p:cNvPr id="69" name="Google Shape;69;g566f053942_0_55:notes"/>
-          <p:cNvSpPr txBox="1"/>
+          <p:cNvSpPr txBox="1">
+            <a:spLocks noGrp="1"/>
+          </p:cNvSpPr>
           <p:nvPr>
-            <p:ph idx="1" type="body"/>
+            <p:ph type="body" idx="1"/>
           </p:nvPr>
         </p:nvSpPr>
         <p:spPr>
@@ -1171,12 +1004,12 @@
           </a:prstGeom>
         </p:spPr>
         <p:txBody>
-          <a:bodyPr anchorCtr="0" anchor="t" bIns="91425" lIns="91425" spcFirstLastPara="1" rIns="91425" wrap="square" tIns="91425">
+          <a:bodyPr spcFirstLastPara="1" wrap="square" lIns="91425" tIns="91425" rIns="91425" bIns="91425" anchor="t" anchorCtr="0">
             <a:noAutofit/>
           </a:bodyPr>
           <a:lstStyle/>
           <a:p>
-            <a:pPr indent="0" lvl="0" marL="0" rtl="0" algn="l">
+            <a:pPr marL="0" lvl="0" indent="0" algn="l" rtl="0">
               <a:spcBef>
                 <a:spcPts val="0"/>
               </a:spcBef>
@@ -1185,9 +1018,6 @@
               </a:spcAft>
               <a:buNone/>
             </a:pPr>
-            <a:r>
-              <a:t/>
-            </a:r>
             <a:endParaRPr/>
           </a:p>
         </p:txBody>
@@ -1201,11 +1031,11 @@
 </file>
 
 <file path=ppt/notesSlides/notesSlide4.xml><?xml version="1.0" encoding="utf-8"?>
-<p:notes xmlns:a="http://schemas.openxmlformats.org/drawingml/2006/main" xmlns:r="http://schemas.openxmlformats.org/officeDocument/2006/relationships" xmlns:mc="http://schemas.openxmlformats.org/markup-compatibility/2006" xmlns:mv="urn:schemas-microsoft-com:mac:vml" xmlns:p="http://schemas.openxmlformats.org/presentationml/2006/main" xmlns:c="http://schemas.openxmlformats.org/drawingml/2006/chart" xmlns:dgm="http://schemas.openxmlformats.org/drawingml/2006/diagram" xmlns:o="urn:schemas-microsoft-com:office:office" xmlns:v="urn:schemas-microsoft-com:vml" xmlns:pvml="urn:schemas-microsoft-com:office:powerpoint" xmlns:com="http://schemas.openxmlformats.org/drawingml/2006/compatibility" xmlns:p14="http://schemas.microsoft.com/office/powerpoint/2010/main" xmlns:p15="http://schemas.microsoft.com/office/powerpoint/2012/main" xmlns:ahyp="http://schemas.microsoft.com/office/drawing/2018/hyperlinkcolor" showMasterPhAnim="0" showMasterSp="0">
+<p:notes xmlns:a="http://schemas.openxmlformats.org/drawingml/2006/main" xmlns:r="http://schemas.openxmlformats.org/officeDocument/2006/relationships" xmlns:p="http://schemas.openxmlformats.org/presentationml/2006/main" showMasterSp="0" showMasterPhAnim="0">
   <p:cSld>
     <p:spTree>
       <p:nvGrpSpPr>
-        <p:cNvPr id="73" name="Shape 73"/>
+        <p:cNvPr id="1" name="Shape 73"/>
         <p:cNvGrpSpPr/>
         <p:nvPr/>
       </p:nvGrpSpPr>
@@ -1220,9 +1050,11 @@
       <p:sp>
         <p:nvSpPr>
           <p:cNvPr id="74" name="Google Shape;74;g566f053942_0_60:notes"/>
-          <p:cNvSpPr/>
+          <p:cNvSpPr>
+            <a:spLocks noGrp="1" noRot="1" noChangeAspect="1"/>
+          </p:cNvSpPr>
           <p:nvPr>
-            <p:ph idx="2" type="sldImg"/>
+            <p:ph type="sldImg" idx="2"/>
           </p:nvPr>
         </p:nvSpPr>
         <p:spPr>
@@ -1231,9 +1063,13 @@
             <a:ext cx="6096000" cy="3429000"/>
           </a:xfrm>
           <a:custGeom>
-            <a:rect b="b" l="l" r="r" t="t"/>
+            <a:avLst/>
+            <a:gdLst/>
+            <a:ahLst/>
+            <a:cxnLst/>
+            <a:rect l="l" t="t" r="r" b="b"/>
             <a:pathLst>
-              <a:path extrusionOk="0" h="120000" w="120000">
+              <a:path w="120000" h="120000" extrusionOk="0">
                 <a:moveTo>
                   <a:pt x="0" y="0"/>
                 </a:moveTo>
@@ -1255,9 +1091,11 @@
       <p:sp>
         <p:nvSpPr>
           <p:cNvPr id="75" name="Google Shape;75;g566f053942_0_60:notes"/>
-          <p:cNvSpPr txBox="1"/>
+          <p:cNvSpPr txBox="1">
+            <a:spLocks noGrp="1"/>
+          </p:cNvSpPr>
           <p:nvPr>
-            <p:ph idx="1" type="body"/>
+            <p:ph type="body" idx="1"/>
           </p:nvPr>
         </p:nvSpPr>
         <p:spPr>
@@ -1270,12 +1108,12 @@
           </a:prstGeom>
         </p:spPr>
         <p:txBody>
-          <a:bodyPr anchorCtr="0" anchor="t" bIns="91425" lIns="91425" spcFirstLastPara="1" rIns="91425" wrap="square" tIns="91425">
+          <a:bodyPr spcFirstLastPara="1" wrap="square" lIns="91425" tIns="91425" rIns="91425" bIns="91425" anchor="t" anchorCtr="0">
             <a:noAutofit/>
           </a:bodyPr>
           <a:lstStyle/>
           <a:p>
-            <a:pPr indent="0" lvl="0" marL="0" rtl="0" algn="l">
+            <a:pPr marL="0" lvl="0" indent="0" algn="l" rtl="0">
               <a:spcBef>
                 <a:spcPts val="0"/>
               </a:spcBef>
@@ -1284,9 +1122,6 @@
               </a:spcAft>
               <a:buNone/>
             </a:pPr>
-            <a:r>
-              <a:t/>
-            </a:r>
             <a:endParaRPr/>
           </a:p>
         </p:txBody>
@@ -1300,11 +1135,11 @@
 </file>
 
 <file path=ppt/notesSlides/notesSlide5.xml><?xml version="1.0" encoding="utf-8"?>
-<p:notes xmlns:a="http://schemas.openxmlformats.org/drawingml/2006/main" xmlns:r="http://schemas.openxmlformats.org/officeDocument/2006/relationships" xmlns:mc="http://schemas.openxmlformats.org/markup-compatibility/2006" xmlns:mv="urn:schemas-microsoft-com:mac:vml" xmlns:p="http://schemas.openxmlformats.org/presentationml/2006/main" xmlns:c="http://schemas.openxmlformats.org/drawingml/2006/chart" xmlns:dgm="http://schemas.openxmlformats.org/drawingml/2006/diagram" xmlns:o="urn:schemas-microsoft-com:office:office" xmlns:v="urn:schemas-microsoft-com:vml" xmlns:pvml="urn:schemas-microsoft-com:office:powerpoint" xmlns:com="http://schemas.openxmlformats.org/drawingml/2006/compatibility" xmlns:p14="http://schemas.microsoft.com/office/powerpoint/2010/main" xmlns:p15="http://schemas.microsoft.com/office/powerpoint/2012/main" xmlns:ahyp="http://schemas.microsoft.com/office/drawing/2018/hyperlinkcolor" showMasterPhAnim="0" showMasterSp="0">
+<p:notes xmlns:a="http://schemas.openxmlformats.org/drawingml/2006/main" xmlns:r="http://schemas.openxmlformats.org/officeDocument/2006/relationships" xmlns:p="http://schemas.openxmlformats.org/presentationml/2006/main" showMasterSp="0" showMasterPhAnim="0">
   <p:cSld>
     <p:spTree>
       <p:nvGrpSpPr>
-        <p:cNvPr id="79" name="Shape 79"/>
+        <p:cNvPr id="1" name="Shape 79"/>
         <p:cNvGrpSpPr/>
         <p:nvPr/>
       </p:nvGrpSpPr>
@@ -1319,9 +1154,11 @@
       <p:sp>
         <p:nvSpPr>
           <p:cNvPr id="80" name="Google Shape;80;g566f053942_0_65:notes"/>
-          <p:cNvSpPr/>
+          <p:cNvSpPr>
+            <a:spLocks noGrp="1" noRot="1" noChangeAspect="1"/>
+          </p:cNvSpPr>
           <p:nvPr>
-            <p:ph idx="2" type="sldImg"/>
+            <p:ph type="sldImg" idx="2"/>
           </p:nvPr>
         </p:nvSpPr>
         <p:spPr>
@@ -1330,9 +1167,13 @@
             <a:ext cx="6096000" cy="3429000"/>
           </a:xfrm>
           <a:custGeom>
-            <a:rect b="b" l="l" r="r" t="t"/>
+            <a:avLst/>
+            <a:gdLst/>
+            <a:ahLst/>
+            <a:cxnLst/>
+            <a:rect l="l" t="t" r="r" b="b"/>
             <a:pathLst>
-              <a:path extrusionOk="0" h="120000" w="120000">
+              <a:path w="120000" h="120000" extrusionOk="0">
                 <a:moveTo>
                   <a:pt x="0" y="0"/>
                 </a:moveTo>
@@ -1354,9 +1195,11 @@
       <p:sp>
         <p:nvSpPr>
           <p:cNvPr id="81" name="Google Shape;81;g566f053942_0_65:notes"/>
-          <p:cNvSpPr txBox="1"/>
+          <p:cNvSpPr txBox="1">
+            <a:spLocks noGrp="1"/>
+          </p:cNvSpPr>
           <p:nvPr>
-            <p:ph idx="1" type="body"/>
+            <p:ph type="body" idx="1"/>
           </p:nvPr>
         </p:nvSpPr>
         <p:spPr>
@@ -1369,12 +1212,12 @@
           </a:prstGeom>
         </p:spPr>
         <p:txBody>
-          <a:bodyPr anchorCtr="0" anchor="t" bIns="91425" lIns="91425" spcFirstLastPara="1" rIns="91425" wrap="square" tIns="91425">
+          <a:bodyPr spcFirstLastPara="1" wrap="square" lIns="91425" tIns="91425" rIns="91425" bIns="91425" anchor="t" anchorCtr="0">
             <a:noAutofit/>
           </a:bodyPr>
           <a:lstStyle/>
           <a:p>
-            <a:pPr indent="0" lvl="0" marL="0" rtl="0" algn="l">
+            <a:pPr marL="0" lvl="0" indent="0" algn="l" rtl="0">
               <a:spcBef>
                 <a:spcPts val="0"/>
               </a:spcBef>
@@ -1383,9 +1226,6 @@
               </a:spcAft>
               <a:buNone/>
             </a:pPr>
-            <a:r>
-              <a:t/>
-            </a:r>
             <a:endParaRPr/>
           </a:p>
         </p:txBody>
@@ -1399,11 +1239,11 @@
 </file>
 
 <file path=ppt/notesSlides/notesSlide6.xml><?xml version="1.0" encoding="utf-8"?>
-<p:notes xmlns:a="http://schemas.openxmlformats.org/drawingml/2006/main" xmlns:r="http://schemas.openxmlformats.org/officeDocument/2006/relationships" xmlns:mc="http://schemas.openxmlformats.org/markup-compatibility/2006" xmlns:mv="urn:schemas-microsoft-com:mac:vml" xmlns:p="http://schemas.openxmlformats.org/presentationml/2006/main" xmlns:c="http://schemas.openxmlformats.org/drawingml/2006/chart" xmlns:dgm="http://schemas.openxmlformats.org/drawingml/2006/diagram" xmlns:o="urn:schemas-microsoft-com:office:office" xmlns:v="urn:schemas-microsoft-com:vml" xmlns:pvml="urn:schemas-microsoft-com:office:powerpoint" xmlns:com="http://schemas.openxmlformats.org/drawingml/2006/compatibility" xmlns:p14="http://schemas.microsoft.com/office/powerpoint/2010/main" xmlns:p15="http://schemas.microsoft.com/office/powerpoint/2012/main" xmlns:ahyp="http://schemas.microsoft.com/office/drawing/2018/hyperlinkcolor" showMasterPhAnim="0" showMasterSp="0">
+<p:notes xmlns:a="http://schemas.openxmlformats.org/drawingml/2006/main" xmlns:r="http://schemas.openxmlformats.org/officeDocument/2006/relationships" xmlns:p="http://schemas.openxmlformats.org/presentationml/2006/main" showMasterSp="0" showMasterPhAnim="0">
   <p:cSld>
     <p:spTree>
       <p:nvGrpSpPr>
-        <p:cNvPr id="85" name="Shape 85"/>
+        <p:cNvPr id="1" name="Shape 85"/>
         <p:cNvGrpSpPr/>
         <p:nvPr/>
       </p:nvGrpSpPr>
@@ -1418,9 +1258,11 @@
       <p:sp>
         <p:nvSpPr>
           <p:cNvPr id="86" name="Google Shape;86;g566f053942_0_70:notes"/>
-          <p:cNvSpPr/>
+          <p:cNvSpPr>
+            <a:spLocks noGrp="1" noRot="1" noChangeAspect="1"/>
+          </p:cNvSpPr>
           <p:nvPr>
-            <p:ph idx="2" type="sldImg"/>
+            <p:ph type="sldImg" idx="2"/>
           </p:nvPr>
         </p:nvSpPr>
         <p:spPr>
@@ -1429,9 +1271,13 @@
             <a:ext cx="6096000" cy="3429000"/>
           </a:xfrm>
           <a:custGeom>
-            <a:rect b="b" l="l" r="r" t="t"/>
+            <a:avLst/>
+            <a:gdLst/>
+            <a:ahLst/>
+            <a:cxnLst/>
+            <a:rect l="l" t="t" r="r" b="b"/>
             <a:pathLst>
-              <a:path extrusionOk="0" h="120000" w="120000">
+              <a:path w="120000" h="120000" extrusionOk="0">
                 <a:moveTo>
                   <a:pt x="0" y="0"/>
                 </a:moveTo>
@@ -1453,9 +1299,11 @@
       <p:sp>
         <p:nvSpPr>
           <p:cNvPr id="87" name="Google Shape;87;g566f053942_0_70:notes"/>
-          <p:cNvSpPr txBox="1"/>
+          <p:cNvSpPr txBox="1">
+            <a:spLocks noGrp="1"/>
+          </p:cNvSpPr>
           <p:nvPr>
-            <p:ph idx="1" type="body"/>
+            <p:ph type="body" idx="1"/>
           </p:nvPr>
         </p:nvSpPr>
         <p:spPr>
@@ -1468,12 +1316,12 @@
           </a:prstGeom>
         </p:spPr>
         <p:txBody>
-          <a:bodyPr anchorCtr="0" anchor="t" bIns="91425" lIns="91425" spcFirstLastPara="1" rIns="91425" wrap="square" tIns="91425">
+          <a:bodyPr spcFirstLastPara="1" wrap="square" lIns="91425" tIns="91425" rIns="91425" bIns="91425" anchor="t" anchorCtr="0">
             <a:noAutofit/>
           </a:bodyPr>
           <a:lstStyle/>
           <a:p>
-            <a:pPr indent="0" lvl="0" marL="0" rtl="0" algn="l">
+            <a:pPr marL="0" lvl="0" indent="0" algn="l" rtl="0">
               <a:spcBef>
                 <a:spcPts val="0"/>
               </a:spcBef>
@@ -1482,9 +1330,6 @@
               </a:spcAft>
               <a:buNone/>
             </a:pPr>
-            <a:r>
-              <a:t/>
-            </a:r>
             <a:endParaRPr/>
           </a:p>
         </p:txBody>
@@ -1498,11 +1343,11 @@
 </file>
 
 <file path=ppt/notesSlides/notesSlide7.xml><?xml version="1.0" encoding="utf-8"?>
-<p:notes xmlns:a="http://schemas.openxmlformats.org/drawingml/2006/main" xmlns:r="http://schemas.openxmlformats.org/officeDocument/2006/relationships" xmlns:mc="http://schemas.openxmlformats.org/markup-compatibility/2006" xmlns:mv="urn:schemas-microsoft-com:mac:vml" xmlns:p="http://schemas.openxmlformats.org/presentationml/2006/main" xmlns:c="http://schemas.openxmlformats.org/drawingml/2006/chart" xmlns:dgm="http://schemas.openxmlformats.org/drawingml/2006/diagram" xmlns:o="urn:schemas-microsoft-com:office:office" xmlns:v="urn:schemas-microsoft-com:vml" xmlns:pvml="urn:schemas-microsoft-com:office:powerpoint" xmlns:com="http://schemas.openxmlformats.org/drawingml/2006/compatibility" xmlns:p14="http://schemas.microsoft.com/office/powerpoint/2010/main" xmlns:p15="http://schemas.microsoft.com/office/powerpoint/2012/main" xmlns:ahyp="http://schemas.microsoft.com/office/drawing/2018/hyperlinkcolor" showMasterPhAnim="0" showMasterSp="0">
+<p:notes xmlns:a="http://schemas.openxmlformats.org/drawingml/2006/main" xmlns:r="http://schemas.openxmlformats.org/officeDocument/2006/relationships" xmlns:p="http://schemas.openxmlformats.org/presentationml/2006/main" showMasterSp="0" showMasterPhAnim="0">
   <p:cSld>
     <p:spTree>
       <p:nvGrpSpPr>
-        <p:cNvPr id="91" name="Shape 91"/>
+        <p:cNvPr id="1" name="Shape 91"/>
         <p:cNvGrpSpPr/>
         <p:nvPr/>
       </p:nvGrpSpPr>
@@ -1517,9 +1362,11 @@
       <p:sp>
         <p:nvSpPr>
           <p:cNvPr id="92" name="Google Shape;92;g566f053942_0_75:notes"/>
-          <p:cNvSpPr/>
+          <p:cNvSpPr>
+            <a:spLocks noGrp="1" noRot="1" noChangeAspect="1"/>
+          </p:cNvSpPr>
           <p:nvPr>
-            <p:ph idx="2" type="sldImg"/>
+            <p:ph type="sldImg" idx="2"/>
           </p:nvPr>
         </p:nvSpPr>
         <p:spPr>
@@ -1528,9 +1375,13 @@
             <a:ext cx="6096000" cy="3429000"/>
           </a:xfrm>
           <a:custGeom>
-            <a:rect b="b" l="l" r="r" t="t"/>
+            <a:avLst/>
+            <a:gdLst/>
+            <a:ahLst/>
+            <a:cxnLst/>
+            <a:rect l="l" t="t" r="r" b="b"/>
             <a:pathLst>
-              <a:path extrusionOk="0" h="120000" w="120000">
+              <a:path w="120000" h="120000" extrusionOk="0">
                 <a:moveTo>
                   <a:pt x="0" y="0"/>
                 </a:moveTo>
@@ -1552,9 +1403,11 @@
       <p:sp>
         <p:nvSpPr>
           <p:cNvPr id="93" name="Google Shape;93;g566f053942_0_75:notes"/>
-          <p:cNvSpPr txBox="1"/>
+          <p:cNvSpPr txBox="1">
+            <a:spLocks noGrp="1"/>
+          </p:cNvSpPr>
           <p:nvPr>
-            <p:ph idx="1" type="body"/>
+            <p:ph type="body" idx="1"/>
           </p:nvPr>
         </p:nvSpPr>
         <p:spPr>
@@ -1567,12 +1420,12 @@
           </a:prstGeom>
         </p:spPr>
         <p:txBody>
-          <a:bodyPr anchorCtr="0" anchor="t" bIns="91425" lIns="91425" spcFirstLastPara="1" rIns="91425" wrap="square" tIns="91425">
+          <a:bodyPr spcFirstLastPara="1" wrap="square" lIns="91425" tIns="91425" rIns="91425" bIns="91425" anchor="t" anchorCtr="0">
             <a:noAutofit/>
           </a:bodyPr>
           <a:lstStyle/>
           <a:p>
-            <a:pPr indent="0" lvl="0" marL="0" rtl="0" algn="l">
+            <a:pPr marL="0" lvl="0" indent="0" algn="l" rtl="0">
               <a:spcBef>
                 <a:spcPts val="0"/>
               </a:spcBef>
@@ -1581,9 +1434,6 @@
               </a:spcAft>
               <a:buNone/>
             </a:pPr>
-            <a:r>
-              <a:t/>
-            </a:r>
             <a:endParaRPr/>
           </a:p>
         </p:txBody>
@@ -1597,11 +1447,11 @@
 </file>
 
 <file path=ppt/notesSlides/notesSlide8.xml><?xml version="1.0" encoding="utf-8"?>
-<p:notes xmlns:a="http://schemas.openxmlformats.org/drawingml/2006/main" xmlns:r="http://schemas.openxmlformats.org/officeDocument/2006/relationships" xmlns:mc="http://schemas.openxmlformats.org/markup-compatibility/2006" xmlns:mv="urn:schemas-microsoft-com:mac:vml" xmlns:p="http://schemas.openxmlformats.org/presentationml/2006/main" xmlns:c="http://schemas.openxmlformats.org/drawingml/2006/chart" xmlns:dgm="http://schemas.openxmlformats.org/drawingml/2006/diagram" xmlns:o="urn:schemas-microsoft-com:office:office" xmlns:v="urn:schemas-microsoft-com:vml" xmlns:pvml="urn:schemas-microsoft-com:office:powerpoint" xmlns:com="http://schemas.openxmlformats.org/drawingml/2006/compatibility" xmlns:p14="http://schemas.microsoft.com/office/powerpoint/2010/main" xmlns:p15="http://schemas.microsoft.com/office/powerpoint/2012/main" xmlns:ahyp="http://schemas.microsoft.com/office/drawing/2018/hyperlinkcolor" showMasterPhAnim="0" showMasterSp="0">
+<p:notes xmlns:a="http://schemas.openxmlformats.org/drawingml/2006/main" xmlns:r="http://schemas.openxmlformats.org/officeDocument/2006/relationships" xmlns:p="http://schemas.openxmlformats.org/presentationml/2006/main" showMasterSp="0" showMasterPhAnim="0">
   <p:cSld>
     <p:spTree>
       <p:nvGrpSpPr>
-        <p:cNvPr id="97" name="Shape 97"/>
+        <p:cNvPr id="1" name="Shape 97"/>
         <p:cNvGrpSpPr/>
         <p:nvPr/>
       </p:nvGrpSpPr>
@@ -1616,9 +1466,11 @@
       <p:sp>
         <p:nvSpPr>
           <p:cNvPr id="98" name="Google Shape;98;g566f053942_0_80:notes"/>
-          <p:cNvSpPr/>
+          <p:cNvSpPr>
+            <a:spLocks noGrp="1" noRot="1" noChangeAspect="1"/>
+          </p:cNvSpPr>
           <p:nvPr>
-            <p:ph idx="2" type="sldImg"/>
+            <p:ph type="sldImg" idx="2"/>
           </p:nvPr>
         </p:nvSpPr>
         <p:spPr>
@@ -1627,9 +1479,13 @@
             <a:ext cx="6096000" cy="3429000"/>
           </a:xfrm>
           <a:custGeom>
-            <a:rect b="b" l="l" r="r" t="t"/>
+            <a:avLst/>
+            <a:gdLst/>
+            <a:ahLst/>
+            <a:cxnLst/>
+            <a:rect l="l" t="t" r="r" b="b"/>
             <a:pathLst>
-              <a:path extrusionOk="0" h="120000" w="120000">
+              <a:path w="120000" h="120000" extrusionOk="0">
                 <a:moveTo>
                   <a:pt x="0" y="0"/>
                 </a:moveTo>
@@ -1651,9 +1507,11 @@
       <p:sp>
         <p:nvSpPr>
           <p:cNvPr id="99" name="Google Shape;99;g566f053942_0_80:notes"/>
-          <p:cNvSpPr txBox="1"/>
+          <p:cNvSpPr txBox="1">
+            <a:spLocks noGrp="1"/>
+          </p:cNvSpPr>
           <p:nvPr>
-            <p:ph idx="1" type="body"/>
+            <p:ph type="body" idx="1"/>
           </p:nvPr>
         </p:nvSpPr>
         <p:spPr>
@@ -1666,12 +1524,12 @@
           </a:prstGeom>
         </p:spPr>
         <p:txBody>
-          <a:bodyPr anchorCtr="0" anchor="t" bIns="91425" lIns="91425" spcFirstLastPara="1" rIns="91425" wrap="square" tIns="91425">
+          <a:bodyPr spcFirstLastPara="1" wrap="square" lIns="91425" tIns="91425" rIns="91425" bIns="91425" anchor="t" anchorCtr="0">
             <a:noAutofit/>
           </a:bodyPr>
           <a:lstStyle/>
           <a:p>
-            <a:pPr indent="0" lvl="0" marL="0" rtl="0" algn="l">
+            <a:pPr marL="0" lvl="0" indent="0" algn="l" rtl="0">
               <a:spcBef>
                 <a:spcPts val="0"/>
               </a:spcBef>
@@ -1680,9 +1538,6 @@
               </a:spcAft>
               <a:buNone/>
             </a:pPr>
-            <a:r>
-              <a:t/>
-            </a:r>
             <a:endParaRPr/>
           </a:p>
         </p:txBody>
@@ -1696,11 +1551,11 @@
 </file>
 
 <file path=ppt/notesSlides/notesSlide9.xml><?xml version="1.0" encoding="utf-8"?>
-<p:notes xmlns:a="http://schemas.openxmlformats.org/drawingml/2006/main" xmlns:r="http://schemas.openxmlformats.org/officeDocument/2006/relationships" xmlns:mc="http://schemas.openxmlformats.org/markup-compatibility/2006" xmlns:mv="urn:schemas-microsoft-com:mac:vml" xmlns:p="http://schemas.openxmlformats.org/presentationml/2006/main" xmlns:c="http://schemas.openxmlformats.org/drawingml/2006/chart" xmlns:dgm="http://schemas.openxmlformats.org/drawingml/2006/diagram" xmlns:o="urn:schemas-microsoft-com:office:office" xmlns:v="urn:schemas-microsoft-com:vml" xmlns:pvml="urn:schemas-microsoft-com:office:powerpoint" xmlns:com="http://schemas.openxmlformats.org/drawingml/2006/compatibility" xmlns:p14="http://schemas.microsoft.com/office/powerpoint/2010/main" xmlns:p15="http://schemas.microsoft.com/office/powerpoint/2012/main" xmlns:ahyp="http://schemas.microsoft.com/office/drawing/2018/hyperlinkcolor" showMasterPhAnim="0" showMasterSp="0">
+<p:notes xmlns:a="http://schemas.openxmlformats.org/drawingml/2006/main" xmlns:r="http://schemas.openxmlformats.org/officeDocument/2006/relationships" xmlns:p="http://schemas.openxmlformats.org/presentationml/2006/main" showMasterSp="0" showMasterPhAnim="0">
   <p:cSld>
     <p:spTree>
       <p:nvGrpSpPr>
-        <p:cNvPr id="103" name="Shape 103"/>
+        <p:cNvPr id="1" name="Shape 103"/>
         <p:cNvGrpSpPr/>
         <p:nvPr/>
       </p:nvGrpSpPr>
@@ -1715,9 +1570,11 @@
       <p:sp>
         <p:nvSpPr>
           <p:cNvPr id="104" name="Google Shape;104;g566f053942_0_95:notes"/>
-          <p:cNvSpPr/>
+          <p:cNvSpPr>
+            <a:spLocks noGrp="1" noRot="1" noChangeAspect="1"/>
+          </p:cNvSpPr>
           <p:nvPr>
-            <p:ph idx="2" type="sldImg"/>
+            <p:ph type="sldImg" idx="2"/>
           </p:nvPr>
         </p:nvSpPr>
         <p:spPr>
@@ -1726,9 +1583,13 @@
             <a:ext cx="6096000" cy="3429000"/>
           </a:xfrm>
           <a:custGeom>
-            <a:rect b="b" l="l" r="r" t="t"/>
+            <a:avLst/>
+            <a:gdLst/>
+            <a:ahLst/>
+            <a:cxnLst/>
+            <a:rect l="l" t="t" r="r" b="b"/>
             <a:pathLst>
-              <a:path extrusionOk="0" h="120000" w="120000">
+              <a:path w="120000" h="120000" extrusionOk="0">
                 <a:moveTo>
                   <a:pt x="0" y="0"/>
                 </a:moveTo>
@@ -1750,9 +1611,11 @@
       <p:sp>
         <p:nvSpPr>
           <p:cNvPr id="105" name="Google Shape;105;g566f053942_0_95:notes"/>
-          <p:cNvSpPr txBox="1"/>
+          <p:cNvSpPr txBox="1">
+            <a:spLocks noGrp="1"/>
+          </p:cNvSpPr>
           <p:nvPr>
-            <p:ph idx="1" type="body"/>
+            <p:ph type="body" idx="1"/>
           </p:nvPr>
         </p:nvSpPr>
         <p:spPr>
@@ -1765,12 +1628,12 @@
           </a:prstGeom>
         </p:spPr>
         <p:txBody>
-          <a:bodyPr anchorCtr="0" anchor="t" bIns="91425" lIns="91425" spcFirstLastPara="1" rIns="91425" wrap="square" tIns="91425">
+          <a:bodyPr spcFirstLastPara="1" wrap="square" lIns="91425" tIns="91425" rIns="91425" bIns="91425" anchor="t" anchorCtr="0">
             <a:noAutofit/>
           </a:bodyPr>
           <a:lstStyle/>
           <a:p>
-            <a:pPr indent="0" lvl="0" marL="0" rtl="0" algn="l">
+            <a:pPr marL="0" lvl="0" indent="0" algn="l" rtl="0">
               <a:spcBef>
                 <a:spcPts val="0"/>
               </a:spcBef>
@@ -1779,9 +1642,6 @@
               </a:spcAft>
               <a:buNone/>
             </a:pPr>
-            <a:r>
-              <a:t/>
-            </a:r>
             <a:endParaRPr/>
           </a:p>
         </p:txBody>
@@ -1795,18 +1655,19 @@
 </file>
 
 <file path=ppt/slideLayouts/slideLayout1.xml><?xml version="1.0" encoding="utf-8"?>
-<p:sldLayout xmlns:a="http://schemas.openxmlformats.org/drawingml/2006/main" xmlns:r="http://schemas.openxmlformats.org/officeDocument/2006/relationships" xmlns:mc="http://schemas.openxmlformats.org/markup-compatibility/2006" xmlns:mv="urn:schemas-microsoft-com:mac:vml" xmlns:p="http://schemas.openxmlformats.org/presentationml/2006/main" xmlns:c="http://schemas.openxmlformats.org/drawingml/2006/chart" xmlns:dgm="http://schemas.openxmlformats.org/drawingml/2006/diagram" xmlns:o="urn:schemas-microsoft-com:office:office" xmlns:v="urn:schemas-microsoft-com:vml" xmlns:pvml="urn:schemas-microsoft-com:office:powerpoint" xmlns:com="http://schemas.openxmlformats.org/drawingml/2006/compatibility" xmlns:p14="http://schemas.microsoft.com/office/powerpoint/2010/main" xmlns:p15="http://schemas.microsoft.com/office/powerpoint/2012/main" xmlns:ahyp="http://schemas.microsoft.com/office/drawing/2018/hyperlinkcolor" matchingName="Title slide" type="title">
+<p:sldLayout xmlns:a="http://schemas.openxmlformats.org/drawingml/2006/main" xmlns:r="http://schemas.openxmlformats.org/officeDocument/2006/relationships" xmlns:p="http://schemas.openxmlformats.org/presentationml/2006/main" matchingName="Title slide" type="title">
   <p:cSld name="TITLE">
     <p:bg>
       <p:bgPr>
         <a:solidFill>
           <a:schemeClr val="dk1"/>
         </a:solidFill>
+        <a:effectLst/>
       </p:bgPr>
     </p:bg>
     <p:spTree>
       <p:nvGrpSpPr>
-        <p:cNvPr id="9" name="Shape 9"/>
+        <p:cNvPr id="1" name="Shape 9"/>
         <p:cNvGrpSpPr/>
         <p:nvPr/>
       </p:nvGrpSpPr>
@@ -1833,21 +1694,23 @@
             <a:avLst/>
           </a:prstGeom>
           <a:noFill/>
-          <a:ln cap="flat" cmpd="sng" w="19050">
+          <a:ln w="19050" cap="flat" cmpd="sng">
             <a:solidFill>
               <a:schemeClr val="lt2"/>
             </a:solidFill>
             <a:prstDash val="solid"/>
             <a:round/>
-            <a:headEnd len="sm" w="sm" type="none"/>
-            <a:tailEnd len="sm" w="sm" type="none"/>
+            <a:headEnd type="none" w="sm" len="sm"/>
+            <a:tailEnd type="none" w="sm" len="sm"/>
           </a:ln>
         </p:spPr>
       </p:cxnSp>
       <p:sp>
         <p:nvSpPr>
           <p:cNvPr id="11" name="Google Shape;11;p2"/>
-          <p:cNvSpPr txBox="1"/>
+          <p:cNvSpPr txBox="1">
+            <a:spLocks noGrp="1"/>
+          </p:cNvSpPr>
           <p:nvPr>
             <p:ph type="ctrTitle"/>
           </p:nvPr>
@@ -1862,7 +1725,7 @@
           </a:prstGeom>
         </p:spPr>
         <p:txBody>
-          <a:bodyPr anchorCtr="0" anchor="b" bIns="91425" lIns="91425" spcFirstLastPara="1" rIns="91425" wrap="square" tIns="91425">
+          <a:bodyPr spcFirstLastPara="1" wrap="square" lIns="91425" tIns="91425" rIns="91425" bIns="91425" anchor="b" anchorCtr="0">
             <a:noAutofit/>
           </a:bodyPr>
           <a:lstStyle>
@@ -2029,15 +1892,19 @@
               </a:defRPr>
             </a:lvl9pPr>
           </a:lstStyle>
-          <a:p/>
+          <a:p>
+            <a:endParaRPr/>
+          </a:p>
         </p:txBody>
       </p:sp>
       <p:sp>
         <p:nvSpPr>
           <p:cNvPr id="12" name="Google Shape;12;p2"/>
-          <p:cNvSpPr txBox="1"/>
+          <p:cNvSpPr txBox="1">
+            <a:spLocks noGrp="1"/>
+          </p:cNvSpPr>
           <p:nvPr>
-            <p:ph idx="1" type="subTitle"/>
+            <p:ph type="subTitle" idx="1"/>
           </p:nvPr>
         </p:nvSpPr>
         <p:spPr>
@@ -2050,7 +1917,7 @@
           </a:prstGeom>
         </p:spPr>
         <p:txBody>
-          <a:bodyPr anchorCtr="0" anchor="t" bIns="91425" lIns="91425" spcFirstLastPara="1" rIns="91425" wrap="square" tIns="91425">
+          <a:bodyPr spcFirstLastPara="1" wrap="square" lIns="91425" tIns="91425" rIns="91425" bIns="91425" anchor="t" anchorCtr="0">
             <a:noAutofit/>
           </a:bodyPr>
           <a:lstStyle>
@@ -2244,15 +2111,19 @@
               </a:defRPr>
             </a:lvl9pPr>
           </a:lstStyle>
-          <a:p/>
+          <a:p>
+            <a:endParaRPr/>
+          </a:p>
         </p:txBody>
       </p:sp>
       <p:sp>
         <p:nvSpPr>
           <p:cNvPr id="13" name="Google Shape;13;p2"/>
-          <p:cNvSpPr txBox="1"/>
+          <p:cNvSpPr txBox="1">
+            <a:spLocks noGrp="1"/>
+          </p:cNvSpPr>
           <p:nvPr>
-            <p:ph idx="12" type="sldNum"/>
+            <p:ph type="sldNum" idx="12"/>
           </p:nvPr>
         </p:nvSpPr>
         <p:spPr>
@@ -2265,7 +2136,7 @@
           </a:prstGeom>
         </p:spPr>
         <p:txBody>
-          <a:bodyPr anchorCtr="0" anchor="ctr" bIns="91425" lIns="91425" spcFirstLastPara="1" rIns="91425" wrap="square" tIns="91425">
+          <a:bodyPr spcFirstLastPara="1" wrap="square" lIns="91425" tIns="91425" rIns="91425" bIns="91425" anchor="ctr" anchorCtr="0">
             <a:noAutofit/>
           </a:bodyPr>
           <a:lstStyle>
@@ -2343,7 +2214,7 @@
             </a:lvl9pPr>
           </a:lstStyle>
           <a:p>
-            <a:pPr indent="0" lvl="0" marL="0" rtl="0" algn="r">
+            <a:pPr marL="0" lvl="0" indent="0" algn="r" rtl="0">
               <a:spcBef>
                 <a:spcPts val="0"/>
               </a:spcBef>
@@ -2369,11 +2240,11 @@
 </file>
 
 <file path=ppt/slideLayouts/slideLayout10.xml><?xml version="1.0" encoding="utf-8"?>
-<p:sldLayout xmlns:a="http://schemas.openxmlformats.org/drawingml/2006/main" xmlns:r="http://schemas.openxmlformats.org/officeDocument/2006/relationships" xmlns:mc="http://schemas.openxmlformats.org/markup-compatibility/2006" xmlns:mv="urn:schemas-microsoft-com:mac:vml" xmlns:p="http://schemas.openxmlformats.org/presentationml/2006/main" xmlns:c="http://schemas.openxmlformats.org/drawingml/2006/chart" xmlns:dgm="http://schemas.openxmlformats.org/drawingml/2006/diagram" xmlns:o="urn:schemas-microsoft-com:office:office" xmlns:v="urn:schemas-microsoft-com:vml" xmlns:pvml="urn:schemas-microsoft-com:office:powerpoint" xmlns:com="http://schemas.openxmlformats.org/drawingml/2006/compatibility" xmlns:p14="http://schemas.microsoft.com/office/powerpoint/2010/main" xmlns:p15="http://schemas.microsoft.com/office/powerpoint/2012/main" xmlns:ahyp="http://schemas.microsoft.com/office/drawing/2018/hyperlinkcolor" matchingName="Big number">
+<p:sldLayout xmlns:a="http://schemas.openxmlformats.org/drawingml/2006/main" xmlns:r="http://schemas.openxmlformats.org/officeDocument/2006/relationships" xmlns:p="http://schemas.openxmlformats.org/presentationml/2006/main" matchingName="Big number">
   <p:cSld name="BIG_NUMBER">
     <p:spTree>
       <p:nvGrpSpPr>
-        <p:cNvPr id="48" name="Shape 48"/>
+        <p:cNvPr id="1" name="Shape 48"/>
         <p:cNvGrpSpPr/>
         <p:nvPr/>
       </p:nvGrpSpPr>
@@ -2407,12 +2278,12 @@
           </a:ln>
         </p:spPr>
         <p:txBody>
-          <a:bodyPr anchorCtr="0" anchor="ctr" bIns="91425" lIns="91425" spcFirstLastPara="1" rIns="91425" wrap="square" tIns="91425">
+          <a:bodyPr spcFirstLastPara="1" wrap="square" lIns="91425" tIns="91425" rIns="91425" bIns="91425" anchor="ctr" anchorCtr="0">
             <a:noAutofit/>
           </a:bodyPr>
           <a:lstStyle/>
           <a:p>
-            <a:pPr indent="0" lvl="0" marL="0" rtl="0" algn="l">
+            <a:pPr marL="0" lvl="0" indent="0" algn="l" rtl="0">
               <a:spcBef>
                 <a:spcPts val="0"/>
               </a:spcBef>
@@ -2421,9 +2292,6 @@
               </a:spcAft>
               <a:buNone/>
             </a:pPr>
-            <a:r>
-              <a:t/>
-            </a:r>
             <a:endParaRPr/>
           </a:p>
         </p:txBody>
@@ -2431,9 +2299,11 @@
       <p:sp>
         <p:nvSpPr>
           <p:cNvPr id="50" name="Google Shape;50;p11"/>
-          <p:cNvSpPr txBox="1"/>
+          <p:cNvSpPr txBox="1">
+            <a:spLocks noGrp="1"/>
+          </p:cNvSpPr>
           <p:nvPr>
-            <p:ph hasCustomPrompt="1" type="title"/>
+            <p:ph type="title" hasCustomPrompt="1"/>
           </p:nvPr>
         </p:nvSpPr>
         <p:spPr>
@@ -2446,7 +2316,7 @@
           </a:prstGeom>
         </p:spPr>
         <p:txBody>
-          <a:bodyPr anchorCtr="0" anchor="ctr" bIns="91425" lIns="91425" spcFirstLastPara="1" rIns="91425" wrap="square" tIns="91425">
+          <a:bodyPr spcFirstLastPara="1" wrap="square" lIns="91425" tIns="91425" rIns="91425" bIns="91425" anchor="ctr" anchorCtr="0">
             <a:noAutofit/>
           </a:bodyPr>
           <a:lstStyle>
@@ -2459,7 +2329,7 @@
               </a:spcAft>
               <a:buSzPts val="14000"/>
               <a:buNone/>
-              <a:defRPr b="1" sz="14000"/>
+              <a:defRPr sz="14000" b="1"/>
             </a:lvl1pPr>
             <a:lvl2pPr lvl="1" algn="ctr">
               <a:spcBef>
@@ -2470,7 +2340,7 @@
               </a:spcAft>
               <a:buSzPts val="14000"/>
               <a:buNone/>
-              <a:defRPr b="1" sz="14000"/>
+              <a:defRPr sz="14000" b="1"/>
             </a:lvl2pPr>
             <a:lvl3pPr lvl="2" algn="ctr">
               <a:spcBef>
@@ -2481,7 +2351,7 @@
               </a:spcAft>
               <a:buSzPts val="14000"/>
               <a:buNone/>
-              <a:defRPr b="1" sz="14000"/>
+              <a:defRPr sz="14000" b="1"/>
             </a:lvl3pPr>
             <a:lvl4pPr lvl="3" algn="ctr">
               <a:spcBef>
@@ -2492,7 +2362,7 @@
               </a:spcAft>
               <a:buSzPts val="14000"/>
               <a:buNone/>
-              <a:defRPr b="1" sz="14000"/>
+              <a:defRPr sz="14000" b="1"/>
             </a:lvl4pPr>
             <a:lvl5pPr lvl="4" algn="ctr">
               <a:spcBef>
@@ -2503,7 +2373,7 @@
               </a:spcAft>
               <a:buSzPts val="14000"/>
               <a:buNone/>
-              <a:defRPr b="1" sz="14000"/>
+              <a:defRPr sz="14000" b="1"/>
             </a:lvl5pPr>
             <a:lvl6pPr lvl="5" algn="ctr">
               <a:spcBef>
@@ -2514,7 +2384,7 @@
               </a:spcAft>
               <a:buSzPts val="14000"/>
               <a:buNone/>
-              <a:defRPr b="1" sz="14000"/>
+              <a:defRPr sz="14000" b="1"/>
             </a:lvl6pPr>
             <a:lvl7pPr lvl="6" algn="ctr">
               <a:spcBef>
@@ -2525,7 +2395,7 @@
               </a:spcAft>
               <a:buSzPts val="14000"/>
               <a:buNone/>
-              <a:defRPr b="1" sz="14000"/>
+              <a:defRPr sz="14000" b="1"/>
             </a:lvl7pPr>
             <a:lvl8pPr lvl="7" algn="ctr">
               <a:spcBef>
@@ -2536,7 +2406,7 @@
               </a:spcAft>
               <a:buSzPts val="14000"/>
               <a:buNone/>
-              <a:defRPr b="1" sz="14000"/>
+              <a:defRPr sz="14000" b="1"/>
             </a:lvl8pPr>
             <a:lvl9pPr lvl="8" algn="ctr">
               <a:spcBef>
@@ -2547,7 +2417,7 @@
               </a:spcAft>
               <a:buSzPts val="14000"/>
               <a:buNone/>
-              <a:defRPr b="1" sz="14000"/>
+              <a:defRPr sz="14000" b="1"/>
             </a:lvl9pPr>
           </a:lstStyle>
           <a:p>
@@ -2560,9 +2430,11 @@
       <p:sp>
         <p:nvSpPr>
           <p:cNvPr id="51" name="Google Shape;51;p11"/>
-          <p:cNvSpPr txBox="1"/>
+          <p:cNvSpPr txBox="1">
+            <a:spLocks noGrp="1"/>
+          </p:cNvSpPr>
           <p:nvPr>
-            <p:ph idx="1" type="body"/>
+            <p:ph type="body" idx="1"/>
           </p:nvPr>
         </p:nvSpPr>
         <p:spPr>
@@ -2575,11 +2447,11 @@
           </a:prstGeom>
         </p:spPr>
         <p:txBody>
-          <a:bodyPr anchorCtr="0" anchor="t" bIns="91425" lIns="91425" spcFirstLastPara="1" rIns="91425" wrap="square" tIns="91425">
+          <a:bodyPr spcFirstLastPara="1" wrap="square" lIns="91425" tIns="91425" rIns="91425" bIns="91425" anchor="t" anchorCtr="0">
             <a:noAutofit/>
           </a:bodyPr>
           <a:lstStyle>
-            <a:lvl1pPr indent="-342900" lvl="0" marL="457200" algn="ctr">
+            <a:lvl1pPr marL="457200" lvl="0" indent="-342900" algn="ctr">
               <a:spcBef>
                 <a:spcPts val="0"/>
               </a:spcBef>
@@ -2590,7 +2462,7 @@
               <a:buChar char="●"/>
               <a:defRPr/>
             </a:lvl1pPr>
-            <a:lvl2pPr indent="-317500" lvl="1" marL="914400" algn="ctr">
+            <a:lvl2pPr marL="914400" lvl="1" indent="-317500" algn="ctr">
               <a:spcBef>
                 <a:spcPts val="1600"/>
               </a:spcBef>
@@ -2601,7 +2473,7 @@
               <a:buChar char="○"/>
               <a:defRPr/>
             </a:lvl2pPr>
-            <a:lvl3pPr indent="-317500" lvl="2" marL="1371600" algn="ctr">
+            <a:lvl3pPr marL="1371600" lvl="2" indent="-317500" algn="ctr">
               <a:spcBef>
                 <a:spcPts val="1600"/>
               </a:spcBef>
@@ -2612,7 +2484,7 @@
               <a:buChar char="■"/>
               <a:defRPr/>
             </a:lvl3pPr>
-            <a:lvl4pPr indent="-317500" lvl="3" marL="1828800" algn="ctr">
+            <a:lvl4pPr marL="1828800" lvl="3" indent="-317500" algn="ctr">
               <a:spcBef>
                 <a:spcPts val="1600"/>
               </a:spcBef>
@@ -2623,7 +2495,7 @@
               <a:buChar char="●"/>
               <a:defRPr/>
             </a:lvl4pPr>
-            <a:lvl5pPr indent="-317500" lvl="4" marL="2286000" algn="ctr">
+            <a:lvl5pPr marL="2286000" lvl="4" indent="-317500" algn="ctr">
               <a:spcBef>
                 <a:spcPts val="1600"/>
               </a:spcBef>
@@ -2634,7 +2506,7 @@
               <a:buChar char="○"/>
               <a:defRPr/>
             </a:lvl5pPr>
-            <a:lvl6pPr indent="-317500" lvl="5" marL="2743200" algn="ctr">
+            <a:lvl6pPr marL="2743200" lvl="5" indent="-317500" algn="ctr">
               <a:spcBef>
                 <a:spcPts val="1600"/>
               </a:spcBef>
@@ -2645,7 +2517,7 @@
               <a:buChar char="■"/>
               <a:defRPr/>
             </a:lvl6pPr>
-            <a:lvl7pPr indent="-317500" lvl="6" marL="3200400" algn="ctr">
+            <a:lvl7pPr marL="3200400" lvl="6" indent="-317500" algn="ctr">
               <a:spcBef>
                 <a:spcPts val="1600"/>
               </a:spcBef>
@@ -2656,7 +2528,7 @@
               <a:buChar char="●"/>
               <a:defRPr/>
             </a:lvl7pPr>
-            <a:lvl8pPr indent="-317500" lvl="7" marL="3657600" algn="ctr">
+            <a:lvl8pPr marL="3657600" lvl="7" indent="-317500" algn="ctr">
               <a:spcBef>
                 <a:spcPts val="1600"/>
               </a:spcBef>
@@ -2667,7 +2539,7 @@
               <a:buChar char="○"/>
               <a:defRPr/>
             </a:lvl8pPr>
-            <a:lvl9pPr indent="-317500" lvl="8" marL="4114800" algn="ctr">
+            <a:lvl9pPr marL="4114800" lvl="8" indent="-317500" algn="ctr">
               <a:spcBef>
                 <a:spcPts val="1600"/>
               </a:spcBef>
@@ -2679,15 +2551,19 @@
               <a:defRPr/>
             </a:lvl9pPr>
           </a:lstStyle>
-          <a:p/>
+          <a:p>
+            <a:endParaRPr/>
+          </a:p>
         </p:txBody>
       </p:sp>
       <p:sp>
         <p:nvSpPr>
           <p:cNvPr id="52" name="Google Shape;52;p11"/>
-          <p:cNvSpPr txBox="1"/>
+          <p:cNvSpPr txBox="1">
+            <a:spLocks noGrp="1"/>
+          </p:cNvSpPr>
           <p:nvPr>
-            <p:ph idx="12" type="sldNum"/>
+            <p:ph type="sldNum" idx="12"/>
           </p:nvPr>
         </p:nvSpPr>
         <p:spPr>
@@ -2700,7 +2576,7 @@
           </a:prstGeom>
         </p:spPr>
         <p:txBody>
-          <a:bodyPr anchorCtr="0" anchor="ctr" bIns="91425" lIns="91425" spcFirstLastPara="1" rIns="91425" wrap="square" tIns="91425">
+          <a:bodyPr spcFirstLastPara="1" wrap="square" lIns="91425" tIns="91425" rIns="91425" bIns="91425" anchor="ctr" anchorCtr="0">
             <a:noAutofit/>
           </a:bodyPr>
           <a:lstStyle>
@@ -2742,7 +2618,7 @@
             </a:lvl9pPr>
           </a:lstStyle>
           <a:p>
-            <a:pPr indent="0" lvl="0" marL="0" rtl="0" algn="r">
+            <a:pPr marL="0" lvl="0" indent="0" algn="r" rtl="0">
               <a:spcBef>
                 <a:spcPts val="0"/>
               </a:spcBef>
@@ -2768,11 +2644,11 @@
 </file>
 
 <file path=ppt/slideLayouts/slideLayout11.xml><?xml version="1.0" encoding="utf-8"?>
-<p:sldLayout xmlns:a="http://schemas.openxmlformats.org/drawingml/2006/main" xmlns:r="http://schemas.openxmlformats.org/officeDocument/2006/relationships" xmlns:mc="http://schemas.openxmlformats.org/markup-compatibility/2006" xmlns:mv="urn:schemas-microsoft-com:mac:vml" xmlns:p="http://schemas.openxmlformats.org/presentationml/2006/main" xmlns:c="http://schemas.openxmlformats.org/drawingml/2006/chart" xmlns:dgm="http://schemas.openxmlformats.org/drawingml/2006/diagram" xmlns:o="urn:schemas-microsoft-com:office:office" xmlns:v="urn:schemas-microsoft-com:vml" xmlns:pvml="urn:schemas-microsoft-com:office:powerpoint" xmlns:com="http://schemas.openxmlformats.org/drawingml/2006/compatibility" xmlns:p14="http://schemas.microsoft.com/office/powerpoint/2010/main" xmlns:p15="http://schemas.microsoft.com/office/powerpoint/2012/main" xmlns:ahyp="http://schemas.microsoft.com/office/drawing/2018/hyperlinkcolor" matchingName="Blank" type="blank">
+<p:sldLayout xmlns:a="http://schemas.openxmlformats.org/drawingml/2006/main" xmlns:r="http://schemas.openxmlformats.org/officeDocument/2006/relationships" xmlns:p="http://schemas.openxmlformats.org/presentationml/2006/main" matchingName="Blank" type="blank">
   <p:cSld name="BLANK">
     <p:spTree>
       <p:nvGrpSpPr>
-        <p:cNvPr id="53" name="Shape 53"/>
+        <p:cNvPr id="1" name="Shape 53"/>
         <p:cNvGrpSpPr/>
         <p:nvPr/>
       </p:nvGrpSpPr>
@@ -2787,9 +2663,11 @@
       <p:sp>
         <p:nvSpPr>
           <p:cNvPr id="54" name="Google Shape;54;p12"/>
-          <p:cNvSpPr txBox="1"/>
+          <p:cNvSpPr txBox="1">
+            <a:spLocks noGrp="1"/>
+          </p:cNvSpPr>
           <p:nvPr>
-            <p:ph idx="12" type="sldNum"/>
+            <p:ph type="sldNum" idx="12"/>
           </p:nvPr>
         </p:nvSpPr>
         <p:spPr>
@@ -2802,7 +2680,7 @@
           </a:prstGeom>
         </p:spPr>
         <p:txBody>
-          <a:bodyPr anchorCtr="0" anchor="ctr" bIns="91425" lIns="91425" spcFirstLastPara="1" rIns="91425" wrap="square" tIns="91425">
+          <a:bodyPr spcFirstLastPara="1" wrap="square" lIns="91425" tIns="91425" rIns="91425" bIns="91425" anchor="ctr" anchorCtr="0">
             <a:noAutofit/>
           </a:bodyPr>
           <a:lstStyle>
@@ -2844,7 +2722,7 @@
             </a:lvl9pPr>
           </a:lstStyle>
           <a:p>
-            <a:pPr indent="0" lvl="0" marL="0" rtl="0" algn="r">
+            <a:pPr marL="0" lvl="0" indent="0" algn="r" rtl="0">
               <a:spcBef>
                 <a:spcPts val="0"/>
               </a:spcBef>
@@ -2870,18 +2748,19 @@
 </file>
 
 <file path=ppt/slideLayouts/slideLayout2.xml><?xml version="1.0" encoding="utf-8"?>
-<p:sldLayout xmlns:a="http://schemas.openxmlformats.org/drawingml/2006/main" xmlns:r="http://schemas.openxmlformats.org/officeDocument/2006/relationships" xmlns:mc="http://schemas.openxmlformats.org/markup-compatibility/2006" xmlns:mv="urn:schemas-microsoft-com:mac:vml" xmlns:p="http://schemas.openxmlformats.org/presentationml/2006/main" xmlns:c="http://schemas.openxmlformats.org/drawingml/2006/chart" xmlns:dgm="http://schemas.openxmlformats.org/drawingml/2006/diagram" xmlns:o="urn:schemas-microsoft-com:office:office" xmlns:v="urn:schemas-microsoft-com:vml" xmlns:pvml="urn:schemas-microsoft-com:office:powerpoint" xmlns:com="http://schemas.openxmlformats.org/drawingml/2006/compatibility" xmlns:p14="http://schemas.microsoft.com/office/powerpoint/2010/main" xmlns:p15="http://schemas.microsoft.com/office/powerpoint/2012/main" xmlns:ahyp="http://schemas.microsoft.com/office/drawing/2018/hyperlinkcolor" matchingName="Section header" type="secHead">
+<p:sldLayout xmlns:a="http://schemas.openxmlformats.org/drawingml/2006/main" xmlns:r="http://schemas.openxmlformats.org/officeDocument/2006/relationships" xmlns:p="http://schemas.openxmlformats.org/presentationml/2006/main" matchingName="Section header" type="secHead">
   <p:cSld name="SECTION_HEADER">
     <p:bg>
       <p:bgPr>
         <a:solidFill>
           <a:schemeClr val="dk1"/>
         </a:solidFill>
+        <a:effectLst/>
       </p:bgPr>
     </p:bg>
     <p:spTree>
       <p:nvGrpSpPr>
-        <p:cNvPr id="14" name="Shape 14"/>
+        <p:cNvPr id="1" name="Shape 14"/>
         <p:cNvGrpSpPr/>
         <p:nvPr/>
       </p:nvGrpSpPr>
@@ -2908,21 +2787,23 @@
             <a:avLst/>
           </a:prstGeom>
           <a:noFill/>
-          <a:ln cap="flat" cmpd="sng" w="19050">
+          <a:ln w="19050" cap="flat" cmpd="sng">
             <a:solidFill>
               <a:schemeClr val="lt2"/>
             </a:solidFill>
             <a:prstDash val="solid"/>
             <a:round/>
-            <a:headEnd len="sm" w="sm" type="none"/>
-            <a:tailEnd len="sm" w="sm" type="none"/>
+            <a:headEnd type="none" w="sm" len="sm"/>
+            <a:tailEnd type="none" w="sm" len="sm"/>
           </a:ln>
         </p:spPr>
       </p:cxnSp>
       <p:sp>
         <p:nvSpPr>
           <p:cNvPr id="16" name="Google Shape;16;p3"/>
-          <p:cNvSpPr txBox="1"/>
+          <p:cNvSpPr txBox="1">
+            <a:spLocks noGrp="1"/>
+          </p:cNvSpPr>
           <p:nvPr>
             <p:ph type="title"/>
           </p:nvPr>
@@ -2937,7 +2818,7 @@
           </a:prstGeom>
         </p:spPr>
         <p:txBody>
-          <a:bodyPr anchorCtr="0" anchor="b" bIns="91425" lIns="91425" spcFirstLastPara="1" rIns="91425" wrap="square" tIns="91425">
+          <a:bodyPr spcFirstLastPara="1" wrap="square" lIns="91425" tIns="91425" rIns="91425" bIns="91425" anchor="b" anchorCtr="0">
             <a:noAutofit/>
           </a:bodyPr>
           <a:lstStyle>
@@ -3104,15 +2985,19 @@
               </a:defRPr>
             </a:lvl9pPr>
           </a:lstStyle>
-          <a:p/>
+          <a:p>
+            <a:endParaRPr/>
+          </a:p>
         </p:txBody>
       </p:sp>
       <p:sp>
         <p:nvSpPr>
           <p:cNvPr id="17" name="Google Shape;17;p3"/>
-          <p:cNvSpPr txBox="1"/>
+          <p:cNvSpPr txBox="1">
+            <a:spLocks noGrp="1"/>
+          </p:cNvSpPr>
           <p:nvPr>
-            <p:ph idx="12" type="sldNum"/>
+            <p:ph type="sldNum" idx="12"/>
           </p:nvPr>
         </p:nvSpPr>
         <p:spPr>
@@ -3125,7 +3010,7 @@
           </a:prstGeom>
         </p:spPr>
         <p:txBody>
-          <a:bodyPr anchorCtr="0" anchor="ctr" bIns="91425" lIns="91425" spcFirstLastPara="1" rIns="91425" wrap="square" tIns="91425">
+          <a:bodyPr spcFirstLastPara="1" wrap="square" lIns="91425" tIns="91425" rIns="91425" bIns="91425" anchor="ctr" anchorCtr="0">
             <a:noAutofit/>
           </a:bodyPr>
           <a:lstStyle>
@@ -3203,7 +3088,7 @@
             </a:lvl9pPr>
           </a:lstStyle>
           <a:p>
-            <a:pPr indent="0" lvl="0" marL="0" rtl="0" algn="r">
+            <a:pPr marL="0" lvl="0" indent="0" algn="r" rtl="0">
               <a:spcBef>
                 <a:spcPts val="0"/>
               </a:spcBef>
@@ -3229,11 +3114,11 @@
 </file>
 
 <file path=ppt/slideLayouts/slideLayout3.xml><?xml version="1.0" encoding="utf-8"?>
-<p:sldLayout xmlns:a="http://schemas.openxmlformats.org/drawingml/2006/main" xmlns:r="http://schemas.openxmlformats.org/officeDocument/2006/relationships" xmlns:mc="http://schemas.openxmlformats.org/markup-compatibility/2006" xmlns:mv="urn:schemas-microsoft-com:mac:vml" xmlns:p="http://schemas.openxmlformats.org/presentationml/2006/main" xmlns:c="http://schemas.openxmlformats.org/drawingml/2006/chart" xmlns:dgm="http://schemas.openxmlformats.org/drawingml/2006/diagram" xmlns:o="urn:schemas-microsoft-com:office:office" xmlns:v="urn:schemas-microsoft-com:vml" xmlns:pvml="urn:schemas-microsoft-com:office:powerpoint" xmlns:com="http://schemas.openxmlformats.org/drawingml/2006/compatibility" xmlns:p14="http://schemas.microsoft.com/office/powerpoint/2010/main" xmlns:p15="http://schemas.microsoft.com/office/powerpoint/2012/main" xmlns:ahyp="http://schemas.microsoft.com/office/drawing/2018/hyperlinkcolor" matchingName="Title and body" type="tx">
+<p:sldLayout xmlns:a="http://schemas.openxmlformats.org/drawingml/2006/main" xmlns:r="http://schemas.openxmlformats.org/officeDocument/2006/relationships" xmlns:p="http://schemas.openxmlformats.org/presentationml/2006/main" matchingName="Title and body" type="tx">
   <p:cSld name="TITLE_AND_BODY">
     <p:spTree>
       <p:nvGrpSpPr>
-        <p:cNvPr id="18" name="Shape 18"/>
+        <p:cNvPr id="1" name="Shape 18"/>
         <p:cNvGrpSpPr/>
         <p:nvPr/>
       </p:nvGrpSpPr>
@@ -3267,12 +3152,12 @@
           </a:ln>
         </p:spPr>
         <p:txBody>
-          <a:bodyPr anchorCtr="0" anchor="ctr" bIns="91425" lIns="91425" spcFirstLastPara="1" rIns="91425" wrap="square" tIns="91425">
+          <a:bodyPr spcFirstLastPara="1" wrap="square" lIns="91425" tIns="91425" rIns="91425" bIns="91425" anchor="ctr" anchorCtr="0">
             <a:noAutofit/>
           </a:bodyPr>
           <a:lstStyle/>
           <a:p>
-            <a:pPr indent="0" lvl="0" marL="0" rtl="0" algn="l">
+            <a:pPr marL="0" lvl="0" indent="0" algn="l" rtl="0">
               <a:spcBef>
                 <a:spcPts val="0"/>
               </a:spcBef>
@@ -3281,9 +3166,6 @@
               </a:spcAft>
               <a:buNone/>
             </a:pPr>
-            <a:r>
-              <a:t/>
-            </a:r>
             <a:endParaRPr/>
           </a:p>
         </p:txBody>
@@ -3291,7 +3173,9 @@
       <p:sp>
         <p:nvSpPr>
           <p:cNvPr id="20" name="Google Shape;20;p4"/>
-          <p:cNvSpPr txBox="1"/>
+          <p:cNvSpPr txBox="1">
+            <a:spLocks noGrp="1"/>
+          </p:cNvSpPr>
           <p:nvPr>
             <p:ph type="title"/>
           </p:nvPr>
@@ -3306,7 +3190,7 @@
           </a:prstGeom>
         </p:spPr>
         <p:txBody>
-          <a:bodyPr anchorCtr="0" anchor="t" bIns="91425" lIns="91425" spcFirstLastPara="1" rIns="91425" wrap="square" tIns="91425">
+          <a:bodyPr spcFirstLastPara="1" wrap="square" lIns="91425" tIns="91425" rIns="91425" bIns="91425" anchor="t" anchorCtr="0">
             <a:noAutofit/>
           </a:bodyPr>
           <a:lstStyle>
@@ -3410,15 +3294,19 @@
               <a:defRPr/>
             </a:lvl9pPr>
           </a:lstStyle>
-          <a:p/>
+          <a:p>
+            <a:endParaRPr/>
+          </a:p>
         </p:txBody>
       </p:sp>
       <p:sp>
         <p:nvSpPr>
           <p:cNvPr id="21" name="Google Shape;21;p4"/>
-          <p:cNvSpPr txBox="1"/>
+          <p:cNvSpPr txBox="1">
+            <a:spLocks noGrp="1"/>
+          </p:cNvSpPr>
           <p:nvPr>
-            <p:ph idx="1" type="body"/>
+            <p:ph type="body" idx="1"/>
           </p:nvPr>
         </p:nvSpPr>
         <p:spPr>
@@ -3431,11 +3319,11 @@
           </a:prstGeom>
         </p:spPr>
         <p:txBody>
-          <a:bodyPr anchorCtr="0" anchor="t" bIns="91425" lIns="91425" spcFirstLastPara="1" rIns="91425" wrap="square" tIns="91425">
+          <a:bodyPr spcFirstLastPara="1" wrap="square" lIns="91425" tIns="91425" rIns="91425" bIns="91425" anchor="t" anchorCtr="0">
             <a:noAutofit/>
           </a:bodyPr>
           <a:lstStyle>
-            <a:lvl1pPr indent="-381000" lvl="0" marL="457200">
+            <a:lvl1pPr marL="457200" lvl="0" indent="-381000">
               <a:spcBef>
                 <a:spcPts val="0"/>
               </a:spcBef>
@@ -3446,7 +3334,7 @@
               <a:buChar char="●"/>
               <a:defRPr sz="2400"/>
             </a:lvl1pPr>
-            <a:lvl2pPr indent="-381000" lvl="1" marL="914400">
+            <a:lvl2pPr marL="914400" lvl="1" indent="-381000">
               <a:spcBef>
                 <a:spcPts val="1600"/>
               </a:spcBef>
@@ -3457,7 +3345,7 @@
               <a:buChar char="○"/>
               <a:defRPr sz="2400"/>
             </a:lvl2pPr>
-            <a:lvl3pPr indent="-381000" lvl="2" marL="1371600">
+            <a:lvl3pPr marL="1371600" lvl="2" indent="-381000">
               <a:spcBef>
                 <a:spcPts val="1600"/>
               </a:spcBef>
@@ -3468,7 +3356,7 @@
               <a:buChar char="■"/>
               <a:defRPr sz="2400"/>
             </a:lvl3pPr>
-            <a:lvl4pPr indent="-381000" lvl="3" marL="1828800">
+            <a:lvl4pPr marL="1828800" lvl="3" indent="-381000">
               <a:spcBef>
                 <a:spcPts val="1600"/>
               </a:spcBef>
@@ -3479,7 +3367,7 @@
               <a:buChar char="●"/>
               <a:defRPr sz="2400"/>
             </a:lvl4pPr>
-            <a:lvl5pPr indent="-381000" lvl="4" marL="2286000">
+            <a:lvl5pPr marL="2286000" lvl="4" indent="-381000">
               <a:spcBef>
                 <a:spcPts val="1600"/>
               </a:spcBef>
@@ -3490,7 +3378,7 @@
               <a:buChar char="○"/>
               <a:defRPr sz="2400"/>
             </a:lvl5pPr>
-            <a:lvl6pPr indent="-381000" lvl="5" marL="2743200">
+            <a:lvl6pPr marL="2743200" lvl="5" indent="-381000">
               <a:spcBef>
                 <a:spcPts val="1600"/>
               </a:spcBef>
@@ -3501,7 +3389,7 @@
               <a:buChar char="■"/>
               <a:defRPr sz="2400"/>
             </a:lvl6pPr>
-            <a:lvl7pPr indent="-381000" lvl="6" marL="3200400">
+            <a:lvl7pPr marL="3200400" lvl="6" indent="-381000">
               <a:spcBef>
                 <a:spcPts val="1600"/>
               </a:spcBef>
@@ -3512,7 +3400,7 @@
               <a:buChar char="●"/>
               <a:defRPr sz="2400"/>
             </a:lvl7pPr>
-            <a:lvl8pPr indent="-381000" lvl="7" marL="3657600">
+            <a:lvl8pPr marL="3657600" lvl="7" indent="-381000">
               <a:spcBef>
                 <a:spcPts val="1600"/>
               </a:spcBef>
@@ -3523,7 +3411,7 @@
               <a:buChar char="○"/>
               <a:defRPr sz="2400"/>
             </a:lvl8pPr>
-            <a:lvl9pPr indent="-381000" lvl="8" marL="4114800">
+            <a:lvl9pPr marL="4114800" lvl="8" indent="-381000">
               <a:spcBef>
                 <a:spcPts val="1600"/>
               </a:spcBef>
@@ -3535,15 +3423,19 @@
               <a:defRPr sz="2400"/>
             </a:lvl9pPr>
           </a:lstStyle>
-          <a:p/>
+          <a:p>
+            <a:endParaRPr/>
+          </a:p>
         </p:txBody>
       </p:sp>
       <p:sp>
         <p:nvSpPr>
           <p:cNvPr id="22" name="Google Shape;22;p4"/>
-          <p:cNvSpPr txBox="1"/>
+          <p:cNvSpPr txBox="1">
+            <a:spLocks noGrp="1"/>
+          </p:cNvSpPr>
           <p:nvPr>
-            <p:ph idx="12" type="sldNum"/>
+            <p:ph type="sldNum" idx="12"/>
           </p:nvPr>
         </p:nvSpPr>
         <p:spPr>
@@ -3556,7 +3448,7 @@
           </a:prstGeom>
         </p:spPr>
         <p:txBody>
-          <a:bodyPr anchorCtr="0" anchor="ctr" bIns="91425" lIns="91425" spcFirstLastPara="1" rIns="91425" wrap="square" tIns="91425">
+          <a:bodyPr spcFirstLastPara="1" wrap="square" lIns="91425" tIns="91425" rIns="91425" bIns="91425" anchor="ctr" anchorCtr="0">
             <a:noAutofit/>
           </a:bodyPr>
           <a:lstStyle>
@@ -3598,7 +3490,7 @@
             </a:lvl9pPr>
           </a:lstStyle>
           <a:p>
-            <a:pPr indent="0" lvl="0" marL="0" rtl="0" algn="r">
+            <a:pPr marL="0" lvl="0" indent="0" algn="r" rtl="0">
               <a:spcBef>
                 <a:spcPts val="0"/>
               </a:spcBef>
@@ -3624,11 +3516,11 @@
 </file>
 
 <file path=ppt/slideLayouts/slideLayout4.xml><?xml version="1.0" encoding="utf-8"?>
-<p:sldLayout xmlns:a="http://schemas.openxmlformats.org/drawingml/2006/main" xmlns:r="http://schemas.openxmlformats.org/officeDocument/2006/relationships" xmlns:mc="http://schemas.openxmlformats.org/markup-compatibility/2006" xmlns:mv="urn:schemas-microsoft-com:mac:vml" xmlns:p="http://schemas.openxmlformats.org/presentationml/2006/main" xmlns:c="http://schemas.openxmlformats.org/drawingml/2006/chart" xmlns:dgm="http://schemas.openxmlformats.org/drawingml/2006/diagram" xmlns:o="urn:schemas-microsoft-com:office:office" xmlns:v="urn:schemas-microsoft-com:vml" xmlns:pvml="urn:schemas-microsoft-com:office:powerpoint" xmlns:com="http://schemas.openxmlformats.org/drawingml/2006/compatibility" xmlns:p14="http://schemas.microsoft.com/office/powerpoint/2010/main" xmlns:p15="http://schemas.microsoft.com/office/powerpoint/2012/main" xmlns:ahyp="http://schemas.microsoft.com/office/drawing/2018/hyperlinkcolor" matchingName="Title and two columns" type="twoColTx">
+<p:sldLayout xmlns:a="http://schemas.openxmlformats.org/drawingml/2006/main" xmlns:r="http://schemas.openxmlformats.org/officeDocument/2006/relationships" xmlns:p="http://schemas.openxmlformats.org/presentationml/2006/main" matchingName="Title and two columns" type="twoColTx">
   <p:cSld name="TITLE_AND_TWO_COLUMNS">
     <p:spTree>
       <p:nvGrpSpPr>
-        <p:cNvPr id="23" name="Shape 23"/>
+        <p:cNvPr id="1" name="Shape 23"/>
         <p:cNvGrpSpPr/>
         <p:nvPr/>
       </p:nvGrpSpPr>
@@ -3643,7 +3535,9 @@
       <p:sp>
         <p:nvSpPr>
           <p:cNvPr id="24" name="Google Shape;24;p5"/>
-          <p:cNvSpPr txBox="1"/>
+          <p:cNvSpPr txBox="1">
+            <a:spLocks noGrp="1"/>
+          </p:cNvSpPr>
           <p:nvPr>
             <p:ph type="title"/>
           </p:nvPr>
@@ -3658,7 +3552,7 @@
           </a:prstGeom>
         </p:spPr>
         <p:txBody>
-          <a:bodyPr anchorCtr="0" anchor="t" bIns="91425" lIns="91425" spcFirstLastPara="1" rIns="91425" wrap="square" tIns="91425">
+          <a:bodyPr spcFirstLastPara="1" wrap="square" lIns="91425" tIns="91425" rIns="91425" bIns="91425" anchor="t" anchorCtr="0">
             <a:noAutofit/>
           </a:bodyPr>
           <a:lstStyle>
@@ -3762,15 +3656,19 @@
               <a:defRPr/>
             </a:lvl9pPr>
           </a:lstStyle>
-          <a:p/>
+          <a:p>
+            <a:endParaRPr/>
+          </a:p>
         </p:txBody>
       </p:sp>
       <p:sp>
         <p:nvSpPr>
           <p:cNvPr id="25" name="Google Shape;25;p5"/>
-          <p:cNvSpPr txBox="1"/>
+          <p:cNvSpPr txBox="1">
+            <a:spLocks noGrp="1"/>
+          </p:cNvSpPr>
           <p:nvPr>
-            <p:ph idx="1" type="body"/>
+            <p:ph type="body" idx="1"/>
           </p:nvPr>
         </p:nvSpPr>
         <p:spPr>
@@ -3783,11 +3681,11 @@
           </a:prstGeom>
         </p:spPr>
         <p:txBody>
-          <a:bodyPr anchorCtr="0" anchor="t" bIns="91425" lIns="91425" spcFirstLastPara="1" rIns="91425" wrap="square" tIns="91425">
+          <a:bodyPr spcFirstLastPara="1" wrap="square" lIns="91425" tIns="91425" rIns="91425" bIns="91425" anchor="t" anchorCtr="0">
             <a:noAutofit/>
           </a:bodyPr>
           <a:lstStyle>
-            <a:lvl1pPr indent="-317500" lvl="0" marL="457200">
+            <a:lvl1pPr marL="457200" lvl="0" indent="-317500">
               <a:spcBef>
                 <a:spcPts val="0"/>
               </a:spcBef>
@@ -3798,7 +3696,7 @@
               <a:buChar char="●"/>
               <a:defRPr sz="1400"/>
             </a:lvl1pPr>
-            <a:lvl2pPr indent="-304800" lvl="1" marL="914400">
+            <a:lvl2pPr marL="914400" lvl="1" indent="-304800">
               <a:spcBef>
                 <a:spcPts val="1600"/>
               </a:spcBef>
@@ -3809,7 +3707,7 @@
               <a:buChar char="○"/>
               <a:defRPr sz="1200"/>
             </a:lvl2pPr>
-            <a:lvl3pPr indent="-304800" lvl="2" marL="1371600">
+            <a:lvl3pPr marL="1371600" lvl="2" indent="-304800">
               <a:spcBef>
                 <a:spcPts val="1600"/>
               </a:spcBef>
@@ -3820,7 +3718,7 @@
               <a:buChar char="■"/>
               <a:defRPr sz="1200"/>
             </a:lvl3pPr>
-            <a:lvl4pPr indent="-304800" lvl="3" marL="1828800">
+            <a:lvl4pPr marL="1828800" lvl="3" indent="-304800">
               <a:spcBef>
                 <a:spcPts val="1600"/>
               </a:spcBef>
@@ -3831,7 +3729,7 @@
               <a:buChar char="●"/>
               <a:defRPr sz="1200"/>
             </a:lvl4pPr>
-            <a:lvl5pPr indent="-304800" lvl="4" marL="2286000">
+            <a:lvl5pPr marL="2286000" lvl="4" indent="-304800">
               <a:spcBef>
                 <a:spcPts val="1600"/>
               </a:spcBef>
@@ -3842,7 +3740,7 @@
               <a:buChar char="○"/>
               <a:defRPr sz="1200"/>
             </a:lvl5pPr>
-            <a:lvl6pPr indent="-304800" lvl="5" marL="2743200">
+            <a:lvl6pPr marL="2743200" lvl="5" indent="-304800">
               <a:spcBef>
                 <a:spcPts val="1600"/>
               </a:spcBef>
@@ -3853,7 +3751,7 @@
               <a:buChar char="■"/>
               <a:defRPr sz="1200"/>
             </a:lvl6pPr>
-            <a:lvl7pPr indent="-304800" lvl="6" marL="3200400">
+            <a:lvl7pPr marL="3200400" lvl="6" indent="-304800">
               <a:spcBef>
                 <a:spcPts val="1600"/>
               </a:spcBef>
@@ -3864,7 +3762,7 @@
               <a:buChar char="●"/>
               <a:defRPr sz="1200"/>
             </a:lvl7pPr>
-            <a:lvl8pPr indent="-304800" lvl="7" marL="3657600">
+            <a:lvl8pPr marL="3657600" lvl="7" indent="-304800">
               <a:spcBef>
                 <a:spcPts val="1600"/>
               </a:spcBef>
@@ -3875,7 +3773,7 @@
               <a:buChar char="○"/>
               <a:defRPr sz="1200"/>
             </a:lvl8pPr>
-            <a:lvl9pPr indent="-304800" lvl="8" marL="4114800">
+            <a:lvl9pPr marL="4114800" lvl="8" indent="-304800">
               <a:spcBef>
                 <a:spcPts val="1600"/>
               </a:spcBef>
@@ -3887,15 +3785,19 @@
               <a:defRPr sz="1200"/>
             </a:lvl9pPr>
           </a:lstStyle>
-          <a:p/>
+          <a:p>
+            <a:endParaRPr/>
+          </a:p>
         </p:txBody>
       </p:sp>
       <p:sp>
         <p:nvSpPr>
           <p:cNvPr id="26" name="Google Shape;26;p5"/>
-          <p:cNvSpPr txBox="1"/>
+          <p:cNvSpPr txBox="1">
+            <a:spLocks noGrp="1"/>
+          </p:cNvSpPr>
           <p:nvPr>
-            <p:ph idx="2" type="body"/>
+            <p:ph type="body" idx="2"/>
           </p:nvPr>
         </p:nvSpPr>
         <p:spPr>
@@ -3908,11 +3810,11 @@
           </a:prstGeom>
         </p:spPr>
         <p:txBody>
-          <a:bodyPr anchorCtr="0" anchor="t" bIns="91425" lIns="91425" spcFirstLastPara="1" rIns="91425" wrap="square" tIns="91425">
+          <a:bodyPr spcFirstLastPara="1" wrap="square" lIns="91425" tIns="91425" rIns="91425" bIns="91425" anchor="t" anchorCtr="0">
             <a:noAutofit/>
           </a:bodyPr>
           <a:lstStyle>
-            <a:lvl1pPr indent="-317500" lvl="0" marL="457200">
+            <a:lvl1pPr marL="457200" lvl="0" indent="-317500">
               <a:spcBef>
                 <a:spcPts val="0"/>
               </a:spcBef>
@@ -3923,7 +3825,7 @@
               <a:buChar char="●"/>
               <a:defRPr sz="1400"/>
             </a:lvl1pPr>
-            <a:lvl2pPr indent="-304800" lvl="1" marL="914400">
+            <a:lvl2pPr marL="914400" lvl="1" indent="-304800">
               <a:spcBef>
                 <a:spcPts val="1600"/>
               </a:spcBef>
@@ -3934,7 +3836,7 @@
               <a:buChar char="○"/>
               <a:defRPr sz="1200"/>
             </a:lvl2pPr>
-            <a:lvl3pPr indent="-304800" lvl="2" marL="1371600">
+            <a:lvl3pPr marL="1371600" lvl="2" indent="-304800">
               <a:spcBef>
                 <a:spcPts val="1600"/>
               </a:spcBef>
@@ -3945,7 +3847,7 @@
               <a:buChar char="■"/>
               <a:defRPr sz="1200"/>
             </a:lvl3pPr>
-            <a:lvl4pPr indent="-304800" lvl="3" marL="1828800">
+            <a:lvl4pPr marL="1828800" lvl="3" indent="-304800">
               <a:spcBef>
                 <a:spcPts val="1600"/>
               </a:spcBef>
@@ -3956,7 +3858,7 @@
               <a:buChar char="●"/>
               <a:defRPr sz="1200"/>
             </a:lvl4pPr>
-            <a:lvl5pPr indent="-304800" lvl="4" marL="2286000">
+            <a:lvl5pPr marL="2286000" lvl="4" indent="-304800">
               <a:spcBef>
                 <a:spcPts val="1600"/>
               </a:spcBef>
@@ -3967,7 +3869,7 @@
               <a:buChar char="○"/>
               <a:defRPr sz="1200"/>
             </a:lvl5pPr>
-            <a:lvl6pPr indent="-304800" lvl="5" marL="2743200">
+            <a:lvl6pPr marL="2743200" lvl="5" indent="-304800">
               <a:spcBef>
                 <a:spcPts val="1600"/>
               </a:spcBef>
@@ -3978,7 +3880,7 @@
               <a:buChar char="■"/>
               <a:defRPr sz="1200"/>
             </a:lvl6pPr>
-            <a:lvl7pPr indent="-304800" lvl="6" marL="3200400">
+            <a:lvl7pPr marL="3200400" lvl="6" indent="-304800">
               <a:spcBef>
                 <a:spcPts val="1600"/>
               </a:spcBef>
@@ -3989,7 +3891,7 @@
               <a:buChar char="●"/>
               <a:defRPr sz="1200"/>
             </a:lvl7pPr>
-            <a:lvl8pPr indent="-304800" lvl="7" marL="3657600">
+            <a:lvl8pPr marL="3657600" lvl="7" indent="-304800">
               <a:spcBef>
                 <a:spcPts val="1600"/>
               </a:spcBef>
@@ -4000,7 +3902,7 @@
               <a:buChar char="○"/>
               <a:defRPr sz="1200"/>
             </a:lvl8pPr>
-            <a:lvl9pPr indent="-304800" lvl="8" marL="4114800">
+            <a:lvl9pPr marL="4114800" lvl="8" indent="-304800">
               <a:spcBef>
                 <a:spcPts val="1600"/>
               </a:spcBef>
@@ -4012,15 +3914,19 @@
               <a:defRPr sz="1200"/>
             </a:lvl9pPr>
           </a:lstStyle>
-          <a:p/>
+          <a:p>
+            <a:endParaRPr/>
+          </a:p>
         </p:txBody>
       </p:sp>
       <p:sp>
         <p:nvSpPr>
           <p:cNvPr id="27" name="Google Shape;27;p5"/>
-          <p:cNvSpPr txBox="1"/>
+          <p:cNvSpPr txBox="1">
+            <a:spLocks noGrp="1"/>
+          </p:cNvSpPr>
           <p:nvPr>
-            <p:ph idx="12" type="sldNum"/>
+            <p:ph type="sldNum" idx="12"/>
           </p:nvPr>
         </p:nvSpPr>
         <p:spPr>
@@ -4033,7 +3939,7 @@
           </a:prstGeom>
         </p:spPr>
         <p:txBody>
-          <a:bodyPr anchorCtr="0" anchor="ctr" bIns="91425" lIns="91425" spcFirstLastPara="1" rIns="91425" wrap="square" tIns="91425">
+          <a:bodyPr spcFirstLastPara="1" wrap="square" lIns="91425" tIns="91425" rIns="91425" bIns="91425" anchor="ctr" anchorCtr="0">
             <a:noAutofit/>
           </a:bodyPr>
           <a:lstStyle>
@@ -4075,7 +3981,7 @@
             </a:lvl9pPr>
           </a:lstStyle>
           <a:p>
-            <a:pPr indent="0" lvl="0" marL="0" rtl="0" algn="r">
+            <a:pPr marL="0" lvl="0" indent="0" algn="r" rtl="0">
               <a:spcBef>
                 <a:spcPts val="0"/>
               </a:spcBef>
@@ -4101,11 +4007,11 @@
 </file>
 
 <file path=ppt/slideLayouts/slideLayout5.xml><?xml version="1.0" encoding="utf-8"?>
-<p:sldLayout xmlns:a="http://schemas.openxmlformats.org/drawingml/2006/main" xmlns:r="http://schemas.openxmlformats.org/officeDocument/2006/relationships" xmlns:mc="http://schemas.openxmlformats.org/markup-compatibility/2006" xmlns:mv="urn:schemas-microsoft-com:mac:vml" xmlns:p="http://schemas.openxmlformats.org/presentationml/2006/main" xmlns:c="http://schemas.openxmlformats.org/drawingml/2006/chart" xmlns:dgm="http://schemas.openxmlformats.org/drawingml/2006/diagram" xmlns:o="urn:schemas-microsoft-com:office:office" xmlns:v="urn:schemas-microsoft-com:vml" xmlns:pvml="urn:schemas-microsoft-com:office:powerpoint" xmlns:com="http://schemas.openxmlformats.org/drawingml/2006/compatibility" xmlns:p14="http://schemas.microsoft.com/office/powerpoint/2010/main" xmlns:p15="http://schemas.microsoft.com/office/powerpoint/2012/main" xmlns:ahyp="http://schemas.microsoft.com/office/drawing/2018/hyperlinkcolor" matchingName="Title only" type="titleOnly">
+<p:sldLayout xmlns:a="http://schemas.openxmlformats.org/drawingml/2006/main" xmlns:r="http://schemas.openxmlformats.org/officeDocument/2006/relationships" xmlns:p="http://schemas.openxmlformats.org/presentationml/2006/main" matchingName="Title only" type="titleOnly">
   <p:cSld name="TITLE_ONLY">
     <p:spTree>
       <p:nvGrpSpPr>
-        <p:cNvPr id="28" name="Shape 28"/>
+        <p:cNvPr id="1" name="Shape 28"/>
         <p:cNvGrpSpPr/>
         <p:nvPr/>
       </p:nvGrpSpPr>
@@ -4120,7 +4026,9 @@
       <p:sp>
         <p:nvSpPr>
           <p:cNvPr id="29" name="Google Shape;29;p6"/>
-          <p:cNvSpPr txBox="1"/>
+          <p:cNvSpPr txBox="1">
+            <a:spLocks noGrp="1"/>
+          </p:cNvSpPr>
           <p:nvPr>
             <p:ph type="title"/>
           </p:nvPr>
@@ -4135,7 +4043,7 @@
           </a:prstGeom>
         </p:spPr>
         <p:txBody>
-          <a:bodyPr anchorCtr="0" anchor="t" bIns="91425" lIns="91425" spcFirstLastPara="1" rIns="91425" wrap="square" tIns="91425">
+          <a:bodyPr spcFirstLastPara="1" wrap="square" lIns="91425" tIns="91425" rIns="91425" bIns="91425" anchor="t" anchorCtr="0">
             <a:noAutofit/>
           </a:bodyPr>
           <a:lstStyle>
@@ -4239,15 +4147,19 @@
               <a:defRPr/>
             </a:lvl9pPr>
           </a:lstStyle>
-          <a:p/>
+          <a:p>
+            <a:endParaRPr/>
+          </a:p>
         </p:txBody>
       </p:sp>
       <p:sp>
         <p:nvSpPr>
           <p:cNvPr id="30" name="Google Shape;30;p6"/>
-          <p:cNvSpPr txBox="1"/>
+          <p:cNvSpPr txBox="1">
+            <a:spLocks noGrp="1"/>
+          </p:cNvSpPr>
           <p:nvPr>
-            <p:ph idx="12" type="sldNum"/>
+            <p:ph type="sldNum" idx="12"/>
           </p:nvPr>
         </p:nvSpPr>
         <p:spPr>
@@ -4260,7 +4172,7 @@
           </a:prstGeom>
         </p:spPr>
         <p:txBody>
-          <a:bodyPr anchorCtr="0" anchor="ctr" bIns="91425" lIns="91425" spcFirstLastPara="1" rIns="91425" wrap="square" tIns="91425">
+          <a:bodyPr spcFirstLastPara="1" wrap="square" lIns="91425" tIns="91425" rIns="91425" bIns="91425" anchor="ctr" anchorCtr="0">
             <a:noAutofit/>
           </a:bodyPr>
           <a:lstStyle>
@@ -4302,7 +4214,7 @@
             </a:lvl9pPr>
           </a:lstStyle>
           <a:p>
-            <a:pPr indent="0" lvl="0" marL="0" rtl="0" algn="r">
+            <a:pPr marL="0" lvl="0" indent="0" algn="r" rtl="0">
               <a:spcBef>
                 <a:spcPts val="0"/>
               </a:spcBef>
@@ -4328,11 +4240,11 @@
 </file>
 
 <file path=ppt/slideLayouts/slideLayout6.xml><?xml version="1.0" encoding="utf-8"?>
-<p:sldLayout xmlns:a="http://schemas.openxmlformats.org/drawingml/2006/main" xmlns:r="http://schemas.openxmlformats.org/officeDocument/2006/relationships" xmlns:mc="http://schemas.openxmlformats.org/markup-compatibility/2006" xmlns:mv="urn:schemas-microsoft-com:mac:vml" xmlns:p="http://schemas.openxmlformats.org/presentationml/2006/main" xmlns:c="http://schemas.openxmlformats.org/drawingml/2006/chart" xmlns:dgm="http://schemas.openxmlformats.org/drawingml/2006/diagram" xmlns:o="urn:schemas-microsoft-com:office:office" xmlns:v="urn:schemas-microsoft-com:vml" xmlns:pvml="urn:schemas-microsoft-com:office:powerpoint" xmlns:com="http://schemas.openxmlformats.org/drawingml/2006/compatibility" xmlns:p14="http://schemas.microsoft.com/office/powerpoint/2010/main" xmlns:p15="http://schemas.microsoft.com/office/powerpoint/2012/main" xmlns:ahyp="http://schemas.microsoft.com/office/drawing/2018/hyperlinkcolor" matchingName="One column text">
+<p:sldLayout xmlns:a="http://schemas.openxmlformats.org/drawingml/2006/main" xmlns:r="http://schemas.openxmlformats.org/officeDocument/2006/relationships" xmlns:p="http://schemas.openxmlformats.org/presentationml/2006/main" matchingName="One column text">
   <p:cSld name="ONE_COLUMN_TEXT">
     <p:spTree>
       <p:nvGrpSpPr>
-        <p:cNvPr id="31" name="Shape 31"/>
+        <p:cNvPr id="1" name="Shape 31"/>
         <p:cNvGrpSpPr/>
         <p:nvPr/>
       </p:nvGrpSpPr>
@@ -4347,7 +4259,9 @@
       <p:sp>
         <p:nvSpPr>
           <p:cNvPr id="32" name="Google Shape;32;p7"/>
-          <p:cNvSpPr txBox="1"/>
+          <p:cNvSpPr txBox="1">
+            <a:spLocks noGrp="1"/>
+          </p:cNvSpPr>
           <p:nvPr>
             <p:ph type="title"/>
           </p:nvPr>
@@ -4362,7 +4276,7 @@
           </a:prstGeom>
         </p:spPr>
         <p:txBody>
-          <a:bodyPr anchorCtr="0" anchor="b" bIns="91425" lIns="91425" spcFirstLastPara="1" rIns="91425" wrap="square" tIns="91425">
+          <a:bodyPr spcFirstLastPara="1" wrap="square" lIns="91425" tIns="91425" rIns="91425" bIns="91425" anchor="b" anchorCtr="0">
             <a:noAutofit/>
           </a:bodyPr>
           <a:lstStyle>
@@ -4466,15 +4380,19 @@
               <a:defRPr sz="2400"/>
             </a:lvl9pPr>
           </a:lstStyle>
-          <a:p/>
+          <a:p>
+            <a:endParaRPr/>
+          </a:p>
         </p:txBody>
       </p:sp>
       <p:sp>
         <p:nvSpPr>
           <p:cNvPr id="33" name="Google Shape;33;p7"/>
-          <p:cNvSpPr txBox="1"/>
+          <p:cNvSpPr txBox="1">
+            <a:spLocks noGrp="1"/>
+          </p:cNvSpPr>
           <p:nvPr>
-            <p:ph idx="1" type="body"/>
+            <p:ph type="body" idx="1"/>
           </p:nvPr>
         </p:nvSpPr>
         <p:spPr>
@@ -4487,11 +4405,11 @@
           </a:prstGeom>
         </p:spPr>
         <p:txBody>
-          <a:bodyPr anchorCtr="0" anchor="t" bIns="91425" lIns="91425" spcFirstLastPara="1" rIns="91425" wrap="square" tIns="91425">
+          <a:bodyPr spcFirstLastPara="1" wrap="square" lIns="91425" tIns="91425" rIns="91425" bIns="91425" anchor="t" anchorCtr="0">
             <a:noAutofit/>
           </a:bodyPr>
           <a:lstStyle>
-            <a:lvl1pPr indent="-304800" lvl="0" marL="457200">
+            <a:lvl1pPr marL="457200" lvl="0" indent="-304800">
               <a:spcBef>
                 <a:spcPts val="0"/>
               </a:spcBef>
@@ -4502,7 +4420,7 @@
               <a:buChar char="●"/>
               <a:defRPr sz="1200"/>
             </a:lvl1pPr>
-            <a:lvl2pPr indent="-304800" lvl="1" marL="914400">
+            <a:lvl2pPr marL="914400" lvl="1" indent="-304800">
               <a:spcBef>
                 <a:spcPts val="1600"/>
               </a:spcBef>
@@ -4513,7 +4431,7 @@
               <a:buChar char="○"/>
               <a:defRPr sz="1200"/>
             </a:lvl2pPr>
-            <a:lvl3pPr indent="-304800" lvl="2" marL="1371600">
+            <a:lvl3pPr marL="1371600" lvl="2" indent="-304800">
               <a:spcBef>
                 <a:spcPts val="1600"/>
               </a:spcBef>
@@ -4524,7 +4442,7 @@
               <a:buChar char="■"/>
               <a:defRPr sz="1200"/>
             </a:lvl3pPr>
-            <a:lvl4pPr indent="-304800" lvl="3" marL="1828800">
+            <a:lvl4pPr marL="1828800" lvl="3" indent="-304800">
               <a:spcBef>
                 <a:spcPts val="1600"/>
               </a:spcBef>
@@ -4535,7 +4453,7 @@
               <a:buChar char="●"/>
               <a:defRPr sz="1200"/>
             </a:lvl4pPr>
-            <a:lvl5pPr indent="-304800" lvl="4" marL="2286000">
+            <a:lvl5pPr marL="2286000" lvl="4" indent="-304800">
               <a:spcBef>
                 <a:spcPts val="1600"/>
               </a:spcBef>
@@ -4546,7 +4464,7 @@
               <a:buChar char="○"/>
               <a:defRPr sz="1200"/>
             </a:lvl5pPr>
-            <a:lvl6pPr indent="-304800" lvl="5" marL="2743200">
+            <a:lvl6pPr marL="2743200" lvl="5" indent="-304800">
               <a:spcBef>
                 <a:spcPts val="1600"/>
               </a:spcBef>
@@ -4557,7 +4475,7 @@
               <a:buChar char="■"/>
               <a:defRPr sz="1200"/>
             </a:lvl6pPr>
-            <a:lvl7pPr indent="-304800" lvl="6" marL="3200400">
+            <a:lvl7pPr marL="3200400" lvl="6" indent="-304800">
               <a:spcBef>
                 <a:spcPts val="1600"/>
               </a:spcBef>
@@ -4568,7 +4486,7 @@
               <a:buChar char="●"/>
               <a:defRPr sz="1200"/>
             </a:lvl7pPr>
-            <a:lvl8pPr indent="-304800" lvl="7" marL="3657600">
+            <a:lvl8pPr marL="3657600" lvl="7" indent="-304800">
               <a:spcBef>
                 <a:spcPts val="1600"/>
               </a:spcBef>
@@ -4579,7 +4497,7 @@
               <a:buChar char="○"/>
               <a:defRPr sz="1200"/>
             </a:lvl8pPr>
-            <a:lvl9pPr indent="-304800" lvl="8" marL="4114800">
+            <a:lvl9pPr marL="4114800" lvl="8" indent="-304800">
               <a:spcBef>
                 <a:spcPts val="1600"/>
               </a:spcBef>
@@ -4591,15 +4509,19 @@
               <a:defRPr sz="1200"/>
             </a:lvl9pPr>
           </a:lstStyle>
-          <a:p/>
+          <a:p>
+            <a:endParaRPr/>
+          </a:p>
         </p:txBody>
       </p:sp>
       <p:sp>
         <p:nvSpPr>
           <p:cNvPr id="34" name="Google Shape;34;p7"/>
-          <p:cNvSpPr txBox="1"/>
+          <p:cNvSpPr txBox="1">
+            <a:spLocks noGrp="1"/>
+          </p:cNvSpPr>
           <p:nvPr>
-            <p:ph idx="12" type="sldNum"/>
+            <p:ph type="sldNum" idx="12"/>
           </p:nvPr>
         </p:nvSpPr>
         <p:spPr>
@@ -4612,7 +4534,7 @@
           </a:prstGeom>
         </p:spPr>
         <p:txBody>
-          <a:bodyPr anchorCtr="0" anchor="ctr" bIns="91425" lIns="91425" spcFirstLastPara="1" rIns="91425" wrap="square" tIns="91425">
+          <a:bodyPr spcFirstLastPara="1" wrap="square" lIns="91425" tIns="91425" rIns="91425" bIns="91425" anchor="ctr" anchorCtr="0">
             <a:noAutofit/>
           </a:bodyPr>
           <a:lstStyle>
@@ -4654,7 +4576,7 @@
             </a:lvl9pPr>
           </a:lstStyle>
           <a:p>
-            <a:pPr indent="0" lvl="0" marL="0" rtl="0" algn="r">
+            <a:pPr marL="0" lvl="0" indent="0" algn="r" rtl="0">
               <a:spcBef>
                 <a:spcPts val="0"/>
               </a:spcBef>
@@ -4680,18 +4602,19 @@
 </file>
 
 <file path=ppt/slideLayouts/slideLayout7.xml><?xml version="1.0" encoding="utf-8"?>
-<p:sldLayout xmlns:a="http://schemas.openxmlformats.org/drawingml/2006/main" xmlns:r="http://schemas.openxmlformats.org/officeDocument/2006/relationships" xmlns:mc="http://schemas.openxmlformats.org/markup-compatibility/2006" xmlns:mv="urn:schemas-microsoft-com:mac:vml" xmlns:p="http://schemas.openxmlformats.org/presentationml/2006/main" xmlns:c="http://schemas.openxmlformats.org/drawingml/2006/chart" xmlns:dgm="http://schemas.openxmlformats.org/drawingml/2006/diagram" xmlns:o="urn:schemas-microsoft-com:office:office" xmlns:v="urn:schemas-microsoft-com:vml" xmlns:pvml="urn:schemas-microsoft-com:office:powerpoint" xmlns:com="http://schemas.openxmlformats.org/drawingml/2006/compatibility" xmlns:p14="http://schemas.microsoft.com/office/powerpoint/2010/main" xmlns:p15="http://schemas.microsoft.com/office/powerpoint/2012/main" xmlns:ahyp="http://schemas.microsoft.com/office/drawing/2018/hyperlinkcolor" matchingName="Main point">
+<p:sldLayout xmlns:a="http://schemas.openxmlformats.org/drawingml/2006/main" xmlns:r="http://schemas.openxmlformats.org/officeDocument/2006/relationships" xmlns:p="http://schemas.openxmlformats.org/presentationml/2006/main" matchingName="Main point">
   <p:cSld name="MAIN_POINT">
     <p:bg>
       <p:bgPr>
         <a:solidFill>
           <a:schemeClr val="lt2"/>
         </a:solidFill>
+        <a:effectLst/>
       </p:bgPr>
     </p:bg>
     <p:spTree>
       <p:nvGrpSpPr>
-        <p:cNvPr id="35" name="Shape 35"/>
+        <p:cNvPr id="1" name="Shape 35"/>
         <p:cNvGrpSpPr/>
         <p:nvPr/>
       </p:nvGrpSpPr>
@@ -4706,7 +4629,9 @@
       <p:sp>
         <p:nvSpPr>
           <p:cNvPr id="36" name="Google Shape;36;p8"/>
-          <p:cNvSpPr txBox="1"/>
+          <p:cNvSpPr txBox="1">
+            <a:spLocks noGrp="1"/>
+          </p:cNvSpPr>
           <p:nvPr>
             <p:ph type="title"/>
           </p:nvPr>
@@ -4721,7 +4646,7 @@
           </a:prstGeom>
         </p:spPr>
         <p:txBody>
-          <a:bodyPr anchorCtr="0" anchor="ctr" bIns="91425" lIns="91425" spcFirstLastPara="1" rIns="91425" wrap="square" tIns="91425">
+          <a:bodyPr spcFirstLastPara="1" wrap="square" lIns="91425" tIns="91425" rIns="91425" bIns="91425" anchor="ctr" anchorCtr="0">
             <a:noAutofit/>
           </a:bodyPr>
           <a:lstStyle>
@@ -4825,15 +4750,19 @@
               <a:defRPr sz="4800"/>
             </a:lvl9pPr>
           </a:lstStyle>
-          <a:p/>
+          <a:p>
+            <a:endParaRPr/>
+          </a:p>
         </p:txBody>
       </p:sp>
       <p:sp>
         <p:nvSpPr>
           <p:cNvPr id="37" name="Google Shape;37;p8"/>
-          <p:cNvSpPr txBox="1"/>
+          <p:cNvSpPr txBox="1">
+            <a:spLocks noGrp="1"/>
+          </p:cNvSpPr>
           <p:nvPr>
-            <p:ph idx="12" type="sldNum"/>
+            <p:ph type="sldNum" idx="12"/>
           </p:nvPr>
         </p:nvSpPr>
         <p:spPr>
@@ -4846,7 +4775,7 @@
           </a:prstGeom>
         </p:spPr>
         <p:txBody>
-          <a:bodyPr anchorCtr="0" anchor="ctr" bIns="91425" lIns="91425" spcFirstLastPara="1" rIns="91425" wrap="square" tIns="91425">
+          <a:bodyPr spcFirstLastPara="1" wrap="square" lIns="91425" tIns="91425" rIns="91425" bIns="91425" anchor="ctr" anchorCtr="0">
             <a:noAutofit/>
           </a:bodyPr>
           <a:lstStyle>
@@ -4888,7 +4817,7 @@
             </a:lvl9pPr>
           </a:lstStyle>
           <a:p>
-            <a:pPr indent="0" lvl="0" marL="0" rtl="0" algn="r">
+            <a:pPr marL="0" lvl="0" indent="0" algn="r" rtl="0">
               <a:spcBef>
                 <a:spcPts val="0"/>
               </a:spcBef>
@@ -4914,11 +4843,11 @@
 </file>
 
 <file path=ppt/slideLayouts/slideLayout8.xml><?xml version="1.0" encoding="utf-8"?>
-<p:sldLayout xmlns:a="http://schemas.openxmlformats.org/drawingml/2006/main" xmlns:r="http://schemas.openxmlformats.org/officeDocument/2006/relationships" xmlns:mc="http://schemas.openxmlformats.org/markup-compatibility/2006" xmlns:mv="urn:schemas-microsoft-com:mac:vml" xmlns:p="http://schemas.openxmlformats.org/presentationml/2006/main" xmlns:c="http://schemas.openxmlformats.org/drawingml/2006/chart" xmlns:dgm="http://schemas.openxmlformats.org/drawingml/2006/diagram" xmlns:o="urn:schemas-microsoft-com:office:office" xmlns:v="urn:schemas-microsoft-com:vml" xmlns:pvml="urn:schemas-microsoft-com:office:powerpoint" xmlns:com="http://schemas.openxmlformats.org/drawingml/2006/compatibility" xmlns:p14="http://schemas.microsoft.com/office/powerpoint/2010/main" xmlns:p15="http://schemas.microsoft.com/office/powerpoint/2012/main" xmlns:ahyp="http://schemas.microsoft.com/office/drawing/2018/hyperlinkcolor" matchingName="Section title and description">
+<p:sldLayout xmlns:a="http://schemas.openxmlformats.org/drawingml/2006/main" xmlns:r="http://schemas.openxmlformats.org/officeDocument/2006/relationships" xmlns:p="http://schemas.openxmlformats.org/presentationml/2006/main" matchingName="Section title and description">
   <p:cSld name="SECTION_TITLE_AND_DESCRIPTION">
     <p:spTree>
       <p:nvGrpSpPr>
-        <p:cNvPr id="38" name="Shape 38"/>
+        <p:cNvPr id="1" name="Shape 38"/>
         <p:cNvGrpSpPr/>
         <p:nvPr/>
       </p:nvGrpSpPr>
@@ -4952,12 +4881,12 @@
           </a:ln>
         </p:spPr>
         <p:txBody>
-          <a:bodyPr anchorCtr="0" anchor="ctr" bIns="91425" lIns="91425" spcFirstLastPara="1" rIns="91425" wrap="square" tIns="91425">
+          <a:bodyPr spcFirstLastPara="1" wrap="square" lIns="91425" tIns="91425" rIns="91425" bIns="91425" anchor="ctr" anchorCtr="0">
             <a:noAutofit/>
           </a:bodyPr>
           <a:lstStyle/>
           <a:p>
-            <a:pPr indent="0" lvl="0" marL="0" rtl="0" algn="l">
+            <a:pPr marL="0" lvl="0" indent="0" algn="l" rtl="0">
               <a:spcBef>
                 <a:spcPts val="0"/>
               </a:spcBef>
@@ -4966,9 +4895,6 @@
               </a:spcAft>
               <a:buNone/>
             </a:pPr>
-            <a:r>
-              <a:t/>
-            </a:r>
             <a:endParaRPr/>
           </a:p>
         </p:txBody>
@@ -4988,21 +4914,23 @@
             <a:avLst/>
           </a:prstGeom>
           <a:noFill/>
-          <a:ln cap="flat" cmpd="sng" w="19050">
+          <a:ln w="19050" cap="flat" cmpd="sng">
             <a:solidFill>
               <a:schemeClr val="lt2"/>
             </a:solidFill>
             <a:prstDash val="solid"/>
             <a:round/>
-            <a:headEnd len="sm" w="sm" type="none"/>
-            <a:tailEnd len="sm" w="sm" type="none"/>
+            <a:headEnd type="none" w="sm" len="sm"/>
+            <a:tailEnd type="none" w="sm" len="sm"/>
           </a:ln>
         </p:spPr>
       </p:cxnSp>
       <p:sp>
         <p:nvSpPr>
           <p:cNvPr id="41" name="Google Shape;41;p9"/>
-          <p:cNvSpPr txBox="1"/>
+          <p:cNvSpPr txBox="1">
+            <a:spLocks noGrp="1"/>
+          </p:cNvSpPr>
           <p:nvPr>
             <p:ph type="title"/>
           </p:nvPr>
@@ -5017,7 +4945,7 @@
           </a:prstGeom>
         </p:spPr>
         <p:txBody>
-          <a:bodyPr anchorCtr="0" anchor="b" bIns="91425" lIns="91425" spcFirstLastPara="1" rIns="91425" wrap="square" tIns="91425">
+          <a:bodyPr spcFirstLastPara="1" wrap="square" lIns="91425" tIns="91425" rIns="91425" bIns="91425" anchor="b" anchorCtr="0">
             <a:noAutofit/>
           </a:bodyPr>
           <a:lstStyle>
@@ -5121,15 +5049,19 @@
               <a:defRPr sz="4200"/>
             </a:lvl9pPr>
           </a:lstStyle>
-          <a:p/>
+          <a:p>
+            <a:endParaRPr/>
+          </a:p>
         </p:txBody>
       </p:sp>
       <p:sp>
         <p:nvSpPr>
           <p:cNvPr id="42" name="Google Shape;42;p9"/>
-          <p:cNvSpPr txBox="1"/>
+          <p:cNvSpPr txBox="1">
+            <a:spLocks noGrp="1"/>
+          </p:cNvSpPr>
           <p:nvPr>
-            <p:ph idx="1" type="subTitle"/>
+            <p:ph type="subTitle" idx="1"/>
           </p:nvPr>
         </p:nvSpPr>
         <p:spPr>
@@ -5142,7 +5074,7 @@
           </a:prstGeom>
         </p:spPr>
         <p:txBody>
-          <a:bodyPr anchorCtr="0" anchor="t" bIns="91425" lIns="91425" spcFirstLastPara="1" rIns="91425" wrap="square" tIns="91425">
+          <a:bodyPr spcFirstLastPara="1" wrap="square" lIns="91425" tIns="91425" rIns="91425" bIns="91425" anchor="t" anchorCtr="0">
             <a:noAutofit/>
           </a:bodyPr>
           <a:lstStyle>
@@ -5273,15 +5205,19 @@
               <a:defRPr sz="2100"/>
             </a:lvl9pPr>
           </a:lstStyle>
-          <a:p/>
+          <a:p>
+            <a:endParaRPr/>
+          </a:p>
         </p:txBody>
       </p:sp>
       <p:sp>
         <p:nvSpPr>
           <p:cNvPr id="43" name="Google Shape;43;p9"/>
-          <p:cNvSpPr txBox="1"/>
+          <p:cNvSpPr txBox="1">
+            <a:spLocks noGrp="1"/>
+          </p:cNvSpPr>
           <p:nvPr>
-            <p:ph idx="2" type="body"/>
+            <p:ph type="body" idx="2"/>
           </p:nvPr>
         </p:nvSpPr>
         <p:spPr>
@@ -5294,11 +5230,11 @@
           </a:prstGeom>
         </p:spPr>
         <p:txBody>
-          <a:bodyPr anchorCtr="0" anchor="ctr" bIns="91425" lIns="91425" spcFirstLastPara="1" rIns="91425" wrap="square" tIns="91425">
+          <a:bodyPr spcFirstLastPara="1" wrap="square" lIns="91425" tIns="91425" rIns="91425" bIns="91425" anchor="ctr" anchorCtr="0">
             <a:noAutofit/>
           </a:bodyPr>
           <a:lstStyle>
-            <a:lvl1pPr indent="-342900" lvl="0" marL="457200">
+            <a:lvl1pPr marL="457200" lvl="0" indent="-342900">
               <a:spcBef>
                 <a:spcPts val="0"/>
               </a:spcBef>
@@ -5316,7 +5252,7 @@
                 </a:solidFill>
               </a:defRPr>
             </a:lvl1pPr>
-            <a:lvl2pPr indent="-317500" lvl="1" marL="914400">
+            <a:lvl2pPr marL="914400" lvl="1" indent="-317500">
               <a:spcBef>
                 <a:spcPts val="1600"/>
               </a:spcBef>
@@ -5334,7 +5270,7 @@
                 </a:solidFill>
               </a:defRPr>
             </a:lvl2pPr>
-            <a:lvl3pPr indent="-317500" lvl="2" marL="1371600">
+            <a:lvl3pPr marL="1371600" lvl="2" indent="-317500">
               <a:spcBef>
                 <a:spcPts val="1600"/>
               </a:spcBef>
@@ -5352,7 +5288,7 @@
                 </a:solidFill>
               </a:defRPr>
             </a:lvl3pPr>
-            <a:lvl4pPr indent="-317500" lvl="3" marL="1828800">
+            <a:lvl4pPr marL="1828800" lvl="3" indent="-317500">
               <a:spcBef>
                 <a:spcPts val="1600"/>
               </a:spcBef>
@@ -5370,7 +5306,7 @@
                 </a:solidFill>
               </a:defRPr>
             </a:lvl4pPr>
-            <a:lvl5pPr indent="-317500" lvl="4" marL="2286000">
+            <a:lvl5pPr marL="2286000" lvl="4" indent="-317500">
               <a:spcBef>
                 <a:spcPts val="1600"/>
               </a:spcBef>
@@ -5388,7 +5324,7 @@
                 </a:solidFill>
               </a:defRPr>
             </a:lvl5pPr>
-            <a:lvl6pPr indent="-317500" lvl="5" marL="2743200">
+            <a:lvl6pPr marL="2743200" lvl="5" indent="-317500">
               <a:spcBef>
                 <a:spcPts val="1600"/>
               </a:spcBef>
@@ -5406,7 +5342,7 @@
                 </a:solidFill>
               </a:defRPr>
             </a:lvl6pPr>
-            <a:lvl7pPr indent="-317500" lvl="6" marL="3200400">
+            <a:lvl7pPr marL="3200400" lvl="6" indent="-317500">
               <a:spcBef>
                 <a:spcPts val="1600"/>
               </a:spcBef>
@@ -5424,7 +5360,7 @@
                 </a:solidFill>
               </a:defRPr>
             </a:lvl7pPr>
-            <a:lvl8pPr indent="-317500" lvl="7" marL="3657600">
+            <a:lvl8pPr marL="3657600" lvl="7" indent="-317500">
               <a:spcBef>
                 <a:spcPts val="1600"/>
               </a:spcBef>
@@ -5442,7 +5378,7 @@
                 </a:solidFill>
               </a:defRPr>
             </a:lvl8pPr>
-            <a:lvl9pPr indent="-317500" lvl="8" marL="4114800">
+            <a:lvl9pPr marL="4114800" lvl="8" indent="-317500">
               <a:spcBef>
                 <a:spcPts val="1600"/>
               </a:spcBef>
@@ -5461,15 +5397,19 @@
               </a:defRPr>
             </a:lvl9pPr>
           </a:lstStyle>
-          <a:p/>
+          <a:p>
+            <a:endParaRPr/>
+          </a:p>
         </p:txBody>
       </p:sp>
       <p:sp>
         <p:nvSpPr>
           <p:cNvPr id="44" name="Google Shape;44;p9"/>
-          <p:cNvSpPr txBox="1"/>
+          <p:cNvSpPr txBox="1">
+            <a:spLocks noGrp="1"/>
+          </p:cNvSpPr>
           <p:nvPr>
-            <p:ph idx="12" type="sldNum"/>
+            <p:ph type="sldNum" idx="12"/>
           </p:nvPr>
         </p:nvSpPr>
         <p:spPr>
@@ -5482,7 +5422,7 @@
           </a:prstGeom>
         </p:spPr>
         <p:txBody>
-          <a:bodyPr anchorCtr="0" anchor="ctr" bIns="91425" lIns="91425" spcFirstLastPara="1" rIns="91425" wrap="square" tIns="91425">
+          <a:bodyPr spcFirstLastPara="1" wrap="square" lIns="91425" tIns="91425" rIns="91425" bIns="91425" anchor="ctr" anchorCtr="0">
             <a:noAutofit/>
           </a:bodyPr>
           <a:lstStyle>
@@ -5560,7 +5500,7 @@
             </a:lvl9pPr>
           </a:lstStyle>
           <a:p>
-            <a:pPr indent="0" lvl="0" marL="0" rtl="0" algn="r">
+            <a:pPr marL="0" lvl="0" indent="0" algn="r" rtl="0">
               <a:spcBef>
                 <a:spcPts val="0"/>
               </a:spcBef>
@@ -5586,11 +5526,11 @@
 </file>
 
 <file path=ppt/slideLayouts/slideLayout9.xml><?xml version="1.0" encoding="utf-8"?>
-<p:sldLayout xmlns:a="http://schemas.openxmlformats.org/drawingml/2006/main" xmlns:r="http://schemas.openxmlformats.org/officeDocument/2006/relationships" xmlns:mc="http://schemas.openxmlformats.org/markup-compatibility/2006" xmlns:mv="urn:schemas-microsoft-com:mac:vml" xmlns:p="http://schemas.openxmlformats.org/presentationml/2006/main" xmlns:c="http://schemas.openxmlformats.org/drawingml/2006/chart" xmlns:dgm="http://schemas.openxmlformats.org/drawingml/2006/diagram" xmlns:o="urn:schemas-microsoft-com:office:office" xmlns:v="urn:schemas-microsoft-com:vml" xmlns:pvml="urn:schemas-microsoft-com:office:powerpoint" xmlns:com="http://schemas.openxmlformats.org/drawingml/2006/compatibility" xmlns:p14="http://schemas.microsoft.com/office/powerpoint/2010/main" xmlns:p15="http://schemas.microsoft.com/office/powerpoint/2012/main" xmlns:ahyp="http://schemas.microsoft.com/office/drawing/2018/hyperlinkcolor" matchingName="Caption">
+<p:sldLayout xmlns:a="http://schemas.openxmlformats.org/drawingml/2006/main" xmlns:r="http://schemas.openxmlformats.org/officeDocument/2006/relationships" xmlns:p="http://schemas.openxmlformats.org/presentationml/2006/main" matchingName="Caption">
   <p:cSld name="CAPTION_ONLY">
     <p:spTree>
       <p:nvGrpSpPr>
-        <p:cNvPr id="45" name="Shape 45"/>
+        <p:cNvPr id="1" name="Shape 45"/>
         <p:cNvGrpSpPr/>
         <p:nvPr/>
       </p:nvGrpSpPr>
@@ -5605,9 +5545,11 @@
       <p:sp>
         <p:nvSpPr>
           <p:cNvPr id="46" name="Google Shape;46;p10"/>
-          <p:cNvSpPr txBox="1"/>
+          <p:cNvSpPr txBox="1">
+            <a:spLocks noGrp="1"/>
+          </p:cNvSpPr>
           <p:nvPr>
-            <p:ph idx="1" type="body"/>
+            <p:ph type="body" idx="1"/>
           </p:nvPr>
         </p:nvSpPr>
         <p:spPr>
@@ -5620,11 +5562,11 @@
           </a:prstGeom>
         </p:spPr>
         <p:txBody>
-          <a:bodyPr anchorCtr="0" anchor="ctr" bIns="91425" lIns="91425" spcFirstLastPara="1" rIns="91425" wrap="square" tIns="91425">
+          <a:bodyPr spcFirstLastPara="1" wrap="square" lIns="91425" tIns="91425" rIns="91425" bIns="91425" anchor="ctr" anchorCtr="0">
             <a:noAutofit/>
           </a:bodyPr>
           <a:lstStyle>
-            <a:lvl1pPr indent="-228600" lvl="0" marL="457200">
+            <a:lvl1pPr marL="457200" lvl="0" indent="-228600">
               <a:lnSpc>
                 <a:spcPct val="100000"/>
               </a:lnSpc>
@@ -5639,15 +5581,19 @@
               <a:defRPr sz="2100"/>
             </a:lvl1pPr>
           </a:lstStyle>
-          <a:p/>
+          <a:p>
+            <a:endParaRPr/>
+          </a:p>
         </p:txBody>
       </p:sp>
       <p:sp>
         <p:nvSpPr>
           <p:cNvPr id="47" name="Google Shape;47;p10"/>
-          <p:cNvSpPr txBox="1"/>
+          <p:cNvSpPr txBox="1">
+            <a:spLocks noGrp="1"/>
+          </p:cNvSpPr>
           <p:nvPr>
-            <p:ph idx="12" type="sldNum"/>
+            <p:ph type="sldNum" idx="12"/>
           </p:nvPr>
         </p:nvSpPr>
         <p:spPr>
@@ -5660,7 +5606,7 @@
           </a:prstGeom>
         </p:spPr>
         <p:txBody>
-          <a:bodyPr anchorCtr="0" anchor="ctr" bIns="91425" lIns="91425" spcFirstLastPara="1" rIns="91425" wrap="square" tIns="91425">
+          <a:bodyPr spcFirstLastPara="1" wrap="square" lIns="91425" tIns="91425" rIns="91425" bIns="91425" anchor="ctr" anchorCtr="0">
             <a:noAutofit/>
           </a:bodyPr>
           <a:lstStyle>
@@ -5702,7 +5648,7 @@
             </a:lvl9pPr>
           </a:lstStyle>
           <a:p>
-            <a:pPr indent="0" lvl="0" marL="0" rtl="0" algn="r">
+            <a:pPr marL="0" lvl="0" indent="0" algn="r" rtl="0">
               <a:spcBef>
                 <a:spcPts val="0"/>
               </a:spcBef>
@@ -5728,18 +5674,19 @@
 </file>
 
 <file path=ppt/slideMasters/slideMaster1.xml><?xml version="1.0" encoding="utf-8"?>
-<p:sldMaster xmlns:a="http://schemas.openxmlformats.org/drawingml/2006/main" xmlns:r="http://schemas.openxmlformats.org/officeDocument/2006/relationships" xmlns:mc="http://schemas.openxmlformats.org/markup-compatibility/2006" xmlns:mv="urn:schemas-microsoft-com:mac:vml" xmlns:p="http://schemas.openxmlformats.org/presentationml/2006/main" xmlns:c="http://schemas.openxmlformats.org/drawingml/2006/chart" xmlns:dgm="http://schemas.openxmlformats.org/drawingml/2006/diagram" xmlns:o="urn:schemas-microsoft-com:office:office" xmlns:v="urn:schemas-microsoft-com:vml" xmlns:pvml="urn:schemas-microsoft-com:office:powerpoint" xmlns:com="http://schemas.openxmlformats.org/drawingml/2006/compatibility" xmlns:p14="http://schemas.microsoft.com/office/powerpoint/2010/main" xmlns:p15="http://schemas.microsoft.com/office/powerpoint/2012/main" xmlns:ahyp="http://schemas.microsoft.com/office/drawing/2018/hyperlinkcolor">
+<p:sldMaster xmlns:a="http://schemas.openxmlformats.org/drawingml/2006/main" xmlns:r="http://schemas.openxmlformats.org/officeDocument/2006/relationships" xmlns:p="http://schemas.openxmlformats.org/presentationml/2006/main">
   <p:cSld name="spearmint">
     <p:bg>
       <p:bgPr>
         <a:solidFill>
           <a:schemeClr val="lt1"/>
         </a:solidFill>
+        <a:effectLst/>
       </p:bgPr>
     </p:bg>
     <p:spTree>
       <p:nvGrpSpPr>
-        <p:cNvPr id="5" name="Shape 5"/>
+        <p:cNvPr id="1" name="Shape 5"/>
         <p:cNvGrpSpPr/>
         <p:nvPr/>
       </p:nvGrpSpPr>
@@ -5754,7 +5701,9 @@
       <p:sp>
         <p:nvSpPr>
           <p:cNvPr id="6" name="Google Shape;6;p1"/>
-          <p:cNvSpPr txBox="1"/>
+          <p:cNvSpPr txBox="1">
+            <a:spLocks noGrp="1"/>
+          </p:cNvSpPr>
           <p:nvPr>
             <p:ph type="title"/>
           </p:nvPr>
@@ -5773,7 +5722,7 @@
           </a:ln>
         </p:spPr>
         <p:txBody>
-          <a:bodyPr anchorCtr="0" anchor="t" bIns="91425" lIns="91425" spcFirstLastPara="1" rIns="91425" wrap="square" tIns="91425">
+          <a:bodyPr spcFirstLastPara="1" wrap="square" lIns="91425" tIns="91425" rIns="91425" bIns="91425" anchor="t" anchorCtr="0">
             <a:noAutofit/>
           </a:bodyPr>
           <a:lstStyle>
@@ -5985,15 +5934,19 @@
               </a:defRPr>
             </a:lvl9pPr>
           </a:lstStyle>
-          <a:p/>
+          <a:p>
+            <a:endParaRPr/>
+          </a:p>
         </p:txBody>
       </p:sp>
       <p:sp>
         <p:nvSpPr>
           <p:cNvPr id="7" name="Google Shape;7;p1"/>
-          <p:cNvSpPr txBox="1"/>
+          <p:cNvSpPr txBox="1">
+            <a:spLocks noGrp="1"/>
+          </p:cNvSpPr>
           <p:nvPr>
-            <p:ph idx="1" type="body"/>
+            <p:ph type="body" idx="1"/>
           </p:nvPr>
         </p:nvSpPr>
         <p:spPr>
@@ -6010,11 +5963,11 @@
           </a:ln>
         </p:spPr>
         <p:txBody>
-          <a:bodyPr anchorCtr="0" anchor="t" bIns="91425" lIns="91425" spcFirstLastPara="1" rIns="91425" wrap="square" tIns="91425">
+          <a:bodyPr spcFirstLastPara="1" wrap="square" lIns="91425" tIns="91425" rIns="91425" bIns="91425" anchor="t" anchorCtr="0">
             <a:noAutofit/>
           </a:bodyPr>
           <a:lstStyle>
-            <a:lvl1pPr indent="-342900" lvl="0" marL="457200">
+            <a:lvl1pPr marL="457200" lvl="0" indent="-342900">
               <a:lnSpc>
                 <a:spcPct val="115000"/>
               </a:lnSpc>
@@ -6040,7 +5993,7 @@
                 <a:sym typeface="Proxima Nova"/>
               </a:defRPr>
             </a:lvl1pPr>
-            <a:lvl2pPr indent="-317500" lvl="1" marL="914400">
+            <a:lvl2pPr marL="914400" lvl="1" indent="-317500">
               <a:lnSpc>
                 <a:spcPct val="115000"/>
               </a:lnSpc>
@@ -6066,7 +6019,7 @@
                 <a:sym typeface="Proxima Nova"/>
               </a:defRPr>
             </a:lvl2pPr>
-            <a:lvl3pPr indent="-317500" lvl="2" marL="1371600">
+            <a:lvl3pPr marL="1371600" lvl="2" indent="-317500">
               <a:lnSpc>
                 <a:spcPct val="115000"/>
               </a:lnSpc>
@@ -6092,7 +6045,7 @@
                 <a:sym typeface="Proxima Nova"/>
               </a:defRPr>
             </a:lvl3pPr>
-            <a:lvl4pPr indent="-317500" lvl="3" marL="1828800">
+            <a:lvl4pPr marL="1828800" lvl="3" indent="-317500">
               <a:lnSpc>
                 <a:spcPct val="115000"/>
               </a:lnSpc>
@@ -6118,7 +6071,7 @@
                 <a:sym typeface="Proxima Nova"/>
               </a:defRPr>
             </a:lvl4pPr>
-            <a:lvl5pPr indent="-317500" lvl="4" marL="2286000">
+            <a:lvl5pPr marL="2286000" lvl="4" indent="-317500">
               <a:lnSpc>
                 <a:spcPct val="115000"/>
               </a:lnSpc>
@@ -6144,7 +6097,7 @@
                 <a:sym typeface="Proxima Nova"/>
               </a:defRPr>
             </a:lvl5pPr>
-            <a:lvl6pPr indent="-317500" lvl="5" marL="2743200">
+            <a:lvl6pPr marL="2743200" lvl="5" indent="-317500">
               <a:lnSpc>
                 <a:spcPct val="115000"/>
               </a:lnSpc>
@@ -6170,7 +6123,7 @@
                 <a:sym typeface="Proxima Nova"/>
               </a:defRPr>
             </a:lvl6pPr>
-            <a:lvl7pPr indent="-317500" lvl="6" marL="3200400">
+            <a:lvl7pPr marL="3200400" lvl="6" indent="-317500">
               <a:lnSpc>
                 <a:spcPct val="115000"/>
               </a:lnSpc>
@@ -6196,7 +6149,7 @@
                 <a:sym typeface="Proxima Nova"/>
               </a:defRPr>
             </a:lvl7pPr>
-            <a:lvl8pPr indent="-317500" lvl="7" marL="3657600">
+            <a:lvl8pPr marL="3657600" lvl="7" indent="-317500">
               <a:lnSpc>
                 <a:spcPct val="115000"/>
               </a:lnSpc>
@@ -6222,7 +6175,7 @@
                 <a:sym typeface="Proxima Nova"/>
               </a:defRPr>
             </a:lvl8pPr>
-            <a:lvl9pPr indent="-317500" lvl="8" marL="4114800">
+            <a:lvl9pPr marL="4114800" lvl="8" indent="-317500">
               <a:lnSpc>
                 <a:spcPct val="115000"/>
               </a:lnSpc>
@@ -6249,15 +6202,19 @@
               </a:defRPr>
             </a:lvl9pPr>
           </a:lstStyle>
-          <a:p/>
+          <a:p>
+            <a:endParaRPr/>
+          </a:p>
         </p:txBody>
       </p:sp>
       <p:sp>
         <p:nvSpPr>
           <p:cNvPr id="8" name="Google Shape;8;p1"/>
-          <p:cNvSpPr txBox="1"/>
+          <p:cNvSpPr txBox="1">
+            <a:spLocks noGrp="1"/>
+          </p:cNvSpPr>
           <p:nvPr>
-            <p:ph idx="12" type="sldNum"/>
+            <p:ph type="sldNum" idx="12"/>
           </p:nvPr>
         </p:nvSpPr>
         <p:spPr>
@@ -6274,7 +6231,7 @@
           </a:ln>
         </p:spPr>
         <p:txBody>
-          <a:bodyPr anchorCtr="0" anchor="ctr" bIns="91425" lIns="91425" spcFirstLastPara="1" rIns="91425" wrap="square" tIns="91425">
+          <a:bodyPr spcFirstLastPara="1" wrap="square" lIns="91425" tIns="91425" rIns="91425" bIns="91425" anchor="ctr" anchorCtr="0">
             <a:noAutofit/>
           </a:bodyPr>
           <a:lstStyle>
@@ -6388,7 +6345,7 @@
             </a:lvl9pPr>
           </a:lstStyle>
           <a:p>
-            <a:pPr indent="0" lvl="0" marL="0" rtl="0" algn="r">
+            <a:pPr marL="0" lvl="0" indent="0" algn="r" rtl="0">
               <a:spcBef>
                 <a:spcPts val="0"/>
               </a:spcBef>
@@ -6407,7 +6364,7 @@
       </p:sp>
     </p:spTree>
   </p:cSld>
-  <p:clrMap accent1="accent1" accent2="accent2" accent3="accent3" accent4="accent4" accent5="accent5" accent6="accent6" bg1="lt1" bg2="dk2" tx1="dk1" tx2="lt2" folHlink="folHlink" hlink="hlink"/>
+  <p:clrMap bg1="lt1" tx1="dk1" bg2="dk2" tx2="lt2" accent1="accent1" accent2="accent2" accent3="accent3" accent4="accent4" accent5="accent5" accent6="accent6" hlink="hlink" folHlink="folHlink"/>
   <p:sldLayoutIdLst>
     <p:sldLayoutId id="2147483648" r:id="rId1"/>
     <p:sldLayoutId id="2147483649" r:id="rId2"/>
@@ -6421,10 +6378,10 @@
     <p:sldLayoutId id="2147483657" r:id="rId10"/>
     <p:sldLayoutId id="2147483658" r:id="rId11"/>
   </p:sldLayoutIdLst>
-  <p:hf dt="0" ftr="0" hdr="0" sldNum="0"/>
+  <p:hf sldNum="0" hdr="0" ftr="0" dt="0"/>
   <p:txStyles>
     <p:titleStyle>
-      <a:defPPr lvl="0" marR="0" rtl="0" algn="l">
+      <a:defPPr marR="0" lvl="0" algn="l" rtl="0">
         <a:lnSpc>
           <a:spcPct val="100000"/>
         </a:lnSpc>
@@ -6435,7 +6392,7 @@
           <a:spcPts val="0"/>
         </a:spcAft>
       </a:defPPr>
-      <a:lvl1pPr lvl="0" marR="0" rtl="0" algn="l">
+      <a:lvl1pPr marR="0" lvl="0" algn="l" rtl="0">
         <a:lnSpc>
           <a:spcPct val="100000"/>
         </a:lnSpc>
@@ -6449,7 +6406,7 @@
           <a:srgbClr val="000000"/>
         </a:buClr>
         <a:buFont typeface="Arial"/>
-        <a:defRPr b="0" i="0" sz="1400" u="none" cap="none" strike="noStrike">
+        <a:defRPr sz="1400" b="0" i="0" u="none" strike="noStrike" cap="none" spc="0">
           <a:solidFill>
             <a:srgbClr val="000000"/>
           </a:solidFill>
@@ -6459,7 +6416,7 @@
           <a:sym typeface="Arial"/>
         </a:defRPr>
       </a:lvl1pPr>
-      <a:lvl2pPr lvl="1" marR="0" rtl="0" algn="l">
+      <a:lvl2pPr marR="0" lvl="1" algn="l" rtl="0">
         <a:lnSpc>
           <a:spcPct val="100000"/>
         </a:lnSpc>
@@ -6473,7 +6430,7 @@
           <a:srgbClr val="000000"/>
         </a:buClr>
         <a:buFont typeface="Arial"/>
-        <a:defRPr b="0" i="0" sz="1400" u="none" cap="none" strike="noStrike">
+        <a:defRPr sz="1400" b="0" i="0" u="none" strike="noStrike" cap="none" spc="0">
           <a:solidFill>
             <a:srgbClr val="000000"/>
           </a:solidFill>
@@ -6483,7 +6440,7 @@
           <a:sym typeface="Arial"/>
         </a:defRPr>
       </a:lvl2pPr>
-      <a:lvl3pPr lvl="2" marR="0" rtl="0" algn="l">
+      <a:lvl3pPr marR="0" lvl="2" algn="l" rtl="0">
         <a:lnSpc>
           <a:spcPct val="100000"/>
         </a:lnSpc>
@@ -6497,7 +6454,7 @@
           <a:srgbClr val="000000"/>
         </a:buClr>
         <a:buFont typeface="Arial"/>
-        <a:defRPr b="0" i="0" sz="1400" u="none" cap="none" strike="noStrike">
+        <a:defRPr sz="1400" b="0" i="0" u="none" strike="noStrike" cap="none" spc="0">
           <a:solidFill>
             <a:srgbClr val="000000"/>
           </a:solidFill>
@@ -6507,7 +6464,7 @@
           <a:sym typeface="Arial"/>
         </a:defRPr>
       </a:lvl3pPr>
-      <a:lvl4pPr lvl="3" marR="0" rtl="0" algn="l">
+      <a:lvl4pPr marR="0" lvl="3" algn="l" rtl="0">
         <a:lnSpc>
           <a:spcPct val="100000"/>
         </a:lnSpc>
@@ -6521,7 +6478,7 @@
           <a:srgbClr val="000000"/>
         </a:buClr>
         <a:buFont typeface="Arial"/>
-        <a:defRPr b="0" i="0" sz="1400" u="none" cap="none" strike="noStrike">
+        <a:defRPr sz="1400" b="0" i="0" u="none" strike="noStrike" cap="none" spc="0">
           <a:solidFill>
             <a:srgbClr val="000000"/>
           </a:solidFill>
@@ -6531,7 +6488,7 @@
           <a:sym typeface="Arial"/>
         </a:defRPr>
       </a:lvl4pPr>
-      <a:lvl5pPr lvl="4" marR="0" rtl="0" algn="l">
+      <a:lvl5pPr marR="0" lvl="4" algn="l" rtl="0">
         <a:lnSpc>
           <a:spcPct val="100000"/>
         </a:lnSpc>
@@ -6545,7 +6502,7 @@
           <a:srgbClr val="000000"/>
         </a:buClr>
         <a:buFont typeface="Arial"/>
-        <a:defRPr b="0" i="0" sz="1400" u="none" cap="none" strike="noStrike">
+        <a:defRPr sz="1400" b="0" i="0" u="none" strike="noStrike" cap="none" spc="0">
           <a:solidFill>
             <a:srgbClr val="000000"/>
           </a:solidFill>
@@ -6555,7 +6512,7 @@
           <a:sym typeface="Arial"/>
         </a:defRPr>
       </a:lvl5pPr>
-      <a:lvl6pPr lvl="5" marR="0" rtl="0" algn="l">
+      <a:lvl6pPr marR="0" lvl="5" algn="l" rtl="0">
         <a:lnSpc>
           <a:spcPct val="100000"/>
         </a:lnSpc>
@@ -6569,7 +6526,7 @@
           <a:srgbClr val="000000"/>
         </a:buClr>
         <a:buFont typeface="Arial"/>
-        <a:defRPr b="0" i="0" sz="1400" u="none" cap="none" strike="noStrike">
+        <a:defRPr sz="1400" b="0" i="0" u="none" strike="noStrike" cap="none" spc="0">
           <a:solidFill>
             <a:srgbClr val="000000"/>
           </a:solidFill>
@@ -6579,7 +6536,7 @@
           <a:sym typeface="Arial"/>
         </a:defRPr>
       </a:lvl6pPr>
-      <a:lvl7pPr lvl="6" marR="0" rtl="0" algn="l">
+      <a:lvl7pPr marR="0" lvl="6" algn="l" rtl="0">
         <a:lnSpc>
           <a:spcPct val="100000"/>
         </a:lnSpc>
@@ -6593,7 +6550,7 @@
           <a:srgbClr val="000000"/>
         </a:buClr>
         <a:buFont typeface="Arial"/>
-        <a:defRPr b="0" i="0" sz="1400" u="none" cap="none" strike="noStrike">
+        <a:defRPr sz="1400" b="0" i="0" u="none" strike="noStrike" cap="none" spc="0">
           <a:solidFill>
             <a:srgbClr val="000000"/>
           </a:solidFill>
@@ -6603,7 +6560,7 @@
           <a:sym typeface="Arial"/>
         </a:defRPr>
       </a:lvl7pPr>
-      <a:lvl8pPr lvl="7" marR="0" rtl="0" algn="l">
+      <a:lvl8pPr marR="0" lvl="7" algn="l" rtl="0">
         <a:lnSpc>
           <a:spcPct val="100000"/>
         </a:lnSpc>
@@ -6617,7 +6574,7 @@
           <a:srgbClr val="000000"/>
         </a:buClr>
         <a:buFont typeface="Arial"/>
-        <a:defRPr b="0" i="0" sz="1400" u="none" cap="none" strike="noStrike">
+        <a:defRPr sz="1400" b="0" i="0" u="none" strike="noStrike" cap="none" spc="0">
           <a:solidFill>
             <a:srgbClr val="000000"/>
           </a:solidFill>
@@ -6627,7 +6584,7 @@
           <a:sym typeface="Arial"/>
         </a:defRPr>
       </a:lvl8pPr>
-      <a:lvl9pPr lvl="8" marR="0" rtl="0" algn="l">
+      <a:lvl9pPr marR="0" lvl="8" algn="l" rtl="0">
         <a:lnSpc>
           <a:spcPct val="100000"/>
         </a:lnSpc>
@@ -6641,7 +6598,7 @@
           <a:srgbClr val="000000"/>
         </a:buClr>
         <a:buFont typeface="Arial"/>
-        <a:defRPr b="0" i="0" sz="1400" u="none" cap="none" strike="noStrike">
+        <a:defRPr sz="1400" b="0" i="0" u="none" strike="noStrike" cap="none" spc="0">
           <a:solidFill>
             <a:srgbClr val="000000"/>
           </a:solidFill>
@@ -6653,7 +6610,7 @@
       </a:lvl9pPr>
     </p:titleStyle>
     <p:bodyStyle>
-      <a:defPPr lvl="0" marR="0" rtl="0" algn="l">
+      <a:defPPr marR="0" lvl="0" algn="l" rtl="0">
         <a:lnSpc>
           <a:spcPct val="100000"/>
         </a:lnSpc>
@@ -6664,7 +6621,7 @@
           <a:spcPts val="0"/>
         </a:spcAft>
       </a:defPPr>
-      <a:lvl1pPr lvl="0" marR="0" rtl="0" algn="l">
+      <a:lvl1pPr marR="0" lvl="0" algn="l" rtl="0">
         <a:lnSpc>
           <a:spcPct val="100000"/>
         </a:lnSpc>
@@ -6678,7 +6635,7 @@
           <a:srgbClr val="000000"/>
         </a:buClr>
         <a:buFont typeface="Arial"/>
-        <a:defRPr b="0" i="0" sz="1400" u="none" cap="none" strike="noStrike">
+        <a:defRPr sz="1400" b="0" i="0" u="none" strike="noStrike" cap="none" spc="0">
           <a:solidFill>
             <a:srgbClr val="000000"/>
           </a:solidFill>
@@ -6688,7 +6645,7 @@
           <a:sym typeface="Arial"/>
         </a:defRPr>
       </a:lvl1pPr>
-      <a:lvl2pPr lvl="1" marR="0" rtl="0" algn="l">
+      <a:lvl2pPr marR="0" lvl="1" algn="l" rtl="0">
         <a:lnSpc>
           <a:spcPct val="100000"/>
         </a:lnSpc>
@@ -6702,7 +6659,7 @@
           <a:srgbClr val="000000"/>
         </a:buClr>
         <a:buFont typeface="Arial"/>
-        <a:defRPr b="0" i="0" sz="1400" u="none" cap="none" strike="noStrike">
+        <a:defRPr sz="1400" b="0" i="0" u="none" strike="noStrike" cap="none" spc="0">
           <a:solidFill>
             <a:srgbClr val="000000"/>
           </a:solidFill>
@@ -6712,7 +6669,7 @@
           <a:sym typeface="Arial"/>
         </a:defRPr>
       </a:lvl2pPr>
-      <a:lvl3pPr lvl="2" marR="0" rtl="0" algn="l">
+      <a:lvl3pPr marR="0" lvl="2" algn="l" rtl="0">
         <a:lnSpc>
           <a:spcPct val="100000"/>
         </a:lnSpc>
@@ -6726,7 +6683,7 @@
           <a:srgbClr val="000000"/>
         </a:buClr>
         <a:buFont typeface="Arial"/>
-        <a:defRPr b="0" i="0" sz="1400" u="none" cap="none" strike="noStrike">
+        <a:defRPr sz="1400" b="0" i="0" u="none" strike="noStrike" cap="none" spc="0">
           <a:solidFill>
             <a:srgbClr val="000000"/>
           </a:solidFill>
@@ -6736,7 +6693,7 @@
           <a:sym typeface="Arial"/>
         </a:defRPr>
       </a:lvl3pPr>
-      <a:lvl4pPr lvl="3" marR="0" rtl="0" algn="l">
+      <a:lvl4pPr marR="0" lvl="3" algn="l" rtl="0">
         <a:lnSpc>
           <a:spcPct val="100000"/>
         </a:lnSpc>
@@ -6750,7 +6707,7 @@
           <a:srgbClr val="000000"/>
         </a:buClr>
         <a:buFont typeface="Arial"/>
-        <a:defRPr b="0" i="0" sz="1400" u="none" cap="none" strike="noStrike">
+        <a:defRPr sz="1400" b="0" i="0" u="none" strike="noStrike" cap="none" spc="0">
           <a:solidFill>
             <a:srgbClr val="000000"/>
           </a:solidFill>
@@ -6760,7 +6717,7 @@
           <a:sym typeface="Arial"/>
         </a:defRPr>
       </a:lvl4pPr>
-      <a:lvl5pPr lvl="4" marR="0" rtl="0" algn="l">
+      <a:lvl5pPr marR="0" lvl="4" algn="l" rtl="0">
         <a:lnSpc>
           <a:spcPct val="100000"/>
         </a:lnSpc>
@@ -6774,7 +6731,7 @@
           <a:srgbClr val="000000"/>
         </a:buClr>
         <a:buFont typeface="Arial"/>
-        <a:defRPr b="0" i="0" sz="1400" u="none" cap="none" strike="noStrike">
+        <a:defRPr sz="1400" b="0" i="0" u="none" strike="noStrike" cap="none" spc="0">
           <a:solidFill>
             <a:srgbClr val="000000"/>
           </a:solidFill>
@@ -6784,7 +6741,7 @@
           <a:sym typeface="Arial"/>
         </a:defRPr>
       </a:lvl5pPr>
-      <a:lvl6pPr lvl="5" marR="0" rtl="0" algn="l">
+      <a:lvl6pPr marR="0" lvl="5" algn="l" rtl="0">
         <a:lnSpc>
           <a:spcPct val="100000"/>
         </a:lnSpc>
@@ -6798,7 +6755,7 @@
           <a:srgbClr val="000000"/>
         </a:buClr>
         <a:buFont typeface="Arial"/>
-        <a:defRPr b="0" i="0" sz="1400" u="none" cap="none" strike="noStrike">
+        <a:defRPr sz="1400" b="0" i="0" u="none" strike="noStrike" cap="none" spc="0">
           <a:solidFill>
             <a:srgbClr val="000000"/>
           </a:solidFill>
@@ -6808,7 +6765,7 @@
           <a:sym typeface="Arial"/>
         </a:defRPr>
       </a:lvl6pPr>
-      <a:lvl7pPr lvl="6" marR="0" rtl="0" algn="l">
+      <a:lvl7pPr marR="0" lvl="6" algn="l" rtl="0">
         <a:lnSpc>
           <a:spcPct val="100000"/>
         </a:lnSpc>
@@ -6822,7 +6779,7 @@
           <a:srgbClr val="000000"/>
         </a:buClr>
         <a:buFont typeface="Arial"/>
-        <a:defRPr b="0" i="0" sz="1400" u="none" cap="none" strike="noStrike">
+        <a:defRPr sz="1400" b="0" i="0" u="none" strike="noStrike" cap="none" spc="0">
           <a:solidFill>
             <a:srgbClr val="000000"/>
           </a:solidFill>
@@ -6832,7 +6789,7 @@
           <a:sym typeface="Arial"/>
         </a:defRPr>
       </a:lvl7pPr>
-      <a:lvl8pPr lvl="7" marR="0" rtl="0" algn="l">
+      <a:lvl8pPr marR="0" lvl="7" algn="l" rtl="0">
         <a:lnSpc>
           <a:spcPct val="100000"/>
         </a:lnSpc>
@@ -6846,7 +6803,7 @@
           <a:srgbClr val="000000"/>
         </a:buClr>
         <a:buFont typeface="Arial"/>
-        <a:defRPr b="0" i="0" sz="1400" u="none" cap="none" strike="noStrike">
+        <a:defRPr sz="1400" b="0" i="0" u="none" strike="noStrike" cap="none" spc="0">
           <a:solidFill>
             <a:srgbClr val="000000"/>
           </a:solidFill>
@@ -6856,7 +6813,7 @@
           <a:sym typeface="Arial"/>
         </a:defRPr>
       </a:lvl8pPr>
-      <a:lvl9pPr lvl="8" marR="0" rtl="0" algn="l">
+      <a:lvl9pPr marR="0" lvl="8" algn="l" rtl="0">
         <a:lnSpc>
           <a:spcPct val="100000"/>
         </a:lnSpc>
@@ -6870,7 +6827,7 @@
           <a:srgbClr val="000000"/>
         </a:buClr>
         <a:buFont typeface="Arial"/>
-        <a:defRPr b="0" i="0" sz="1400" u="none" cap="none" strike="noStrike">
+        <a:defRPr sz="1400" b="0" i="0" u="none" strike="noStrike" cap="none" spc="0">
           <a:solidFill>
             <a:srgbClr val="000000"/>
           </a:solidFill>
@@ -6882,7 +6839,7 @@
       </a:lvl9pPr>
     </p:bodyStyle>
     <p:otherStyle>
-      <a:defPPr lvl="0" marR="0" rtl="0" algn="l">
+      <a:defPPr marR="0" lvl="0" algn="l" rtl="0">
         <a:lnSpc>
           <a:spcPct val="100000"/>
         </a:lnSpc>
@@ -6893,7 +6850,7 @@
           <a:spcPts val="0"/>
         </a:spcAft>
       </a:defPPr>
-      <a:lvl1pPr lvl="0" marR="0" rtl="0" algn="l">
+      <a:lvl1pPr marR="0" lvl="0" algn="l" rtl="0">
         <a:lnSpc>
           <a:spcPct val="100000"/>
         </a:lnSpc>
@@ -6907,7 +6864,7 @@
           <a:srgbClr val="000000"/>
         </a:buClr>
         <a:buFont typeface="Arial"/>
-        <a:defRPr b="0" i="0" sz="1400" u="none" cap="none" strike="noStrike">
+        <a:defRPr sz="1400" b="0" i="0" u="none" strike="noStrike" cap="none" spc="0">
           <a:solidFill>
             <a:srgbClr val="000000"/>
           </a:solidFill>
@@ -6917,7 +6874,7 @@
           <a:sym typeface="Arial"/>
         </a:defRPr>
       </a:lvl1pPr>
-      <a:lvl2pPr lvl="1" marR="0" rtl="0" algn="l">
+      <a:lvl2pPr marR="0" lvl="1" algn="l" rtl="0">
         <a:lnSpc>
           <a:spcPct val="100000"/>
         </a:lnSpc>
@@ -6931,7 +6888,7 @@
           <a:srgbClr val="000000"/>
         </a:buClr>
         <a:buFont typeface="Arial"/>
-        <a:defRPr b="0" i="0" sz="1400" u="none" cap="none" strike="noStrike">
+        <a:defRPr sz="1400" b="0" i="0" u="none" strike="noStrike" cap="none" spc="0">
           <a:solidFill>
             <a:srgbClr val="000000"/>
           </a:solidFill>
@@ -6941,7 +6898,7 @@
           <a:sym typeface="Arial"/>
         </a:defRPr>
       </a:lvl2pPr>
-      <a:lvl3pPr lvl="2" marR="0" rtl="0" algn="l">
+      <a:lvl3pPr marR="0" lvl="2" algn="l" rtl="0">
         <a:lnSpc>
           <a:spcPct val="100000"/>
         </a:lnSpc>
@@ -6955,7 +6912,7 @@
           <a:srgbClr val="000000"/>
         </a:buClr>
         <a:buFont typeface="Arial"/>
-        <a:defRPr b="0" i="0" sz="1400" u="none" cap="none" strike="noStrike">
+        <a:defRPr sz="1400" b="0" i="0" u="none" strike="noStrike" cap="none" spc="0">
           <a:solidFill>
             <a:srgbClr val="000000"/>
           </a:solidFill>
@@ -6965,7 +6922,7 @@
           <a:sym typeface="Arial"/>
         </a:defRPr>
       </a:lvl3pPr>
-      <a:lvl4pPr lvl="3" marR="0" rtl="0" algn="l">
+      <a:lvl4pPr marR="0" lvl="3" algn="l" rtl="0">
         <a:lnSpc>
           <a:spcPct val="100000"/>
         </a:lnSpc>
@@ -6979,7 +6936,7 @@
           <a:srgbClr val="000000"/>
         </a:buClr>
         <a:buFont typeface="Arial"/>
-        <a:defRPr b="0" i="0" sz="1400" u="none" cap="none" strike="noStrike">
+        <a:defRPr sz="1400" b="0" i="0" u="none" strike="noStrike" cap="none" spc="0">
           <a:solidFill>
             <a:srgbClr val="000000"/>
           </a:solidFill>
@@ -6989,7 +6946,7 @@
           <a:sym typeface="Arial"/>
         </a:defRPr>
       </a:lvl4pPr>
-      <a:lvl5pPr lvl="4" marR="0" rtl="0" algn="l">
+      <a:lvl5pPr marR="0" lvl="4" algn="l" rtl="0">
         <a:lnSpc>
           <a:spcPct val="100000"/>
         </a:lnSpc>
@@ -7003,7 +6960,7 @@
           <a:srgbClr val="000000"/>
         </a:buClr>
         <a:buFont typeface="Arial"/>
-        <a:defRPr b="0" i="0" sz="1400" u="none" cap="none" strike="noStrike">
+        <a:defRPr sz="1400" b="0" i="0" u="none" strike="noStrike" cap="none" spc="0">
           <a:solidFill>
             <a:srgbClr val="000000"/>
           </a:solidFill>
@@ -7013,7 +6970,7 @@
           <a:sym typeface="Arial"/>
         </a:defRPr>
       </a:lvl5pPr>
-      <a:lvl6pPr lvl="5" marR="0" rtl="0" algn="l">
+      <a:lvl6pPr marR="0" lvl="5" algn="l" rtl="0">
         <a:lnSpc>
           <a:spcPct val="100000"/>
         </a:lnSpc>
@@ -7027,7 +6984,7 @@
           <a:srgbClr val="000000"/>
         </a:buClr>
         <a:buFont typeface="Arial"/>
-        <a:defRPr b="0" i="0" sz="1400" u="none" cap="none" strike="noStrike">
+        <a:defRPr sz="1400" b="0" i="0" u="none" strike="noStrike" cap="none" spc="0">
           <a:solidFill>
             <a:srgbClr val="000000"/>
           </a:solidFill>
@@ -7037,7 +6994,7 @@
           <a:sym typeface="Arial"/>
         </a:defRPr>
       </a:lvl6pPr>
-      <a:lvl7pPr lvl="6" marR="0" rtl="0" algn="l">
+      <a:lvl7pPr marR="0" lvl="6" algn="l" rtl="0">
         <a:lnSpc>
           <a:spcPct val="100000"/>
         </a:lnSpc>
@@ -7051,7 +7008,7 @@
           <a:srgbClr val="000000"/>
         </a:buClr>
         <a:buFont typeface="Arial"/>
-        <a:defRPr b="0" i="0" sz="1400" u="none" cap="none" strike="noStrike">
+        <a:defRPr sz="1400" b="0" i="0" u="none" strike="noStrike" cap="none" spc="0">
           <a:solidFill>
             <a:srgbClr val="000000"/>
           </a:solidFill>
@@ -7061,7 +7018,7 @@
           <a:sym typeface="Arial"/>
         </a:defRPr>
       </a:lvl7pPr>
-      <a:lvl8pPr lvl="7" marR="0" rtl="0" algn="l">
+      <a:lvl8pPr marR="0" lvl="7" algn="l" rtl="0">
         <a:lnSpc>
           <a:spcPct val="100000"/>
         </a:lnSpc>
@@ -7075,7 +7032,7 @@
           <a:srgbClr val="000000"/>
         </a:buClr>
         <a:buFont typeface="Arial"/>
-        <a:defRPr b="0" i="0" sz="1400" u="none" cap="none" strike="noStrike">
+        <a:defRPr sz="1400" b="0" i="0" u="none" strike="noStrike" cap="none" spc="0">
           <a:solidFill>
             <a:srgbClr val="000000"/>
           </a:solidFill>
@@ -7085,7 +7042,7 @@
           <a:sym typeface="Arial"/>
         </a:defRPr>
       </a:lvl8pPr>
-      <a:lvl9pPr lvl="8" marR="0" rtl="0" algn="l">
+      <a:lvl9pPr marR="0" lvl="8" algn="l" rtl="0">
         <a:lnSpc>
           <a:spcPct val="100000"/>
         </a:lnSpc>
@@ -7099,7 +7056,7 @@
           <a:srgbClr val="000000"/>
         </a:buClr>
         <a:buFont typeface="Arial"/>
-        <a:defRPr b="0" i="0" sz="1400" u="none" cap="none" strike="noStrike">
+        <a:defRPr sz="1400" b="0" i="0" u="none" strike="noStrike" cap="none" spc="0">
           <a:solidFill>
             <a:srgbClr val="000000"/>
           </a:solidFill>
@@ -7115,11 +7072,11 @@
 </file>
 
 <file path=ppt/slides/slide1.xml><?xml version="1.0" encoding="utf-8"?>
-<p:sld xmlns:a="http://schemas.openxmlformats.org/drawingml/2006/main" xmlns:r="http://schemas.openxmlformats.org/officeDocument/2006/relationships" xmlns:mc="http://schemas.openxmlformats.org/markup-compatibility/2006" xmlns:mv="urn:schemas-microsoft-com:mac:vml" xmlns:p="http://schemas.openxmlformats.org/presentationml/2006/main" xmlns:c="http://schemas.openxmlformats.org/drawingml/2006/chart" xmlns:dgm="http://schemas.openxmlformats.org/drawingml/2006/diagram" xmlns:o="urn:schemas-microsoft-com:office:office" xmlns:v="urn:schemas-microsoft-com:vml" xmlns:pvml="urn:schemas-microsoft-com:office:powerpoint" xmlns:com="http://schemas.openxmlformats.org/drawingml/2006/compatibility" xmlns:p14="http://schemas.microsoft.com/office/powerpoint/2010/main" xmlns:p15="http://schemas.microsoft.com/office/powerpoint/2012/main" xmlns:ahyp="http://schemas.microsoft.com/office/drawing/2018/hyperlinkcolor">
+<p:sld xmlns:a="http://schemas.openxmlformats.org/drawingml/2006/main" xmlns:r="http://schemas.openxmlformats.org/officeDocument/2006/relationships" xmlns:p="http://schemas.openxmlformats.org/presentationml/2006/main">
   <p:cSld>
     <p:spTree>
       <p:nvGrpSpPr>
-        <p:cNvPr id="58" name="Shape 58"/>
+        <p:cNvPr id="1" name="Shape 58"/>
         <p:cNvGrpSpPr/>
         <p:nvPr/>
       </p:nvGrpSpPr>
@@ -7134,7 +7091,9 @@
       <p:sp>
         <p:nvSpPr>
           <p:cNvPr id="59" name="Google Shape;59;p13"/>
-          <p:cNvSpPr txBox="1"/>
+          <p:cNvSpPr txBox="1">
+            <a:spLocks noGrp="1"/>
+          </p:cNvSpPr>
           <p:nvPr>
             <p:ph type="ctrTitle"/>
           </p:nvPr>
@@ -7149,12 +7108,12 @@
           </a:prstGeom>
         </p:spPr>
         <p:txBody>
-          <a:bodyPr anchorCtr="0" anchor="b" bIns="91425" lIns="91425" spcFirstLastPara="1" rIns="91425" wrap="square" tIns="91425">
+          <a:bodyPr spcFirstLastPara="1" wrap="square" lIns="91425" tIns="91425" rIns="91425" bIns="91425" anchor="b" anchorCtr="0">
             <a:noAutofit/>
           </a:bodyPr>
           <a:lstStyle/>
           <a:p>
-            <a:pPr indent="0" lvl="0" marL="0" rtl="0" algn="l">
+            <a:pPr marL="0" lvl="0" indent="0" algn="l" rtl="0">
               <a:spcBef>
                 <a:spcPts val="0"/>
               </a:spcBef>
@@ -7174,9 +7133,11 @@
       <p:sp>
         <p:nvSpPr>
           <p:cNvPr id="60" name="Google Shape;60;p13"/>
-          <p:cNvSpPr txBox="1"/>
+          <p:cNvSpPr txBox="1">
+            <a:spLocks noGrp="1"/>
+          </p:cNvSpPr>
           <p:nvPr>
-            <p:ph idx="1" type="subTitle"/>
+            <p:ph type="subTitle" idx="1"/>
           </p:nvPr>
         </p:nvSpPr>
         <p:spPr>
@@ -7189,12 +7150,12 @@
           </a:prstGeom>
         </p:spPr>
         <p:txBody>
-          <a:bodyPr anchorCtr="0" anchor="t" bIns="91425" lIns="91425" spcFirstLastPara="1" rIns="91425" wrap="square" tIns="91425">
+          <a:bodyPr spcFirstLastPara="1" wrap="square" lIns="91425" tIns="91425" rIns="91425" bIns="91425" anchor="t" anchorCtr="0">
             <a:noAutofit/>
           </a:bodyPr>
           <a:lstStyle/>
           <a:p>
-            <a:pPr indent="0" lvl="0" marL="0" rtl="0" algn="l">
+            <a:pPr marL="0" lvl="0" indent="0" algn="l" rtl="0">
               <a:spcBef>
                 <a:spcPts val="0"/>
               </a:spcBef>
@@ -7203,9 +7164,6 @@
               </a:spcAft>
               <a:buNone/>
             </a:pPr>
-            <a:r>
-              <a:t/>
-            </a:r>
             <a:endParaRPr/>
           </a:p>
         </p:txBody>
@@ -7218,12 +7176,12 @@
 </p:sld>
 </file>
 
-<file path=ppt/slides/slide10.xml><?xml version="1.0" encoding="utf-8"?>
-<p:sld xmlns:a="http://schemas.openxmlformats.org/drawingml/2006/main" xmlns:r="http://schemas.openxmlformats.org/officeDocument/2006/relationships" xmlns:mc="http://schemas.openxmlformats.org/markup-compatibility/2006" xmlns:mv="urn:schemas-microsoft-com:mac:vml" xmlns:p="http://schemas.openxmlformats.org/presentationml/2006/main" xmlns:c="http://schemas.openxmlformats.org/drawingml/2006/chart" xmlns:dgm="http://schemas.openxmlformats.org/drawingml/2006/diagram" xmlns:o="urn:schemas-microsoft-com:office:office" xmlns:v="urn:schemas-microsoft-com:vml" xmlns:pvml="urn:schemas-microsoft-com:office:powerpoint" xmlns:com="http://schemas.openxmlformats.org/drawingml/2006/compatibility" xmlns:p14="http://schemas.microsoft.com/office/powerpoint/2010/main" xmlns:p15="http://schemas.microsoft.com/office/powerpoint/2012/main" xmlns:ahyp="http://schemas.microsoft.com/office/drawing/2018/hyperlinkcolor">
+<file path=ppt/slides/slide2.xml><?xml version="1.0" encoding="utf-8"?>
+<p:sld xmlns:a="http://schemas.openxmlformats.org/drawingml/2006/main" xmlns:r="http://schemas.openxmlformats.org/officeDocument/2006/relationships" xmlns:p="http://schemas.openxmlformats.org/presentationml/2006/main">
   <p:cSld>
     <p:spTree>
       <p:nvGrpSpPr>
-        <p:cNvPr id="112" name="Shape 112"/>
+        <p:cNvPr id="1" name="Shape 64"/>
         <p:cNvGrpSpPr/>
         <p:nvPr/>
       </p:nvGrpSpPr>
@@ -7237,8 +7195,10 @@
       </p:grpSpPr>
       <p:sp>
         <p:nvSpPr>
-          <p:cNvPr id="113" name="Google Shape;113;p22"/>
-          <p:cNvSpPr txBox="1"/>
+          <p:cNvPr id="65" name="Google Shape;65;p14"/>
+          <p:cNvSpPr txBox="1">
+            <a:spLocks noGrp="1"/>
+          </p:cNvSpPr>
           <p:nvPr>
             <p:ph type="title"/>
           </p:nvPr>
@@ -7253,12 +7213,12 @@
           </a:prstGeom>
         </p:spPr>
         <p:txBody>
-          <a:bodyPr anchorCtr="0" anchor="t" bIns="91425" lIns="91425" spcFirstLastPara="1" rIns="91425" wrap="square" tIns="91425">
+          <a:bodyPr spcFirstLastPara="1" wrap="square" lIns="91425" tIns="91425" rIns="91425" bIns="91425" anchor="t" anchorCtr="0">
             <a:noAutofit/>
           </a:bodyPr>
           <a:lstStyle/>
           <a:p>
-            <a:pPr indent="0" lvl="0" marL="0" rtl="0" algn="l">
+            <a:pPr marL="0" lvl="0" indent="0" algn="l" rtl="0">
               <a:spcBef>
                 <a:spcPts val="0"/>
               </a:spcBef>
@@ -7269,7 +7229,7 @@
             </a:pPr>
             <a:r>
               <a:rPr lang="en"/>
-              <a:t>Interrupted Time Series</a:t>
+              <a:t>RCT</a:t>
             </a:r>
             <a:endParaRPr/>
           </a:p>
@@ -7277,10 +7237,12 @@
       </p:sp>
       <p:sp>
         <p:nvSpPr>
-          <p:cNvPr id="114" name="Google Shape;114;p22"/>
-          <p:cNvSpPr txBox="1"/>
+          <p:cNvPr id="66" name="Google Shape;66;p14"/>
+          <p:cNvSpPr txBox="1">
+            <a:spLocks noGrp="1"/>
+          </p:cNvSpPr>
           <p:nvPr>
-            <p:ph idx="1" type="body"/>
+            <p:ph type="body" idx="1"/>
           </p:nvPr>
         </p:nvSpPr>
         <p:spPr>
@@ -7293,292 +7255,12 @@
           </a:prstGeom>
         </p:spPr>
         <p:txBody>
-          <a:bodyPr anchorCtr="0" anchor="t" bIns="91425" lIns="91425" spcFirstLastPara="1" rIns="91425" wrap="square" tIns="91425">
+          <a:bodyPr spcFirstLastPara="1" wrap="square" lIns="91425" tIns="91425" rIns="91425" bIns="91425" anchor="t" anchorCtr="0">
             <a:noAutofit/>
           </a:bodyPr>
           <a:lstStyle/>
           <a:p>
-            <a:pPr indent="-381000" lvl="0" marL="457200" rtl="0" algn="l">
-              <a:spcBef>
-                <a:spcPts val="0"/>
-              </a:spcBef>
-              <a:spcAft>
-                <a:spcPts val="0"/>
-              </a:spcAft>
-              <a:buSzPts val="2400"/>
-              <a:buChar char="●"/>
-            </a:pPr>
-            <a:r>
-              <a:rPr lang="en"/>
-              <a:t>The comparison is what happened just before to what happened just after</a:t>
-            </a:r>
-            <a:endParaRPr/>
-          </a:p>
-          <a:p>
-            <a:pPr indent="-381000" lvl="0" marL="457200" rtl="0" algn="l">
-              <a:spcBef>
-                <a:spcPts val="0"/>
-              </a:spcBef>
-              <a:spcAft>
-                <a:spcPts val="0"/>
-              </a:spcAft>
-              <a:buSzPts val="2400"/>
-              <a:buChar char="●"/>
-            </a:pPr>
-            <a:r>
-              <a:rPr lang="en"/>
-              <a:t>Good at identifying immediate treatment</a:t>
-            </a:r>
-            <a:endParaRPr/>
-          </a:p>
-          <a:p>
-            <a:pPr indent="-381000" lvl="0" marL="457200" rtl="0" algn="l">
-              <a:spcBef>
-                <a:spcPts val="0"/>
-              </a:spcBef>
-              <a:spcAft>
-                <a:spcPts val="0"/>
-              </a:spcAft>
-              <a:buSzPts val="2400"/>
-              <a:buChar char="●"/>
-            </a:pPr>
-            <a:r>
-              <a:rPr lang="en"/>
-              <a:t>Bad if there is some other contemporaneous shock.</a:t>
-            </a:r>
-            <a:endParaRPr/>
-          </a:p>
-        </p:txBody>
-      </p:sp>
-    </p:spTree>
-  </p:cSld>
-  <p:clrMapOvr>
-    <a:masterClrMapping/>
-  </p:clrMapOvr>
-</p:sld>
-</file>
-
-<file path=ppt/slides/slide11.xml><?xml version="1.0" encoding="utf-8"?>
-<p:sld xmlns:a="http://schemas.openxmlformats.org/drawingml/2006/main" xmlns:r="http://schemas.openxmlformats.org/officeDocument/2006/relationships" xmlns:mc="http://schemas.openxmlformats.org/markup-compatibility/2006" xmlns:mv="urn:schemas-microsoft-com:mac:vml" xmlns:p="http://schemas.openxmlformats.org/presentationml/2006/main" xmlns:c="http://schemas.openxmlformats.org/drawingml/2006/chart" xmlns:dgm="http://schemas.openxmlformats.org/drawingml/2006/diagram" xmlns:o="urn:schemas-microsoft-com:office:office" xmlns:v="urn:schemas-microsoft-com:vml" xmlns:pvml="urn:schemas-microsoft-com:office:powerpoint" xmlns:com="http://schemas.openxmlformats.org/drawingml/2006/compatibility" xmlns:p14="http://schemas.microsoft.com/office/powerpoint/2010/main" xmlns:p15="http://schemas.microsoft.com/office/powerpoint/2012/main" xmlns:ahyp="http://schemas.microsoft.com/office/drawing/2018/hyperlinkcolor">
-  <p:cSld>
-    <p:spTree>
-      <p:nvGrpSpPr>
-        <p:cNvPr id="118" name="Shape 118"/>
-        <p:cNvGrpSpPr/>
-        <p:nvPr/>
-      </p:nvGrpSpPr>
-      <p:grpSpPr>
-        <a:xfrm>
-          <a:off x="0" y="0"/>
-          <a:ext cx="0" cy="0"/>
-          <a:chOff x="0" y="0"/>
-          <a:chExt cx="0" cy="0"/>
-        </a:xfrm>
-      </p:grpSpPr>
-      <p:sp>
-        <p:nvSpPr>
-          <p:cNvPr id="119" name="Google Shape;119;p23"/>
-          <p:cNvSpPr txBox="1"/>
-          <p:nvPr>
-            <p:ph type="title"/>
-          </p:nvPr>
-        </p:nvSpPr>
-        <p:spPr>
-          <a:xfrm>
-            <a:off x="311700" y="445025"/>
-            <a:ext cx="8520600" cy="572700"/>
-          </a:xfrm>
-          <a:prstGeom prst="rect">
-            <a:avLst/>
-          </a:prstGeom>
-        </p:spPr>
-        <p:txBody>
-          <a:bodyPr anchorCtr="0" anchor="t" bIns="91425" lIns="91425" spcFirstLastPara="1" rIns="91425" wrap="square" tIns="91425">
-            <a:noAutofit/>
-          </a:bodyPr>
-          <a:lstStyle/>
-          <a:p>
-            <a:pPr indent="0" lvl="0" marL="0" rtl="0" algn="l">
-              <a:spcBef>
-                <a:spcPts val="0"/>
-              </a:spcBef>
-              <a:spcAft>
-                <a:spcPts val="0"/>
-              </a:spcAft>
-              <a:buNone/>
-            </a:pPr>
-            <a:r>
-              <a:rPr lang="en"/>
-              <a:t>Prediction</a:t>
-            </a:r>
-            <a:endParaRPr/>
-          </a:p>
-        </p:txBody>
-      </p:sp>
-      <p:sp>
-        <p:nvSpPr>
-          <p:cNvPr id="120" name="Google Shape;120;p23"/>
-          <p:cNvSpPr txBox="1"/>
-          <p:nvPr>
-            <p:ph idx="1" type="body"/>
-          </p:nvPr>
-        </p:nvSpPr>
-        <p:spPr>
-          <a:xfrm>
-            <a:off x="311700" y="1152475"/>
-            <a:ext cx="8520600" cy="3416400"/>
-          </a:xfrm>
-          <a:prstGeom prst="rect">
-            <a:avLst/>
-          </a:prstGeom>
-        </p:spPr>
-        <p:txBody>
-          <a:bodyPr anchorCtr="0" anchor="t" bIns="91425" lIns="91425" spcFirstLastPara="1" rIns="91425" wrap="square" tIns="91425">
-            <a:noAutofit/>
-          </a:bodyPr>
-          <a:lstStyle/>
-          <a:p>
-            <a:pPr indent="-381000" lvl="0" marL="457200" rtl="0" algn="l">
-              <a:spcBef>
-                <a:spcPts val="0"/>
-              </a:spcBef>
-              <a:spcAft>
-                <a:spcPts val="0"/>
-              </a:spcAft>
-              <a:buSzPts val="2400"/>
-              <a:buChar char="●"/>
-            </a:pPr>
-            <a:r>
-              <a:rPr lang="en"/>
-              <a:t>Important in many applications</a:t>
-            </a:r>
-            <a:endParaRPr/>
-          </a:p>
-          <a:p>
-            <a:pPr indent="-381000" lvl="0" marL="457200" rtl="0" algn="l">
-              <a:spcBef>
-                <a:spcPts val="0"/>
-              </a:spcBef>
-              <a:spcAft>
-                <a:spcPts val="0"/>
-              </a:spcAft>
-              <a:buSzPts val="2400"/>
-              <a:buChar char="●"/>
-            </a:pPr>
-            <a:r>
-              <a:rPr lang="en"/>
-              <a:t>Want to avoid overfitting</a:t>
-            </a:r>
-            <a:endParaRPr/>
-          </a:p>
-          <a:p>
-            <a:pPr indent="-381000" lvl="0" marL="457200" rtl="0" algn="l">
-              <a:spcBef>
-                <a:spcPts val="0"/>
-              </a:spcBef>
-              <a:spcAft>
-                <a:spcPts val="0"/>
-              </a:spcAft>
-              <a:buSzPts val="2400"/>
-              <a:buChar char="●"/>
-            </a:pPr>
-            <a:r>
-              <a:rPr lang="en"/>
-              <a:t>Random Forest </a:t>
-            </a:r>
-            <a:endParaRPr/>
-          </a:p>
-        </p:txBody>
-      </p:sp>
-    </p:spTree>
-  </p:cSld>
-  <p:clrMapOvr>
-    <a:masterClrMapping/>
-  </p:clrMapOvr>
-</p:sld>
-</file>
-
-<file path=ppt/slides/slide2.xml><?xml version="1.0" encoding="utf-8"?>
-<p:sld xmlns:a="http://schemas.openxmlformats.org/drawingml/2006/main" xmlns:r="http://schemas.openxmlformats.org/officeDocument/2006/relationships" xmlns:mc="http://schemas.openxmlformats.org/markup-compatibility/2006" xmlns:mv="urn:schemas-microsoft-com:mac:vml" xmlns:p="http://schemas.openxmlformats.org/presentationml/2006/main" xmlns:c="http://schemas.openxmlformats.org/drawingml/2006/chart" xmlns:dgm="http://schemas.openxmlformats.org/drawingml/2006/diagram" xmlns:o="urn:schemas-microsoft-com:office:office" xmlns:v="urn:schemas-microsoft-com:vml" xmlns:pvml="urn:schemas-microsoft-com:office:powerpoint" xmlns:com="http://schemas.openxmlformats.org/drawingml/2006/compatibility" xmlns:p14="http://schemas.microsoft.com/office/powerpoint/2010/main" xmlns:p15="http://schemas.microsoft.com/office/powerpoint/2012/main" xmlns:ahyp="http://schemas.microsoft.com/office/drawing/2018/hyperlinkcolor">
-  <p:cSld>
-    <p:spTree>
-      <p:nvGrpSpPr>
-        <p:cNvPr id="64" name="Shape 64"/>
-        <p:cNvGrpSpPr/>
-        <p:nvPr/>
-      </p:nvGrpSpPr>
-      <p:grpSpPr>
-        <a:xfrm>
-          <a:off x="0" y="0"/>
-          <a:ext cx="0" cy="0"/>
-          <a:chOff x="0" y="0"/>
-          <a:chExt cx="0" cy="0"/>
-        </a:xfrm>
-      </p:grpSpPr>
-      <p:sp>
-        <p:nvSpPr>
-          <p:cNvPr id="65" name="Google Shape;65;p14"/>
-          <p:cNvSpPr txBox="1"/>
-          <p:nvPr>
-            <p:ph type="title"/>
-          </p:nvPr>
-        </p:nvSpPr>
-        <p:spPr>
-          <a:xfrm>
-            <a:off x="311700" y="445025"/>
-            <a:ext cx="8520600" cy="572700"/>
-          </a:xfrm>
-          <a:prstGeom prst="rect">
-            <a:avLst/>
-          </a:prstGeom>
-        </p:spPr>
-        <p:txBody>
-          <a:bodyPr anchorCtr="0" anchor="t" bIns="91425" lIns="91425" spcFirstLastPara="1" rIns="91425" wrap="square" tIns="91425">
-            <a:noAutofit/>
-          </a:bodyPr>
-          <a:lstStyle/>
-          <a:p>
-            <a:pPr indent="0" lvl="0" marL="0" rtl="0" algn="l">
-              <a:spcBef>
-                <a:spcPts val="0"/>
-              </a:spcBef>
-              <a:spcAft>
-                <a:spcPts val="0"/>
-              </a:spcAft>
-              <a:buNone/>
-            </a:pPr>
-            <a:r>
-              <a:rPr lang="en"/>
-              <a:t>RCT</a:t>
-            </a:r>
-            <a:endParaRPr/>
-          </a:p>
-        </p:txBody>
-      </p:sp>
-      <p:sp>
-        <p:nvSpPr>
-          <p:cNvPr id="66" name="Google Shape;66;p14"/>
-          <p:cNvSpPr txBox="1"/>
-          <p:nvPr>
-            <p:ph idx="1" type="body"/>
-          </p:nvPr>
-        </p:nvSpPr>
-        <p:spPr>
-          <a:xfrm>
-            <a:off x="311700" y="1152475"/>
-            <a:ext cx="8520600" cy="3416400"/>
-          </a:xfrm>
-          <a:prstGeom prst="rect">
-            <a:avLst/>
-          </a:prstGeom>
-        </p:spPr>
-        <p:txBody>
-          <a:bodyPr anchorCtr="0" anchor="t" bIns="91425" lIns="91425" spcFirstLastPara="1" rIns="91425" wrap="square" tIns="91425">
-            <a:noAutofit/>
-          </a:bodyPr>
-          <a:lstStyle/>
-          <a:p>
-            <a:pPr indent="-381000" lvl="0" marL="457200" rtl="0" algn="l">
+            <a:pPr marL="457200" lvl="0" indent="-381000" algn="l" rtl="0">
               <a:spcBef>
                 <a:spcPts val="0"/>
               </a:spcBef>
@@ -7595,7 +7277,7 @@
             <a:endParaRPr/>
           </a:p>
           <a:p>
-            <a:pPr indent="-381000" lvl="1" marL="914400" rtl="0" algn="l">
+            <a:pPr marL="914400" lvl="1" indent="-381000" algn="l" rtl="0">
               <a:spcBef>
                 <a:spcPts val="0"/>
               </a:spcBef>
@@ -7612,7 +7294,7 @@
             <a:endParaRPr/>
           </a:p>
           <a:p>
-            <a:pPr indent="-381000" lvl="0" marL="457200" rtl="0" algn="l">
+            <a:pPr marL="457200" lvl="0" indent="-381000" algn="l" rtl="0">
               <a:spcBef>
                 <a:spcPts val="0"/>
               </a:spcBef>
@@ -7629,7 +7311,7 @@
             <a:endParaRPr/>
           </a:p>
           <a:p>
-            <a:pPr indent="-381000" lvl="1" marL="914400" rtl="0" algn="l">
+            <a:pPr marL="914400" lvl="1" indent="-381000" algn="l" rtl="0">
               <a:spcBef>
                 <a:spcPts val="0"/>
               </a:spcBef>
@@ -7656,11 +7338,11 @@
 </file>
 
 <file path=ppt/slides/slide3.xml><?xml version="1.0" encoding="utf-8"?>
-<p:sld xmlns:a="http://schemas.openxmlformats.org/drawingml/2006/main" xmlns:r="http://schemas.openxmlformats.org/officeDocument/2006/relationships" xmlns:mc="http://schemas.openxmlformats.org/markup-compatibility/2006" xmlns:mv="urn:schemas-microsoft-com:mac:vml" xmlns:p="http://schemas.openxmlformats.org/presentationml/2006/main" xmlns:c="http://schemas.openxmlformats.org/drawingml/2006/chart" xmlns:dgm="http://schemas.openxmlformats.org/drawingml/2006/diagram" xmlns:o="urn:schemas-microsoft-com:office:office" xmlns:v="urn:schemas-microsoft-com:vml" xmlns:pvml="urn:schemas-microsoft-com:office:powerpoint" xmlns:com="http://schemas.openxmlformats.org/drawingml/2006/compatibility" xmlns:p14="http://schemas.microsoft.com/office/powerpoint/2010/main" xmlns:p15="http://schemas.microsoft.com/office/powerpoint/2012/main" xmlns:ahyp="http://schemas.microsoft.com/office/drawing/2018/hyperlinkcolor">
+<p:sld xmlns:a="http://schemas.openxmlformats.org/drawingml/2006/main" xmlns:r="http://schemas.openxmlformats.org/officeDocument/2006/relationships" xmlns:p="http://schemas.openxmlformats.org/presentationml/2006/main">
   <p:cSld>
     <p:spTree>
       <p:nvGrpSpPr>
-        <p:cNvPr id="70" name="Shape 70"/>
+        <p:cNvPr id="1" name="Shape 70"/>
         <p:cNvGrpSpPr/>
         <p:nvPr/>
       </p:nvGrpSpPr>
@@ -7675,7 +7357,9 @@
       <p:sp>
         <p:nvSpPr>
           <p:cNvPr id="71" name="Google Shape;71;p15"/>
-          <p:cNvSpPr txBox="1"/>
+          <p:cNvSpPr txBox="1">
+            <a:spLocks noGrp="1"/>
+          </p:cNvSpPr>
           <p:nvPr>
             <p:ph type="title"/>
           </p:nvPr>
@@ -7690,12 +7374,12 @@
           </a:prstGeom>
         </p:spPr>
         <p:txBody>
-          <a:bodyPr anchorCtr="0" anchor="t" bIns="91425" lIns="91425" spcFirstLastPara="1" rIns="91425" wrap="square" tIns="91425">
+          <a:bodyPr spcFirstLastPara="1" wrap="square" lIns="91425" tIns="91425" rIns="91425" bIns="91425" anchor="t" anchorCtr="0">
             <a:noAutofit/>
           </a:bodyPr>
           <a:lstStyle/>
           <a:p>
-            <a:pPr indent="0" lvl="0" marL="0" rtl="0" algn="l">
+            <a:pPr marL="0" lvl="0" indent="0" algn="l" rtl="0">
               <a:spcBef>
                 <a:spcPts val="0"/>
               </a:spcBef>
@@ -7715,9 +7399,11 @@
       <p:sp>
         <p:nvSpPr>
           <p:cNvPr id="72" name="Google Shape;72;p15"/>
-          <p:cNvSpPr txBox="1"/>
+          <p:cNvSpPr txBox="1">
+            <a:spLocks noGrp="1"/>
+          </p:cNvSpPr>
           <p:nvPr>
-            <p:ph idx="1" type="body"/>
+            <p:ph type="body" idx="1"/>
           </p:nvPr>
         </p:nvSpPr>
         <p:spPr>
@@ -7730,12 +7416,12 @@
           </a:prstGeom>
         </p:spPr>
         <p:txBody>
-          <a:bodyPr anchorCtr="0" anchor="t" bIns="91425" lIns="91425" spcFirstLastPara="1" rIns="91425" wrap="square" tIns="91425">
+          <a:bodyPr spcFirstLastPara="1" wrap="square" lIns="91425" tIns="91425" rIns="91425" bIns="91425" anchor="t" anchorCtr="0">
             <a:noAutofit/>
           </a:bodyPr>
           <a:lstStyle/>
           <a:p>
-            <a:pPr indent="-381000" lvl="0" marL="457200" rtl="0" algn="l">
+            <a:pPr marL="457200" lvl="0" indent="-381000" algn="l" rtl="0">
               <a:spcBef>
                 <a:spcPts val="0"/>
               </a:spcBef>
@@ -7746,13 +7432,13 @@
               <a:buChar char="●"/>
             </a:pPr>
             <a:r>
-              <a:rPr lang="en"/>
-              <a:t>You can think of it being as good as random which side of the discontinuity a person is</a:t>
+              <a:rPr lang="en-US" dirty="0"/>
+              <a:t>Potential outcomes are smooth through the threshold</a:t>
             </a:r>
-            <a:endParaRPr/>
+            <a:endParaRPr dirty="0"/>
           </a:p>
           <a:p>
-            <a:pPr indent="-381000" lvl="0" marL="457200" rtl="0" algn="l">
+            <a:pPr marL="457200" lvl="0" indent="-381000" algn="l" rtl="0">
               <a:spcBef>
                 <a:spcPts val="0"/>
               </a:spcBef>
@@ -7763,13 +7449,13 @@
               <a:buChar char="●"/>
             </a:pPr>
             <a:r>
-              <a:rPr lang="en"/>
+              <a:rPr lang="en" dirty="0"/>
               <a:t>Pictures help a lot</a:t>
             </a:r>
-            <a:endParaRPr/>
+            <a:endParaRPr dirty="0"/>
           </a:p>
           <a:p>
-            <a:pPr indent="-381000" lvl="0" marL="457200" rtl="0" algn="l">
+            <a:pPr marL="457200" lvl="0" indent="-381000" algn="l" rtl="0">
               <a:spcBef>
                 <a:spcPts val="0"/>
               </a:spcBef>
@@ -7780,13 +7466,13 @@
               <a:buChar char="●"/>
             </a:pPr>
             <a:r>
-              <a:rPr lang="en"/>
+              <a:rPr lang="en" dirty="0"/>
               <a:t>Fuzzy v Sharp</a:t>
             </a:r>
-            <a:endParaRPr/>
+            <a:endParaRPr dirty="0"/>
           </a:p>
           <a:p>
-            <a:pPr indent="-381000" lvl="0" marL="457200" rtl="0" algn="l">
+            <a:pPr marL="457200" lvl="0" indent="-381000" algn="l" rtl="0">
               <a:spcBef>
                 <a:spcPts val="0"/>
               </a:spcBef>
@@ -7797,13 +7483,13 @@
               <a:buChar char="●"/>
             </a:pPr>
             <a:r>
-              <a:rPr lang="en"/>
+              <a:rPr lang="en" dirty="0"/>
               <a:t>Estimating equation</a:t>
             </a:r>
-            <a:endParaRPr/>
+            <a:endParaRPr dirty="0"/>
           </a:p>
           <a:p>
-            <a:pPr indent="-381000" lvl="0" marL="457200" rtl="0" algn="l">
+            <a:pPr marL="457200" lvl="0" indent="-381000" algn="l" rtl="0">
               <a:spcBef>
                 <a:spcPts val="0"/>
               </a:spcBef>
@@ -7814,13 +7500,13 @@
               <a:buChar char="●"/>
             </a:pPr>
             <a:r>
-              <a:rPr lang="en"/>
+              <a:rPr lang="en" dirty="0"/>
               <a:t>Checks: Check for density, Check for continuity of covariates</a:t>
             </a:r>
-            <a:endParaRPr/>
+            <a:endParaRPr dirty="0"/>
           </a:p>
           <a:p>
-            <a:pPr indent="0" lvl="0" marL="457200" rtl="0" algn="l">
+            <a:pPr marL="457200" lvl="0" indent="0" algn="l" rtl="0">
               <a:spcBef>
                 <a:spcPts val="1600"/>
               </a:spcBef>
@@ -7829,10 +7515,7 @@
               </a:spcAft>
               <a:buNone/>
             </a:pPr>
-            <a:r>
-              <a:t/>
-            </a:r>
-            <a:endParaRPr/>
+            <a:endParaRPr dirty="0"/>
           </a:p>
         </p:txBody>
       </p:sp>
@@ -7845,11 +7528,11 @@
 </file>
 
 <file path=ppt/slides/slide4.xml><?xml version="1.0" encoding="utf-8"?>
-<p:sld xmlns:a="http://schemas.openxmlformats.org/drawingml/2006/main" xmlns:r="http://schemas.openxmlformats.org/officeDocument/2006/relationships" xmlns:mc="http://schemas.openxmlformats.org/markup-compatibility/2006" xmlns:mv="urn:schemas-microsoft-com:mac:vml" xmlns:p="http://schemas.openxmlformats.org/presentationml/2006/main" xmlns:c="http://schemas.openxmlformats.org/drawingml/2006/chart" xmlns:dgm="http://schemas.openxmlformats.org/drawingml/2006/diagram" xmlns:o="urn:schemas-microsoft-com:office:office" xmlns:v="urn:schemas-microsoft-com:vml" xmlns:pvml="urn:schemas-microsoft-com:office:powerpoint" xmlns:com="http://schemas.openxmlformats.org/drawingml/2006/compatibility" xmlns:p14="http://schemas.microsoft.com/office/powerpoint/2010/main" xmlns:p15="http://schemas.microsoft.com/office/powerpoint/2012/main" xmlns:ahyp="http://schemas.microsoft.com/office/drawing/2018/hyperlinkcolor">
+<p:sld xmlns:a="http://schemas.openxmlformats.org/drawingml/2006/main" xmlns:r="http://schemas.openxmlformats.org/officeDocument/2006/relationships" xmlns:p="http://schemas.openxmlformats.org/presentationml/2006/main">
   <p:cSld>
     <p:spTree>
       <p:nvGrpSpPr>
-        <p:cNvPr id="76" name="Shape 76"/>
+        <p:cNvPr id="1" name="Shape 76"/>
         <p:cNvGrpSpPr/>
         <p:nvPr/>
       </p:nvGrpSpPr>
@@ -7864,7 +7547,9 @@
       <p:sp>
         <p:nvSpPr>
           <p:cNvPr id="77" name="Google Shape;77;p16"/>
-          <p:cNvSpPr txBox="1"/>
+          <p:cNvSpPr txBox="1">
+            <a:spLocks noGrp="1"/>
+          </p:cNvSpPr>
           <p:nvPr>
             <p:ph type="title"/>
           </p:nvPr>
@@ -7879,12 +7564,12 @@
           </a:prstGeom>
         </p:spPr>
         <p:txBody>
-          <a:bodyPr anchorCtr="0" anchor="t" bIns="91425" lIns="91425" spcFirstLastPara="1" rIns="91425" wrap="square" tIns="91425">
+          <a:bodyPr spcFirstLastPara="1" wrap="square" lIns="91425" tIns="91425" rIns="91425" bIns="91425" anchor="t" anchorCtr="0">
             <a:noAutofit/>
           </a:bodyPr>
           <a:lstStyle/>
           <a:p>
-            <a:pPr indent="0" lvl="0" marL="0" rtl="0" algn="l">
+            <a:pPr marL="0" lvl="0" indent="0" algn="l" rtl="0">
               <a:spcBef>
                 <a:spcPts val="0"/>
               </a:spcBef>
@@ -7904,9 +7589,11 @@
       <p:sp>
         <p:nvSpPr>
           <p:cNvPr id="78" name="Google Shape;78;p16"/>
-          <p:cNvSpPr txBox="1"/>
+          <p:cNvSpPr txBox="1">
+            <a:spLocks noGrp="1"/>
+          </p:cNvSpPr>
           <p:nvPr>
-            <p:ph idx="1" type="body"/>
+            <p:ph type="body" idx="1"/>
           </p:nvPr>
         </p:nvSpPr>
         <p:spPr>
@@ -7919,12 +7606,12 @@
           </a:prstGeom>
         </p:spPr>
         <p:txBody>
-          <a:bodyPr anchorCtr="0" anchor="t" bIns="91425" lIns="91425" spcFirstLastPara="1" rIns="91425" wrap="square" tIns="91425">
+          <a:bodyPr spcFirstLastPara="1" wrap="square" lIns="91425" tIns="91425" rIns="91425" bIns="91425" anchor="t" anchorCtr="0">
             <a:noAutofit/>
           </a:bodyPr>
           <a:lstStyle/>
           <a:p>
-            <a:pPr indent="-381000" lvl="0" marL="457200" rtl="0" algn="l">
+            <a:pPr marL="457200" lvl="0" indent="-381000" algn="l" rtl="0">
               <a:spcBef>
                 <a:spcPts val="0"/>
               </a:spcBef>
@@ -7941,7 +7628,7 @@
             <a:endParaRPr/>
           </a:p>
           <a:p>
-            <a:pPr indent="-381000" lvl="0" marL="457200" rtl="0" algn="l">
+            <a:pPr marL="457200" lvl="0" indent="-381000" algn="l" rtl="0">
               <a:spcBef>
                 <a:spcPts val="0"/>
               </a:spcBef>
@@ -7958,7 +7645,7 @@
             <a:endParaRPr/>
           </a:p>
           <a:p>
-            <a:pPr indent="-381000" lvl="0" marL="457200" rtl="0" algn="l">
+            <a:pPr marL="457200" lvl="0" indent="-381000" algn="l" rtl="0">
               <a:spcBef>
                 <a:spcPts val="0"/>
               </a:spcBef>
@@ -7975,7 +7662,7 @@
             <a:endParaRPr/>
           </a:p>
           <a:p>
-            <a:pPr indent="0" lvl="0" marL="457200" rtl="0" algn="l">
+            <a:pPr marL="457200" lvl="0" indent="0" algn="l" rtl="0">
               <a:spcBef>
                 <a:spcPts val="1600"/>
               </a:spcBef>
@@ -7984,9 +7671,6 @@
               </a:spcAft>
               <a:buNone/>
             </a:pPr>
-            <a:r>
-              <a:t/>
-            </a:r>
             <a:endParaRPr/>
           </a:p>
         </p:txBody>
@@ -8000,11 +7684,11 @@
 </file>
 
 <file path=ppt/slides/slide5.xml><?xml version="1.0" encoding="utf-8"?>
-<p:sld xmlns:a="http://schemas.openxmlformats.org/drawingml/2006/main" xmlns:r="http://schemas.openxmlformats.org/officeDocument/2006/relationships" xmlns:mc="http://schemas.openxmlformats.org/markup-compatibility/2006" xmlns:mv="urn:schemas-microsoft-com:mac:vml" xmlns:p="http://schemas.openxmlformats.org/presentationml/2006/main" xmlns:c="http://schemas.openxmlformats.org/drawingml/2006/chart" xmlns:dgm="http://schemas.openxmlformats.org/drawingml/2006/diagram" xmlns:o="urn:schemas-microsoft-com:office:office" xmlns:v="urn:schemas-microsoft-com:vml" xmlns:pvml="urn:schemas-microsoft-com:office:powerpoint" xmlns:com="http://schemas.openxmlformats.org/drawingml/2006/compatibility" xmlns:p14="http://schemas.microsoft.com/office/powerpoint/2010/main" xmlns:p15="http://schemas.microsoft.com/office/powerpoint/2012/main" xmlns:ahyp="http://schemas.microsoft.com/office/drawing/2018/hyperlinkcolor">
+<p:sld xmlns:a="http://schemas.openxmlformats.org/drawingml/2006/main" xmlns:r="http://schemas.openxmlformats.org/officeDocument/2006/relationships" xmlns:p="http://schemas.openxmlformats.org/presentationml/2006/main">
   <p:cSld>
     <p:spTree>
       <p:nvGrpSpPr>
-        <p:cNvPr id="82" name="Shape 82"/>
+        <p:cNvPr id="1" name="Shape 82"/>
         <p:cNvGrpSpPr/>
         <p:nvPr/>
       </p:nvGrpSpPr>
@@ -8019,7 +7703,9 @@
       <p:sp>
         <p:nvSpPr>
           <p:cNvPr id="83" name="Google Shape;83;p17"/>
-          <p:cNvSpPr txBox="1"/>
+          <p:cNvSpPr txBox="1">
+            <a:spLocks noGrp="1"/>
+          </p:cNvSpPr>
           <p:nvPr>
             <p:ph type="title"/>
           </p:nvPr>
@@ -8034,12 +7720,12 @@
           </a:prstGeom>
         </p:spPr>
         <p:txBody>
-          <a:bodyPr anchorCtr="0" anchor="t" bIns="91425" lIns="91425" spcFirstLastPara="1" rIns="91425" wrap="square" tIns="91425">
+          <a:bodyPr spcFirstLastPara="1" wrap="square" lIns="91425" tIns="91425" rIns="91425" bIns="91425" anchor="t" anchorCtr="0">
             <a:noAutofit/>
           </a:bodyPr>
           <a:lstStyle/>
           <a:p>
-            <a:pPr indent="0" lvl="0" marL="0" rtl="0" algn="l">
+            <a:pPr marL="0" lvl="0" indent="0" algn="l" rtl="0">
               <a:spcBef>
                 <a:spcPts val="0"/>
               </a:spcBef>
@@ -8059,9 +7745,11 @@
       <p:sp>
         <p:nvSpPr>
           <p:cNvPr id="84" name="Google Shape;84;p17"/>
-          <p:cNvSpPr txBox="1"/>
+          <p:cNvSpPr txBox="1">
+            <a:spLocks noGrp="1"/>
+          </p:cNvSpPr>
           <p:nvPr>
-            <p:ph idx="1" type="body"/>
+            <p:ph type="body" idx="1"/>
           </p:nvPr>
         </p:nvSpPr>
         <p:spPr>
@@ -8074,12 +7762,12 @@
           </a:prstGeom>
         </p:spPr>
         <p:txBody>
-          <a:bodyPr anchorCtr="0" anchor="t" bIns="91425" lIns="91425" spcFirstLastPara="1" rIns="91425" wrap="square" tIns="91425">
+          <a:bodyPr spcFirstLastPara="1" wrap="square" lIns="91425" tIns="91425" rIns="91425" bIns="91425" anchor="t" anchorCtr="0">
             <a:noAutofit/>
           </a:bodyPr>
           <a:lstStyle/>
           <a:p>
-            <a:pPr indent="-381000" lvl="0" marL="457200" rtl="0" algn="l">
+            <a:pPr marL="457200" lvl="0" indent="-381000" algn="l" rtl="0">
               <a:spcBef>
                 <a:spcPts val="0"/>
               </a:spcBef>
@@ -8096,7 +7784,7 @@
             <a:endParaRPr/>
           </a:p>
           <a:p>
-            <a:pPr indent="-381000" lvl="0" marL="457200" rtl="0" algn="l">
+            <a:pPr marL="457200" lvl="0" indent="-381000" algn="l" rtl="0">
               <a:spcBef>
                 <a:spcPts val="0"/>
               </a:spcBef>
@@ -8113,7 +7801,7 @@
             <a:endParaRPr/>
           </a:p>
           <a:p>
-            <a:pPr indent="-381000" lvl="0" marL="457200" rtl="0" algn="l">
+            <a:pPr marL="457200" lvl="0" indent="-381000" algn="l" rtl="0">
               <a:spcBef>
                 <a:spcPts val="0"/>
               </a:spcBef>
@@ -8130,7 +7818,7 @@
             <a:endParaRPr/>
           </a:p>
           <a:p>
-            <a:pPr indent="-381000" lvl="0" marL="457200" rtl="0" algn="l">
+            <a:pPr marL="457200" lvl="0" indent="-381000" algn="l" rtl="0">
               <a:spcBef>
                 <a:spcPts val="0"/>
               </a:spcBef>
@@ -8147,7 +7835,7 @@
             <a:endParaRPr/>
           </a:p>
           <a:p>
-            <a:pPr indent="-381000" lvl="1" marL="914400" rtl="0" algn="l">
+            <a:pPr marL="914400" lvl="1" indent="-381000" algn="l" rtl="0">
               <a:spcBef>
                 <a:spcPts val="0"/>
               </a:spcBef>
@@ -8164,7 +7852,7 @@
             <a:endParaRPr/>
           </a:p>
           <a:p>
-            <a:pPr indent="-381000" lvl="0" marL="457200" rtl="0" algn="l">
+            <a:pPr marL="457200" lvl="0" indent="-381000" algn="l" rtl="0">
               <a:spcBef>
                 <a:spcPts val="0"/>
               </a:spcBef>
@@ -8191,11 +7879,11 @@
 </file>
 
 <file path=ppt/slides/slide6.xml><?xml version="1.0" encoding="utf-8"?>
-<p:sld xmlns:a="http://schemas.openxmlformats.org/drawingml/2006/main" xmlns:r="http://schemas.openxmlformats.org/officeDocument/2006/relationships" xmlns:mc="http://schemas.openxmlformats.org/markup-compatibility/2006" xmlns:mv="urn:schemas-microsoft-com:mac:vml" xmlns:p="http://schemas.openxmlformats.org/presentationml/2006/main" xmlns:c="http://schemas.openxmlformats.org/drawingml/2006/chart" xmlns:dgm="http://schemas.openxmlformats.org/drawingml/2006/diagram" xmlns:o="urn:schemas-microsoft-com:office:office" xmlns:v="urn:schemas-microsoft-com:vml" xmlns:pvml="urn:schemas-microsoft-com:office:powerpoint" xmlns:com="http://schemas.openxmlformats.org/drawingml/2006/compatibility" xmlns:p14="http://schemas.microsoft.com/office/powerpoint/2010/main" xmlns:p15="http://schemas.microsoft.com/office/powerpoint/2012/main" xmlns:ahyp="http://schemas.microsoft.com/office/drawing/2018/hyperlinkcolor">
+<p:sld xmlns:a="http://schemas.openxmlformats.org/drawingml/2006/main" xmlns:r="http://schemas.openxmlformats.org/officeDocument/2006/relationships" xmlns:p="http://schemas.openxmlformats.org/presentationml/2006/main">
   <p:cSld>
     <p:spTree>
       <p:nvGrpSpPr>
-        <p:cNvPr id="88" name="Shape 88"/>
+        <p:cNvPr id="1" name="Shape 88"/>
         <p:cNvGrpSpPr/>
         <p:nvPr/>
       </p:nvGrpSpPr>
@@ -8210,7 +7898,9 @@
       <p:sp>
         <p:nvSpPr>
           <p:cNvPr id="89" name="Google Shape;89;p18"/>
-          <p:cNvSpPr txBox="1"/>
+          <p:cNvSpPr txBox="1">
+            <a:spLocks noGrp="1"/>
+          </p:cNvSpPr>
           <p:nvPr>
             <p:ph type="title"/>
           </p:nvPr>
@@ -8225,12 +7915,12 @@
           </a:prstGeom>
         </p:spPr>
         <p:txBody>
-          <a:bodyPr anchorCtr="0" anchor="t" bIns="91425" lIns="91425" spcFirstLastPara="1" rIns="91425" wrap="square" tIns="91425">
+          <a:bodyPr spcFirstLastPara="1" wrap="square" lIns="91425" tIns="91425" rIns="91425" bIns="91425" anchor="t" anchorCtr="0">
             <a:noAutofit/>
           </a:bodyPr>
           <a:lstStyle/>
           <a:p>
-            <a:pPr indent="0" lvl="0" marL="0" rtl="0" algn="l">
+            <a:pPr marL="0" lvl="0" indent="0" algn="l" rtl="0">
               <a:spcBef>
                 <a:spcPts val="0"/>
               </a:spcBef>
@@ -8250,9 +7940,11 @@
       <p:sp>
         <p:nvSpPr>
           <p:cNvPr id="90" name="Google Shape;90;p18"/>
-          <p:cNvSpPr txBox="1"/>
+          <p:cNvSpPr txBox="1">
+            <a:spLocks noGrp="1"/>
+          </p:cNvSpPr>
           <p:nvPr>
-            <p:ph idx="1" type="body"/>
+            <p:ph type="body" idx="1"/>
           </p:nvPr>
         </p:nvSpPr>
         <p:spPr>
@@ -8265,12 +7957,12 @@
           </a:prstGeom>
         </p:spPr>
         <p:txBody>
-          <a:bodyPr anchorCtr="0" anchor="t" bIns="91425" lIns="91425" spcFirstLastPara="1" rIns="91425" wrap="square" tIns="91425">
+          <a:bodyPr spcFirstLastPara="1" wrap="square" lIns="91425" tIns="91425" rIns="91425" bIns="91425" anchor="t" anchorCtr="0">
             <a:noAutofit/>
           </a:bodyPr>
           <a:lstStyle/>
           <a:p>
-            <a:pPr indent="-381000" lvl="0" marL="457200" rtl="0" algn="l">
+            <a:pPr marL="457200" lvl="0" indent="-381000" algn="l" rtl="0">
               <a:spcBef>
                 <a:spcPts val="0"/>
               </a:spcBef>
@@ -8287,7 +7979,7 @@
             <a:endParaRPr/>
           </a:p>
           <a:p>
-            <a:pPr indent="-381000" lvl="0" marL="457200" rtl="0" algn="l">
+            <a:pPr marL="457200" lvl="0" indent="-381000" algn="l" rtl="0">
               <a:spcBef>
                 <a:spcPts val="0"/>
               </a:spcBef>
@@ -8304,7 +7996,7 @@
             <a:endParaRPr/>
           </a:p>
           <a:p>
-            <a:pPr indent="-381000" lvl="0" marL="457200" rtl="0" algn="l">
+            <a:pPr marL="457200" lvl="0" indent="-381000" algn="l" rtl="0">
               <a:spcBef>
                 <a:spcPts val="0"/>
               </a:spcBef>
@@ -8321,7 +8013,7 @@
             <a:endParaRPr/>
           </a:p>
           <a:p>
-            <a:pPr indent="-381000" lvl="0" marL="457200" rtl="0" algn="l">
+            <a:pPr marL="457200" lvl="0" indent="-381000" algn="l" rtl="0">
               <a:spcBef>
                 <a:spcPts val="0"/>
               </a:spcBef>
@@ -8338,7 +8030,7 @@
             <a:endParaRPr/>
           </a:p>
           <a:p>
-            <a:pPr indent="-381000" lvl="0" marL="457200" rtl="0" algn="l">
+            <a:pPr marL="457200" lvl="0" indent="-381000" algn="l" rtl="0">
               <a:spcBef>
                 <a:spcPts val="0"/>
               </a:spcBef>
@@ -8365,11 +8057,11 @@
 </file>
 
 <file path=ppt/slides/slide7.xml><?xml version="1.0" encoding="utf-8"?>
-<p:sld xmlns:a="http://schemas.openxmlformats.org/drawingml/2006/main" xmlns:r="http://schemas.openxmlformats.org/officeDocument/2006/relationships" xmlns:mc="http://schemas.openxmlformats.org/markup-compatibility/2006" xmlns:mv="urn:schemas-microsoft-com:mac:vml" xmlns:p="http://schemas.openxmlformats.org/presentationml/2006/main" xmlns:c="http://schemas.openxmlformats.org/drawingml/2006/chart" xmlns:dgm="http://schemas.openxmlformats.org/drawingml/2006/diagram" xmlns:o="urn:schemas-microsoft-com:office:office" xmlns:v="urn:schemas-microsoft-com:vml" xmlns:pvml="urn:schemas-microsoft-com:office:powerpoint" xmlns:com="http://schemas.openxmlformats.org/drawingml/2006/compatibility" xmlns:p14="http://schemas.microsoft.com/office/powerpoint/2010/main" xmlns:p15="http://schemas.microsoft.com/office/powerpoint/2012/main" xmlns:ahyp="http://schemas.microsoft.com/office/drawing/2018/hyperlinkcolor">
+<p:sld xmlns:a="http://schemas.openxmlformats.org/drawingml/2006/main" xmlns:r="http://schemas.openxmlformats.org/officeDocument/2006/relationships" xmlns:p="http://schemas.openxmlformats.org/presentationml/2006/main">
   <p:cSld>
     <p:spTree>
       <p:nvGrpSpPr>
-        <p:cNvPr id="94" name="Shape 94"/>
+        <p:cNvPr id="1" name="Shape 94"/>
         <p:cNvGrpSpPr/>
         <p:nvPr/>
       </p:nvGrpSpPr>
@@ -8384,7 +8076,9 @@
       <p:sp>
         <p:nvSpPr>
           <p:cNvPr id="95" name="Google Shape;95;p19"/>
-          <p:cNvSpPr txBox="1"/>
+          <p:cNvSpPr txBox="1">
+            <a:spLocks noGrp="1"/>
+          </p:cNvSpPr>
           <p:nvPr>
             <p:ph type="title"/>
           </p:nvPr>
@@ -8399,12 +8093,12 @@
           </a:prstGeom>
         </p:spPr>
         <p:txBody>
-          <a:bodyPr anchorCtr="0" anchor="t" bIns="91425" lIns="91425" spcFirstLastPara="1" rIns="91425" wrap="square" tIns="91425">
+          <a:bodyPr spcFirstLastPara="1" wrap="square" lIns="91425" tIns="91425" rIns="91425" bIns="91425" anchor="t" anchorCtr="0">
             <a:noAutofit/>
           </a:bodyPr>
           <a:lstStyle/>
           <a:p>
-            <a:pPr indent="0" lvl="0" marL="0" rtl="0" algn="l">
+            <a:pPr marL="0" lvl="0" indent="0" algn="l" rtl="0">
               <a:spcBef>
                 <a:spcPts val="0"/>
               </a:spcBef>
@@ -8424,9 +8118,11 @@
       <p:sp>
         <p:nvSpPr>
           <p:cNvPr id="96" name="Google Shape;96;p19"/>
-          <p:cNvSpPr txBox="1"/>
+          <p:cNvSpPr txBox="1">
+            <a:spLocks noGrp="1"/>
+          </p:cNvSpPr>
           <p:nvPr>
-            <p:ph idx="1" type="body"/>
+            <p:ph type="body" idx="1"/>
           </p:nvPr>
         </p:nvSpPr>
         <p:spPr>
@@ -8439,12 +8135,12 @@
           </a:prstGeom>
         </p:spPr>
         <p:txBody>
-          <a:bodyPr anchorCtr="0" anchor="t" bIns="91425" lIns="91425" spcFirstLastPara="1" rIns="91425" wrap="square" tIns="91425">
+          <a:bodyPr spcFirstLastPara="1" wrap="square" lIns="91425" tIns="91425" rIns="91425" bIns="91425" anchor="t" anchorCtr="0">
             <a:noAutofit/>
           </a:bodyPr>
           <a:lstStyle/>
           <a:p>
-            <a:pPr indent="-381000" lvl="0" marL="457200" rtl="0" algn="l">
+            <a:pPr marL="457200" lvl="0" indent="-381000" algn="l" rtl="0">
               <a:spcBef>
                 <a:spcPts val="0"/>
               </a:spcBef>
@@ -8461,7 +8157,7 @@
             <a:endParaRPr/>
           </a:p>
           <a:p>
-            <a:pPr indent="-381000" lvl="0" marL="457200" rtl="0" algn="l">
+            <a:pPr marL="457200" lvl="0" indent="-381000" algn="l" rtl="0">
               <a:spcBef>
                 <a:spcPts val="0"/>
               </a:spcBef>
@@ -8488,11 +8184,11 @@
 </file>
 
 <file path=ppt/slides/slide8.xml><?xml version="1.0" encoding="utf-8"?>
-<p:sld xmlns:a="http://schemas.openxmlformats.org/drawingml/2006/main" xmlns:r="http://schemas.openxmlformats.org/officeDocument/2006/relationships" xmlns:mc="http://schemas.openxmlformats.org/markup-compatibility/2006" xmlns:mv="urn:schemas-microsoft-com:mac:vml" xmlns:p="http://schemas.openxmlformats.org/presentationml/2006/main" xmlns:c="http://schemas.openxmlformats.org/drawingml/2006/chart" xmlns:dgm="http://schemas.openxmlformats.org/drawingml/2006/diagram" xmlns:o="urn:schemas-microsoft-com:office:office" xmlns:v="urn:schemas-microsoft-com:vml" xmlns:pvml="urn:schemas-microsoft-com:office:powerpoint" xmlns:com="http://schemas.openxmlformats.org/drawingml/2006/compatibility" xmlns:p14="http://schemas.microsoft.com/office/powerpoint/2010/main" xmlns:p15="http://schemas.microsoft.com/office/powerpoint/2012/main" xmlns:ahyp="http://schemas.microsoft.com/office/drawing/2018/hyperlinkcolor">
+<p:sld xmlns:a="http://schemas.openxmlformats.org/drawingml/2006/main" xmlns:r="http://schemas.openxmlformats.org/officeDocument/2006/relationships" xmlns:p="http://schemas.openxmlformats.org/presentationml/2006/main">
   <p:cSld>
     <p:spTree>
       <p:nvGrpSpPr>
-        <p:cNvPr id="100" name="Shape 100"/>
+        <p:cNvPr id="1" name="Shape 100"/>
         <p:cNvGrpSpPr/>
         <p:nvPr/>
       </p:nvGrpSpPr>
@@ -8507,7 +8203,9 @@
       <p:sp>
         <p:nvSpPr>
           <p:cNvPr id="101" name="Google Shape;101;p20"/>
-          <p:cNvSpPr txBox="1"/>
+          <p:cNvSpPr txBox="1">
+            <a:spLocks noGrp="1"/>
+          </p:cNvSpPr>
           <p:nvPr>
             <p:ph type="title"/>
           </p:nvPr>
@@ -8522,12 +8220,12 @@
           </a:prstGeom>
         </p:spPr>
         <p:txBody>
-          <a:bodyPr anchorCtr="0" anchor="t" bIns="91425" lIns="91425" spcFirstLastPara="1" rIns="91425" wrap="square" tIns="91425">
+          <a:bodyPr spcFirstLastPara="1" wrap="square" lIns="91425" tIns="91425" rIns="91425" bIns="91425" anchor="t" anchorCtr="0">
             <a:noAutofit/>
           </a:bodyPr>
           <a:lstStyle/>
           <a:p>
-            <a:pPr indent="0" lvl="0" marL="0" rtl="0" algn="l">
+            <a:pPr marL="0" lvl="0" indent="0" algn="l" rtl="0">
               <a:spcBef>
                 <a:spcPts val="0"/>
               </a:spcBef>
@@ -8538,11 +8236,7 @@
             </a:pPr>
             <a:r>
               <a:rPr lang="en"/>
-              <a:t>Synthetic</a:t>
-            </a:r>
-            <a:r>
-              <a:rPr lang="en"/>
-              <a:t> Control</a:t>
+              <a:t>Synthetic Control</a:t>
             </a:r>
             <a:endParaRPr/>
           </a:p>
@@ -8551,9 +8245,11 @@
       <p:sp>
         <p:nvSpPr>
           <p:cNvPr id="102" name="Google Shape;102;p20"/>
-          <p:cNvSpPr txBox="1"/>
+          <p:cNvSpPr txBox="1">
+            <a:spLocks noGrp="1"/>
+          </p:cNvSpPr>
           <p:nvPr>
-            <p:ph idx="1" type="body"/>
+            <p:ph type="body" idx="1"/>
           </p:nvPr>
         </p:nvSpPr>
         <p:spPr>
@@ -8566,12 +8262,12 @@
           </a:prstGeom>
         </p:spPr>
         <p:txBody>
-          <a:bodyPr anchorCtr="0" anchor="t" bIns="91425" lIns="91425" spcFirstLastPara="1" rIns="91425" wrap="square" tIns="91425">
+          <a:bodyPr spcFirstLastPara="1" wrap="square" lIns="91425" tIns="91425" rIns="91425" bIns="91425" anchor="t" anchorCtr="0">
             <a:noAutofit/>
           </a:bodyPr>
           <a:lstStyle/>
           <a:p>
-            <a:pPr indent="-381000" lvl="0" marL="457200" rtl="0" algn="l">
+            <a:pPr marL="457200" lvl="0" indent="-381000" algn="l" rtl="0">
               <a:spcBef>
                 <a:spcPts val="0"/>
               </a:spcBef>
@@ -8588,7 +8284,7 @@
             <a:endParaRPr/>
           </a:p>
           <a:p>
-            <a:pPr indent="-381000" lvl="0" marL="457200" rtl="0" algn="l">
+            <a:pPr marL="457200" lvl="0" indent="-381000" algn="l" rtl="0">
               <a:spcBef>
                 <a:spcPts val="0"/>
               </a:spcBef>
@@ -8605,7 +8301,7 @@
             <a:endParaRPr/>
           </a:p>
           <a:p>
-            <a:pPr indent="-381000" lvl="0" marL="457200" rtl="0" algn="l">
+            <a:pPr marL="457200" lvl="0" indent="-381000" algn="l" rtl="0">
               <a:spcBef>
                 <a:spcPts val="0"/>
               </a:spcBef>
@@ -8622,7 +8318,7 @@
             <a:endParaRPr/>
           </a:p>
           <a:p>
-            <a:pPr indent="-381000" lvl="0" marL="457200" rtl="0" algn="l">
+            <a:pPr marL="457200" lvl="0" indent="-381000" algn="l" rtl="0">
               <a:spcBef>
                 <a:spcPts val="0"/>
               </a:spcBef>
@@ -8639,7 +8335,7 @@
             <a:endParaRPr/>
           </a:p>
           <a:p>
-            <a:pPr indent="0" lvl="0" marL="457200" rtl="0" algn="l">
+            <a:pPr marL="457200" lvl="0" indent="0" algn="l" rtl="0">
               <a:spcBef>
                 <a:spcPts val="1600"/>
               </a:spcBef>
@@ -8648,9 +8344,6 @@
               </a:spcAft>
               <a:buNone/>
             </a:pPr>
-            <a:r>
-              <a:t/>
-            </a:r>
             <a:endParaRPr/>
           </a:p>
         </p:txBody>
@@ -8664,11 +8357,11 @@
 </file>
 
 <file path=ppt/slides/slide9.xml><?xml version="1.0" encoding="utf-8"?>
-<p:sld xmlns:a="http://schemas.openxmlformats.org/drawingml/2006/main" xmlns:r="http://schemas.openxmlformats.org/officeDocument/2006/relationships" xmlns:mc="http://schemas.openxmlformats.org/markup-compatibility/2006" xmlns:mv="urn:schemas-microsoft-com:mac:vml" xmlns:p="http://schemas.openxmlformats.org/presentationml/2006/main" xmlns:c="http://schemas.openxmlformats.org/drawingml/2006/chart" xmlns:dgm="http://schemas.openxmlformats.org/drawingml/2006/diagram" xmlns:o="urn:schemas-microsoft-com:office:office" xmlns:v="urn:schemas-microsoft-com:vml" xmlns:pvml="urn:schemas-microsoft-com:office:powerpoint" xmlns:com="http://schemas.openxmlformats.org/drawingml/2006/compatibility" xmlns:p14="http://schemas.microsoft.com/office/powerpoint/2010/main" xmlns:p15="http://schemas.microsoft.com/office/powerpoint/2012/main" xmlns:ahyp="http://schemas.microsoft.com/office/drawing/2018/hyperlinkcolor">
+<p:sld xmlns:a="http://schemas.openxmlformats.org/drawingml/2006/main" xmlns:r="http://schemas.openxmlformats.org/officeDocument/2006/relationships" xmlns:p="http://schemas.openxmlformats.org/presentationml/2006/main">
   <p:cSld>
     <p:spTree>
       <p:nvGrpSpPr>
-        <p:cNvPr id="106" name="Shape 106"/>
+        <p:cNvPr id="1" name="Shape 106"/>
         <p:cNvGrpSpPr/>
         <p:nvPr/>
       </p:nvGrpSpPr>
@@ -8683,7 +8376,9 @@
       <p:sp>
         <p:nvSpPr>
           <p:cNvPr id="107" name="Google Shape;107;p21"/>
-          <p:cNvSpPr txBox="1"/>
+          <p:cNvSpPr txBox="1">
+            <a:spLocks noGrp="1"/>
+          </p:cNvSpPr>
           <p:nvPr>
             <p:ph type="title"/>
           </p:nvPr>
@@ -8698,12 +8393,12 @@
           </a:prstGeom>
         </p:spPr>
         <p:txBody>
-          <a:bodyPr anchorCtr="0" anchor="t" bIns="91425" lIns="91425" spcFirstLastPara="1" rIns="91425" wrap="square" tIns="91425">
+          <a:bodyPr spcFirstLastPara="1" wrap="square" lIns="91425" tIns="91425" rIns="91425" bIns="91425" anchor="t" anchorCtr="0">
             <a:noAutofit/>
           </a:bodyPr>
           <a:lstStyle/>
           <a:p>
-            <a:pPr indent="0" lvl="0" marL="0" rtl="0" algn="l">
+            <a:pPr marL="0" lvl="0" indent="0" algn="l" rtl="0">
               <a:spcBef>
                 <a:spcPts val="0"/>
               </a:spcBef>
@@ -8723,9 +8418,11 @@
       <p:sp>
         <p:nvSpPr>
           <p:cNvPr id="108" name="Google Shape;108;p21"/>
-          <p:cNvSpPr txBox="1"/>
+          <p:cNvSpPr txBox="1">
+            <a:spLocks noGrp="1"/>
+          </p:cNvSpPr>
           <p:nvPr>
-            <p:ph idx="1" type="body"/>
+            <p:ph type="body" idx="1"/>
           </p:nvPr>
         </p:nvSpPr>
         <p:spPr>
@@ -8738,12 +8435,12 @@
           </a:prstGeom>
         </p:spPr>
         <p:txBody>
-          <a:bodyPr anchorCtr="0" anchor="t" bIns="91425" lIns="91425" spcFirstLastPara="1" rIns="91425" wrap="square" tIns="91425">
+          <a:bodyPr spcFirstLastPara="1" wrap="square" lIns="91425" tIns="91425" rIns="91425" bIns="91425" anchor="t" anchorCtr="0">
             <a:noAutofit/>
           </a:bodyPr>
           <a:lstStyle/>
           <a:p>
-            <a:pPr indent="-381000" lvl="0" marL="457200" rtl="0" algn="l">
+            <a:pPr marL="457200" lvl="0" indent="-381000" algn="l" rtl="0">
               <a:spcBef>
                 <a:spcPts val="0"/>
               </a:spcBef>
@@ -8760,7 +8457,7 @@
             <a:endParaRPr/>
           </a:p>
           <a:p>
-            <a:pPr indent="-381000" lvl="0" marL="457200" rtl="0" algn="l">
+            <a:pPr marL="457200" lvl="0" indent="-381000" algn="l" rtl="0">
               <a:spcBef>
                 <a:spcPts val="0"/>
               </a:spcBef>
@@ -8777,7 +8474,7 @@
             <a:endParaRPr/>
           </a:p>
           <a:p>
-            <a:pPr indent="-381000" lvl="0" marL="457200" rtl="0" algn="l">
+            <a:pPr marL="457200" lvl="0" indent="-381000" algn="l" rtl="0">
               <a:spcBef>
                 <a:spcPts val="0"/>
               </a:spcBef>
@@ -8804,7 +8501,7 @@
 </file>
 
 <file path=ppt/theme/theme1.xml><?xml version="1.0" encoding="utf-8"?>
-<a:theme xmlns:a="http://schemas.openxmlformats.org/drawingml/2006/main" xmlns:r="http://schemas.openxmlformats.org/officeDocument/2006/relationships" name="Spearmint">
+<a:theme xmlns:a="http://schemas.openxmlformats.org/drawingml/2006/main" name="Spearmint">
   <a:themeElements>
     <a:clrScheme name="Spearmint">
       <a:dk1>
@@ -9079,11 +8776,13 @@
       </a:bgFillStyleLst>
     </a:fmtScheme>
   </a:themeElements>
+  <a:objectDefaults/>
+  <a:extraClrSchemeLst/>
 </a:theme>
 </file>
 
 <file path=ppt/theme/theme2.xml><?xml version="1.0" encoding="utf-8"?>
-<a:theme xmlns:a="http://schemas.openxmlformats.org/drawingml/2006/main" xmlns:r="http://schemas.openxmlformats.org/officeDocument/2006/relationships">
+<a:theme xmlns:a="http://schemas.openxmlformats.org/drawingml/2006/main">
   <a:themeElements>
     <a:clrScheme name="Default">
       <a:dk1>
@@ -9358,5 +9057,7 @@
       </a:bgFillStyleLst>
     </a:fmtScheme>
   </a:themeElements>
+  <a:objectDefaults/>
+  <a:extraClrSchemeLst/>
 </a:theme>
 </file>